--- a/03_burden_calculations.pptx
+++ b/03_burden_calculations.pptx
@@ -15,6 +15,7 @@
     <p:sldId id="263" r:id="rId9"/>
     <p:sldId id="264" r:id="rId10"/>
     <p:sldId id="265" r:id="rId11"/>
+    <p:sldId id="266" r:id="rId12"/>
   </p:sldIdLst>
   <p:sldSz cx="9144000" cy="5143500" type="screen16x9"/>
   <p:notesSz cx="6858000" cy="9144000"/>
@@ -3152,8 +3153,6 @@
             <a:pPr lvl="0" indent="0" marL="0">
               <a:buNone/>
             </a:pPr>
-            <a:br/>
-            <a:br/>
             <a:r>
               <a:rPr/>
               <a:t>Matthias Lochmann</a:t>
@@ -3167,6 +3166,58 @@
 </file>
 
 <file path=ppt/slides/slide10.xml><?xml version="1.0" encoding="utf-8"?>
+<p:sld xmlns:a="http://schemas.openxmlformats.org/drawingml/2006/main" xmlns:r="http://schemas.openxmlformats.org/officeDocument/2006/relationships" xmlns:p="http://schemas.openxmlformats.org/presentationml/2006/main">
+  <p:cSld>
+    <p:spTree>
+      <p:nvGrpSpPr>
+        <p:cNvPr id="1" name=""/>
+        <p:cNvGrpSpPr/>
+        <p:nvPr/>
+      </p:nvGrpSpPr>
+      <p:grpSpPr>
+        <a:xfrm>
+          <a:off x="0" y="0"/>
+          <a:ext cx="0" cy="0"/>
+          <a:chOff x="0" y="0"/>
+          <a:chExt cx="0" cy="0"/>
+        </a:xfrm>
+      </p:grpSpPr>
+      <p:pic>
+        <p:nvPicPr>
+          <p:cNvPr descr="03_burden_calculations_files/figure-pptx/plotKAGZRM_burden-1.png" id="0" name="Picture 1"/>
+          <p:cNvPicPr>
+            <a:picLocks noGrp="1" noChangeAspect="1"/>
+          </p:cNvPicPr>
+          <p:nvPr/>
+        </p:nvPicPr>
+        <p:blipFill>
+          <a:blip r:embed="rId2"/>
+          <a:stretch>
+            <a:fillRect/>
+          </a:stretch>
+        </p:blipFill>
+        <p:spPr bwMode="auto">
+          <a:xfrm>
+            <a:off x="1181100" y="1193800"/>
+            <a:ext cx="6781800" cy="3390900"/>
+          </a:xfrm>
+          <a:prstGeom prst="rect">
+            <a:avLst/>
+          </a:prstGeom>
+          <a:noFill/>
+          <a:ln w="9525">
+            <a:noFill/>
+            <a:headEnd/>
+            <a:tailEnd/>
+          </a:ln>
+        </p:spPr>
+      </p:pic>
+    </p:spTree>
+  </p:cSld>
+</p:sld>
+</file>
+
+<file path=ppt/slides/slide11.xml><?xml version="1.0" encoding="utf-8"?>
 <p:sld xmlns:a="http://schemas.openxmlformats.org/drawingml/2006/main" xmlns:r="http://schemas.openxmlformats.org/officeDocument/2006/relationships" xmlns:p="http://schemas.openxmlformats.org/presentationml/2006/main">
   <p:cSld>
     <p:spTree>
@@ -3210,7 +3261,7 @@
   &lt;chr&gt;                   &lt;dbl&gt;
 1 High noise annoyance   28198.
 2 High sleep disturbance  7467.
-3 Reading Comprehension    355.</a:t>
+3 Reading Comprehension  11376.</a:t>
             </a:r>
           </a:p>
         </p:txBody>
@@ -3319,7 +3370,12 @@
             <p:ph type="title"/>
           </p:nvPr>
         </p:nvSpPr>
-        <p:spPr/>
+        <p:spPr>
+          <a:xfrm>
+            <a:off x="457201" y="204787"/>
+            <a:ext cx="3008313" cy="871538"/>
+          </a:xfrm>
+        </p:spPr>
         <p:txBody>
           <a:bodyPr/>
           <a:lstStyle/>
@@ -3336,12 +3392,12 @@
       </p:sp>
       <p:sp>
         <p:nvSpPr>
-          <p:cNvPr id="3" name="Content Placeholder 2"/>
+          <p:cNvPr id="4" name="Text Placeholder 3"/>
           <p:cNvSpPr>
             <a:spLocks noGrp="1"/>
           </p:cNvSpPr>
           <p:nvPr>
-            <p:ph idx="1"/>
+            <p:ph idx="2" sz="half" type="body"/>
           </p:nvPr>
         </p:nvSpPr>
         <p:spPr/>
@@ -3355,6 +3411,77 @@
             <a:r>
               <a:rPr/>
               <a:t>ETCHE-, HLNUG- sowie Destatis Daten laden.</a:t>
+            </a:r>
+          </a:p>
+          <a:p>
+            <a:pPr lvl="0" indent="0" marL="0">
+              <a:buNone/>
+            </a:pPr>
+            <a:r>
+              <a:rPr/>
+              <a:t>In Figure 1 all ERFs are on display.</a:t>
+            </a:r>
+          </a:p>
+        </p:txBody>
+      </p:sp>
+      <p:pic>
+        <p:nvPicPr>
+          <p:cNvPr descr="03_burden_calculations_files/figure-pptx/fig-plotERFs-1.png" id="0" name="Picture 1"/>
+          <p:cNvPicPr>
+            <a:picLocks noGrp="1" noChangeAspect="1"/>
+          </p:cNvPicPr>
+          <p:nvPr/>
+        </p:nvPicPr>
+        <p:blipFill>
+          <a:blip r:embed="rId2"/>
+          <a:stretch>
+            <a:fillRect/>
+          </a:stretch>
+        </p:blipFill>
+        <p:spPr bwMode="auto">
+          <a:xfrm>
+            <a:off x="3568700" y="863600"/>
+            <a:ext cx="5105400" cy="2552700"/>
+          </a:xfrm>
+          <a:prstGeom prst="rect">
+            <a:avLst/>
+          </a:prstGeom>
+          <a:noFill/>
+          <a:ln w="9525">
+            <a:noFill/>
+            <a:headEnd/>
+            <a:tailEnd/>
+          </a:ln>
+        </p:spPr>
+      </p:pic>
+      <p:sp>
+        <p:nvSpPr>
+          <p:cNvPr id="1" name="TextBox 3"/>
+          <p:cNvSpPr txBox="1"/>
+          <p:nvPr>
+            <p:ph idx="1"/>
+          </p:nvPr>
+        </p:nvSpPr>
+        <p:spPr>
+          <a:xfrm>
+            <a:off x="3568700" y="4076700"/>
+            <a:ext cx="5105400" cy="508000"/>
+          </a:xfrm>
+          <a:prstGeom prst="rect">
+            <a:avLst/>
+          </a:prstGeom>
+          <a:noFill/>
+        </p:spPr>
+        <p:txBody>
+          <a:bodyPr/>
+          <a:lstStyle/>
+          <a:p>
+            <a:pPr lvl="0" indent="0" marL="0" algn="ctr">
+              <a:buNone/>
+            </a:pPr>
+            <a:r>
+              <a:rPr/>
+              <a:t>Figure 1: Overview of all imported ERF.</a:t>
             </a:r>
           </a:p>
         </p:txBody>
@@ -3726,7 +3853,7 @@
                       </a:pPr>
                       <a:r>
                         <a:rPr/>
-                        <a:t>air</a:t>
+                        <a:t>road</a:t>
                       </a:r>
                     </a:p>
                   </a:txBody>
@@ -3756,52 +3883,52 @@
                       </a:pPr>
                       <a:r>
                         <a:rPr/>
-                        <a:t>major</a:t>
-                      </a:r>
-                    </a:p>
-                  </a:txBody>
-                </a:tc>
-                <a:tc>
-                  <a:txBody>
-                    <a:bodyPr/>
-                    <a:lstStyle/>
-                    <a:p>
-                      <a:pPr lvl="0" indent="0" marL="0" algn="l">
-                        <a:buNone/>
-                      </a:pPr>
-                      <a:r>
-                        <a:rPr/>
-                        <a:t>All-cause mortality</a:t>
-                      </a:r>
-                    </a:p>
-                  </a:txBody>
-                </a:tc>
-                <a:tc>
-                  <a:txBody>
-                    <a:bodyPr/>
-                    <a:lstStyle/>
-                    <a:p>
-                      <a:pPr lvl="0" indent="0" marL="0" algn="r">
-                        <a:buNone/>
-                      </a:pPr>
-                      <a:r>
-                        <a:rPr/>
-                        <a:t>215</a:t>
-                      </a:r>
-                    </a:p>
-                  </a:txBody>
-                </a:tc>
-                <a:tc>
-                  <a:txBody>
-                    <a:bodyPr/>
-                    <a:lstStyle/>
-                    <a:p>
-                      <a:pPr lvl="0" indent="0" marL="0" algn="r">
-                        <a:buNone/>
-                      </a:pPr>
-                      <a:r>
-                        <a:rPr/>
-                        <a:t>381247</a:t>
+                        <a:t>all</a:t>
+                      </a:r>
+                    </a:p>
+                  </a:txBody>
+                </a:tc>
+                <a:tc>
+                  <a:txBody>
+                    <a:bodyPr/>
+                    <a:lstStyle/>
+                    <a:p>
+                      <a:pPr lvl="0" indent="0" marL="0" algn="l">
+                        <a:buNone/>
+                      </a:pPr>
+                      <a:r>
+                        <a:rPr/>
+                        <a:t>High noise annoyance</a:t>
+                      </a:r>
+                    </a:p>
+                  </a:txBody>
+                </a:tc>
+                <a:tc>
+                  <a:txBody>
+                    <a:bodyPr/>
+                    <a:lstStyle/>
+                    <a:p>
+                      <a:pPr lvl="0" indent="0" marL="0" algn="r">
+                        <a:buNone/>
+                      </a:pPr>
+                      <a:r>
+                        <a:rPr/>
+                        <a:t>30</a:t>
+                      </a:r>
+                    </a:p>
+                  </a:txBody>
+                </a:tc>
+                <a:tc>
+                  <a:txBody>
+                    <a:bodyPr/>
+                    <a:lstStyle/>
+                    <a:p>
+                      <a:pPr lvl="0" indent="0" marL="0" algn="r">
+                        <a:buNone/>
+                      </a:pPr>
+                      <a:r>
+                        <a:rPr/>
+                        <a:t>688104</a:t>
                       </a:r>
                     </a:p>
                   </a:txBody>
@@ -3818,7 +3945,7 @@
                       </a:pPr>
                       <a:r>
                         <a:rPr/>
-                        <a:t>air</a:t>
+                        <a:t>road</a:t>
                       </a:r>
                     </a:p>
                   </a:txBody>
@@ -3848,52 +3975,52 @@
                       </a:pPr>
                       <a:r>
                         <a:rPr/>
-                        <a:t>major</a:t>
-                      </a:r>
-                    </a:p>
-                  </a:txBody>
-                </a:tc>
-                <a:tc>
-                  <a:txBody>
-                    <a:bodyPr/>
-                    <a:lstStyle/>
-                    <a:p>
-                      <a:pPr lvl="0" indent="0" marL="0" algn="l">
-                        <a:buNone/>
-                      </a:pPr>
-                      <a:r>
-                        <a:rPr/>
-                        <a:t>Cardiovascular disease</a:t>
-                      </a:r>
-                    </a:p>
-                  </a:txBody>
-                </a:tc>
-                <a:tc>
-                  <a:txBody>
-                    <a:bodyPr/>
-                    <a:lstStyle/>
-                    <a:p>
-                      <a:pPr lvl="0" indent="0" marL="0" algn="r">
-                        <a:buNone/>
-                      </a:pPr>
-                      <a:r>
-                        <a:rPr/>
-                        <a:t>215</a:t>
-                      </a:r>
-                    </a:p>
-                  </a:txBody>
-                </a:tc>
-                <a:tc>
-                  <a:txBody>
-                    <a:bodyPr/>
-                    <a:lstStyle/>
-                    <a:p>
-                      <a:pPr lvl="0" indent="0" marL="0" algn="r">
-                        <a:buNone/>
-                      </a:pPr>
-                      <a:r>
-                        <a:rPr/>
-                        <a:t>381247</a:t>
+                        <a:t>all</a:t>
+                      </a:r>
+                    </a:p>
+                  </a:txBody>
+                </a:tc>
+                <a:tc>
+                  <a:txBody>
+                    <a:bodyPr/>
+                    <a:lstStyle/>
+                    <a:p>
+                      <a:pPr lvl="0" indent="0" marL="0" algn="l">
+                        <a:buNone/>
+                      </a:pPr>
+                      <a:r>
+                        <a:rPr/>
+                        <a:t>All-cause mortality</a:t>
+                      </a:r>
+                    </a:p>
+                  </a:txBody>
+                </a:tc>
+                <a:tc>
+                  <a:txBody>
+                    <a:bodyPr/>
+                    <a:lstStyle/>
+                    <a:p>
+                      <a:pPr lvl="0" indent="0" marL="0" algn="r">
+                        <a:buNone/>
+                      </a:pPr>
+                      <a:r>
+                        <a:rPr/>
+                        <a:t>30</a:t>
+                      </a:r>
+                    </a:p>
+                  </a:txBody>
+                </a:tc>
+                <a:tc>
+                  <a:txBody>
+                    <a:bodyPr/>
+                    <a:lstStyle/>
+                    <a:p>
+                      <a:pPr lvl="0" indent="0" marL="0" algn="r">
+                        <a:buNone/>
+                      </a:pPr>
+                      <a:r>
+                        <a:rPr/>
+                        <a:t>688104</a:t>
                       </a:r>
                     </a:p>
                   </a:txBody>
@@ -3910,7 +4037,7 @@
                       </a:pPr>
                       <a:r>
                         <a:rPr/>
-                        <a:t>air</a:t>
+                        <a:t>road</a:t>
                       </a:r>
                     </a:p>
                   </a:txBody>
@@ -3940,52 +4067,52 @@
                       </a:pPr>
                       <a:r>
                         <a:rPr/>
-                        <a:t>major</a:t>
-                      </a:r>
-                    </a:p>
-                  </a:txBody>
-                </a:tc>
-                <a:tc>
-                  <a:txBody>
-                    <a:bodyPr/>
-                    <a:lstStyle/>
-                    <a:p>
-                      <a:pPr lvl="0" indent="0" marL="0" algn="l">
-                        <a:buNone/>
-                      </a:pPr>
-                      <a:r>
-                        <a:rPr/>
-                        <a:t>Diabetes</a:t>
-                      </a:r>
-                    </a:p>
-                  </a:txBody>
-                </a:tc>
-                <a:tc>
-                  <a:txBody>
-                    <a:bodyPr/>
-                    <a:lstStyle/>
-                    <a:p>
-                      <a:pPr lvl="0" indent="0" marL="0" algn="r">
-                        <a:buNone/>
-                      </a:pPr>
-                      <a:r>
-                        <a:rPr/>
-                        <a:t>215</a:t>
-                      </a:r>
-                    </a:p>
-                  </a:txBody>
-                </a:tc>
-                <a:tc>
-                  <a:txBody>
-                    <a:bodyPr/>
-                    <a:lstStyle/>
-                    <a:p>
-                      <a:pPr lvl="0" indent="0" marL="0" algn="r">
-                        <a:buNone/>
-                      </a:pPr>
-                      <a:r>
-                        <a:rPr/>
-                        <a:t>381247</a:t>
+                        <a:t>all</a:t>
+                      </a:r>
+                    </a:p>
+                  </a:txBody>
+                </a:tc>
+                <a:tc>
+                  <a:txBody>
+                    <a:bodyPr/>
+                    <a:lstStyle/>
+                    <a:p>
+                      <a:pPr lvl="0" indent="0" marL="0" algn="l">
+                        <a:buNone/>
+                      </a:pPr>
+                      <a:r>
+                        <a:rPr/>
+                        <a:t>Cardiovascular disease</a:t>
+                      </a:r>
+                    </a:p>
+                  </a:txBody>
+                </a:tc>
+                <a:tc>
+                  <a:txBody>
+                    <a:bodyPr/>
+                    <a:lstStyle/>
+                    <a:p>
+                      <a:pPr lvl="0" indent="0" marL="0" algn="r">
+                        <a:buNone/>
+                      </a:pPr>
+                      <a:r>
+                        <a:rPr/>
+                        <a:t>30</a:t>
+                      </a:r>
+                    </a:p>
+                  </a:txBody>
+                </a:tc>
+                <a:tc>
+                  <a:txBody>
+                    <a:bodyPr/>
+                    <a:lstStyle/>
+                    <a:p>
+                      <a:pPr lvl="0" indent="0" marL="0" algn="r">
+                        <a:buNone/>
+                      </a:pPr>
+                      <a:r>
+                        <a:rPr/>
+                        <a:t>688104</a:t>
                       </a:r>
                     </a:p>
                   </a:txBody>
@@ -4002,7 +4129,7 @@
                       </a:pPr>
                       <a:r>
                         <a:rPr/>
-                        <a:t>air</a:t>
+                        <a:t>road</a:t>
                       </a:r>
                     </a:p>
                   </a:txBody>
@@ -4032,52 +4159,52 @@
                       </a:pPr>
                       <a:r>
                         <a:rPr/>
-                        <a:t>major</a:t>
-                      </a:r>
-                    </a:p>
-                  </a:txBody>
-                </a:tc>
-                <a:tc>
-                  <a:txBody>
-                    <a:bodyPr/>
-                    <a:lstStyle/>
-                    <a:p>
-                      <a:pPr lvl="0" indent="0" marL="0" algn="l">
-                        <a:buNone/>
-                      </a:pPr>
-                      <a:r>
-                        <a:rPr/>
-                        <a:t>High noise annoyance</a:t>
-                      </a:r>
-                    </a:p>
-                  </a:txBody>
-                </a:tc>
-                <a:tc>
-                  <a:txBody>
-                    <a:bodyPr/>
-                    <a:lstStyle/>
-                    <a:p>
-                      <a:pPr lvl="0" indent="0" marL="0" algn="r">
-                        <a:buNone/>
-                      </a:pPr>
-                      <a:r>
-                        <a:rPr/>
-                        <a:t>215</a:t>
-                      </a:r>
-                    </a:p>
-                  </a:txBody>
-                </a:tc>
-                <a:tc>
-                  <a:txBody>
-                    <a:bodyPr/>
-                    <a:lstStyle/>
-                    <a:p>
-                      <a:pPr lvl="0" indent="0" marL="0" algn="r">
-                        <a:buNone/>
-                      </a:pPr>
-                      <a:r>
-                        <a:rPr/>
-                        <a:t>381247</a:t>
+                        <a:t>all</a:t>
+                      </a:r>
+                    </a:p>
+                  </a:txBody>
+                </a:tc>
+                <a:tc>
+                  <a:txBody>
+                    <a:bodyPr/>
+                    <a:lstStyle/>
+                    <a:p>
+                      <a:pPr lvl="0" indent="0" marL="0" algn="l">
+                        <a:buNone/>
+                      </a:pPr>
+                      <a:r>
+                        <a:rPr/>
+                        <a:t>Diabetes</a:t>
+                      </a:r>
+                    </a:p>
+                  </a:txBody>
+                </a:tc>
+                <a:tc>
+                  <a:txBody>
+                    <a:bodyPr/>
+                    <a:lstStyle/>
+                    <a:p>
+                      <a:pPr lvl="0" indent="0" marL="0" algn="r">
+                        <a:buNone/>
+                      </a:pPr>
+                      <a:r>
+                        <a:rPr/>
+                        <a:t>30</a:t>
+                      </a:r>
+                    </a:p>
+                  </a:txBody>
+                </a:tc>
+                <a:tc>
+                  <a:txBody>
+                    <a:bodyPr/>
+                    <a:lstStyle/>
+                    <a:p>
+                      <a:pPr lvl="0" indent="0" marL="0" algn="r">
+                        <a:buNone/>
+                      </a:pPr>
+                      <a:r>
+                        <a:rPr/>
+                        <a:t>688104</a:t>
                       </a:r>
                     </a:p>
                   </a:txBody>
@@ -4094,7 +4221,7 @@
                       </a:pPr>
                       <a:r>
                         <a:rPr/>
-                        <a:t>air</a:t>
+                        <a:t>road</a:t>
                       </a:r>
                     </a:p>
                   </a:txBody>
@@ -4124,52 +4251,52 @@
                       </a:pPr>
                       <a:r>
                         <a:rPr/>
-                        <a:t>major</a:t>
-                      </a:r>
-                    </a:p>
-                  </a:txBody>
-                </a:tc>
-                <a:tc>
-                  <a:txBody>
-                    <a:bodyPr/>
-                    <a:lstStyle/>
-                    <a:p>
-                      <a:pPr lvl="0" indent="0" marL="0" algn="l">
-                        <a:buNone/>
-                      </a:pPr>
-                      <a:r>
-                        <a:rPr/>
-                        <a:t>High sleep disturbance</a:t>
-                      </a:r>
-                    </a:p>
-                  </a:txBody>
-                </a:tc>
-                <a:tc>
-                  <a:txBody>
-                    <a:bodyPr/>
-                    <a:lstStyle/>
-                    <a:p>
-                      <a:pPr lvl="0" indent="0" marL="0" algn="r">
-                        <a:buNone/>
-                      </a:pPr>
-                      <a:r>
-                        <a:rPr/>
-                        <a:t>215</a:t>
-                      </a:r>
-                    </a:p>
-                  </a:txBody>
-                </a:tc>
-                <a:tc>
-                  <a:txBody>
-                    <a:bodyPr/>
-                    <a:lstStyle/>
-                    <a:p>
-                      <a:pPr lvl="0" indent="0" marL="0" algn="r">
-                        <a:buNone/>
-                      </a:pPr>
-                      <a:r>
-                        <a:rPr/>
-                        <a:t>82638</a:t>
+                        <a:t>all</a:t>
+                      </a:r>
+                    </a:p>
+                  </a:txBody>
+                </a:tc>
+                <a:tc>
+                  <a:txBody>
+                    <a:bodyPr/>
+                    <a:lstStyle/>
+                    <a:p>
+                      <a:pPr lvl="0" indent="0" marL="0" algn="l">
+                        <a:buNone/>
+                      </a:pPr>
+                      <a:r>
+                        <a:rPr/>
+                        <a:t>Reading Comprehension</a:t>
+                      </a:r>
+                    </a:p>
+                  </a:txBody>
+                </a:tc>
+                <a:tc>
+                  <a:txBody>
+                    <a:bodyPr/>
+                    <a:lstStyle/>
+                    <a:p>
+                      <a:pPr lvl="0" indent="0" marL="0" algn="r">
+                        <a:buNone/>
+                      </a:pPr>
+                      <a:r>
+                        <a:rPr/>
+                        <a:t>30</a:t>
+                      </a:r>
+                    </a:p>
+                  </a:txBody>
+                </a:tc>
+                <a:tc>
+                  <a:txBody>
+                    <a:bodyPr/>
+                    <a:lstStyle/>
+                    <a:p>
+                      <a:pPr lvl="0" indent="0" marL="0" algn="r">
+                        <a:buNone/>
+                      </a:pPr>
+                      <a:r>
+                        <a:rPr/>
+                        <a:t>688104</a:t>
                       </a:r>
                     </a:p>
                   </a:txBody>
@@ -4186,7 +4313,7 @@
                       </a:pPr>
                       <a:r>
                         <a:rPr/>
-                        <a:t>air</a:t>
+                        <a:t>road</a:t>
                       </a:r>
                     </a:p>
                   </a:txBody>
@@ -4216,52 +4343,52 @@
                       </a:pPr>
                       <a:r>
                         <a:rPr/>
-                        <a:t>major</a:t>
-                      </a:r>
-                    </a:p>
-                  </a:txBody>
-                </a:tc>
-                <a:tc>
-                  <a:txBody>
-                    <a:bodyPr/>
-                    <a:lstStyle/>
-                    <a:p>
-                      <a:pPr lvl="0" indent="0" marL="0" algn="l">
-                        <a:buNone/>
-                      </a:pPr>
-                      <a:r>
-                        <a:rPr/>
-                        <a:t>Reading Comprehension</a:t>
-                      </a:r>
-                    </a:p>
-                  </a:txBody>
-                </a:tc>
-                <a:tc>
-                  <a:txBody>
-                    <a:bodyPr/>
-                    <a:lstStyle/>
-                    <a:p>
-                      <a:pPr lvl="0" indent="0" marL="0" algn="r">
-                        <a:buNone/>
-                      </a:pPr>
-                      <a:r>
-                        <a:rPr/>
-                        <a:t>215</a:t>
-                      </a:r>
-                    </a:p>
-                  </a:txBody>
-                </a:tc>
-                <a:tc>
-                  <a:txBody>
-                    <a:bodyPr/>
-                    <a:lstStyle/>
-                    <a:p>
-                      <a:pPr lvl="0" indent="0" marL="0" algn="r">
-                        <a:buNone/>
-                      </a:pPr>
-                      <a:r>
-                        <a:rPr/>
-                        <a:t>381247</a:t>
+                        <a:t>all</a:t>
+                      </a:r>
+                    </a:p>
+                  </a:txBody>
+                </a:tc>
+                <a:tc>
+                  <a:txBody>
+                    <a:bodyPr/>
+                    <a:lstStyle/>
+                    <a:p>
+                      <a:pPr lvl="0" indent="0" marL="0" algn="l">
+                        <a:buNone/>
+                      </a:pPr>
+                      <a:r>
+                        <a:rPr/>
+                        <a:t>Behavioural problems</a:t>
+                      </a:r>
+                    </a:p>
+                  </a:txBody>
+                </a:tc>
+                <a:tc>
+                  <a:txBody>
+                    <a:bodyPr/>
+                    <a:lstStyle/>
+                    <a:p>
+                      <a:pPr lvl="0" indent="0" marL="0" algn="r">
+                        <a:buNone/>
+                      </a:pPr>
+                      <a:r>
+                        <a:rPr/>
+                        <a:t>30</a:t>
+                      </a:r>
+                    </a:p>
+                  </a:txBody>
+                </a:tc>
+                <a:tc>
+                  <a:txBody>
+                    <a:bodyPr/>
+                    <a:lstStyle/>
+                    <a:p>
+                      <a:pPr lvl="0" indent="0" marL="0" algn="r">
+                        <a:buNone/>
+                      </a:pPr>
+                      <a:r>
+                        <a:rPr/>
+                        <a:t>688104</a:t>
                       </a:r>
                     </a:p>
                   </a:txBody>
@@ -4278,22 +4405,22 @@
                       </a:pPr>
                       <a:r>
                         <a:rPr/>
-                        <a:t>air</a:t>
-                      </a:r>
-                    </a:p>
-                  </a:txBody>
-                </a:tc>
-                <a:tc>
-                  <a:txBody>
-                    <a:bodyPr/>
-                    <a:lstStyle/>
-                    <a:p>
-                      <a:pPr lvl="0" indent="0" marL="0" algn="l">
-                        <a:buNone/>
-                      </a:pPr>
-                      <a:r>
-                        <a:rPr/>
-                        <a:t>EEA</a:t>
+                        <a:t>road</a:t>
+                      </a:r>
+                    </a:p>
+                  </a:txBody>
+                </a:tc>
+                <a:tc>
+                  <a:txBody>
+                    <a:bodyPr/>
+                    <a:lstStyle/>
+                    <a:p>
+                      <a:pPr lvl="0" indent="0" marL="0" algn="l">
+                        <a:buNone/>
+                      </a:pPr>
+                      <a:r>
+                        <a:rPr/>
+                        <a:t>Bundesland</a:t>
                       </a:r>
                     </a:p>
                   </a:txBody>
@@ -4323,37 +4450,37 @@
                       </a:pPr>
                       <a:r>
                         <a:rPr/>
-                        <a:t>All-cause mortality</a:t>
-                      </a:r>
-                    </a:p>
-                  </a:txBody>
-                </a:tc>
-                <a:tc>
-                  <a:txBody>
-                    <a:bodyPr/>
-                    <a:lstStyle/>
-                    <a:p>
-                      <a:pPr lvl="0" indent="0" marL="0" algn="r">
-                        <a:buNone/>
-                      </a:pPr>
-                      <a:r>
-                        <a:rPr/>
-                        <a:t>360</a:t>
-                      </a:r>
-                    </a:p>
-                  </a:txBody>
-                </a:tc>
-                <a:tc>
-                  <a:txBody>
-                    <a:bodyPr/>
-                    <a:lstStyle/>
-                    <a:p>
-                      <a:pPr lvl="0" indent="0" marL="0" algn="r">
-                        <a:buNone/>
-                      </a:pPr>
-                      <a:r>
-                        <a:rPr/>
-                        <a:t>474800</a:t>
+                        <a:t>Overweight</a:t>
+                      </a:r>
+                    </a:p>
+                  </a:txBody>
+                </a:tc>
+                <a:tc>
+                  <a:txBody>
+                    <a:bodyPr/>
+                    <a:lstStyle/>
+                    <a:p>
+                      <a:pPr lvl="0" indent="0" marL="0" algn="r">
+                        <a:buNone/>
+                      </a:pPr>
+                      <a:r>
+                        <a:rPr/>
+                        <a:t>30</a:t>
+                      </a:r>
+                    </a:p>
+                  </a:txBody>
+                </a:tc>
+                <a:tc>
+                  <a:txBody>
+                    <a:bodyPr/>
+                    <a:lstStyle/>
+                    <a:p>
+                      <a:pPr lvl="0" indent="0" marL="0" algn="r">
+                        <a:buNone/>
+                      </a:pPr>
+                      <a:r>
+                        <a:rPr/>
+                        <a:t>688104</a:t>
                       </a:r>
                     </a:p>
                   </a:txBody>
@@ -4370,22 +4497,22 @@
                       </a:pPr>
                       <a:r>
                         <a:rPr/>
-                        <a:t>air</a:t>
-                      </a:r>
-                    </a:p>
-                  </a:txBody>
-                </a:tc>
-                <a:tc>
-                  <a:txBody>
-                    <a:bodyPr/>
-                    <a:lstStyle/>
-                    <a:p>
-                      <a:pPr lvl="0" indent="0" marL="0" algn="l">
-                        <a:buNone/>
-                      </a:pPr>
-                      <a:r>
-                        <a:rPr/>
-                        <a:t>EEA</a:t>
+                        <a:t>road</a:t>
+                      </a:r>
+                    </a:p>
+                  </a:txBody>
+                </a:tc>
+                <a:tc>
+                  <a:txBody>
+                    <a:bodyPr/>
+                    <a:lstStyle/>
+                    <a:p>
+                      <a:pPr lvl="0" indent="0" marL="0" algn="l">
+                        <a:buNone/>
+                      </a:pPr>
+                      <a:r>
+                        <a:rPr/>
+                        <a:t>Bundesland</a:t>
                       </a:r>
                     </a:p>
                   </a:txBody>
@@ -4415,37 +4542,37 @@
                       </a:pPr>
                       <a:r>
                         <a:rPr/>
-                        <a:t>Cardiovascular disease</a:t>
-                      </a:r>
-                    </a:p>
-                  </a:txBody>
-                </a:tc>
-                <a:tc>
-                  <a:txBody>
-                    <a:bodyPr/>
-                    <a:lstStyle/>
-                    <a:p>
-                      <a:pPr lvl="0" indent="0" marL="0" algn="r">
-                        <a:buNone/>
-                      </a:pPr>
-                      <a:r>
-                        <a:rPr/>
-                        <a:t>360</a:t>
-                      </a:r>
-                    </a:p>
-                  </a:txBody>
-                </a:tc>
-                <a:tc>
-                  <a:txBody>
-                    <a:bodyPr/>
-                    <a:lstStyle/>
-                    <a:p>
-                      <a:pPr lvl="0" indent="0" marL="0" algn="r">
-                        <a:buNone/>
-                      </a:pPr>
-                      <a:r>
-                        <a:rPr/>
-                        <a:t>474800</a:t>
+                        <a:t>High sleep disturbance</a:t>
+                      </a:r>
+                    </a:p>
+                  </a:txBody>
+                </a:tc>
+                <a:tc>
+                  <a:txBody>
+                    <a:bodyPr/>
+                    <a:lstStyle/>
+                    <a:p>
+                      <a:pPr lvl="0" indent="0" marL="0" algn="r">
+                        <a:buNone/>
+                      </a:pPr>
+                      <a:r>
+                        <a:rPr/>
+                        <a:t>30</a:t>
+                      </a:r>
+                    </a:p>
+                  </a:txBody>
+                </a:tc>
+                <a:tc>
+                  <a:txBody>
+                    <a:bodyPr/>
+                    <a:lstStyle/>
+                    <a:p>
+                      <a:pPr lvl="0" indent="0" marL="0" algn="r">
+                        <a:buNone/>
+                      </a:pPr>
+                      <a:r>
+                        <a:rPr/>
+                        <a:t>514053</a:t>
                       </a:r>
                     </a:p>
                   </a:txBody>
@@ -4462,82 +4589,82 @@
                       </a:pPr>
                       <a:r>
                         <a:rPr/>
-                        <a:t>air</a:t>
-                      </a:r>
-                    </a:p>
-                  </a:txBody>
-                </a:tc>
-                <a:tc>
-                  <a:txBody>
-                    <a:bodyPr/>
-                    <a:lstStyle/>
-                    <a:p>
-                      <a:pPr lvl="0" indent="0" marL="0" algn="l">
-                        <a:buNone/>
-                      </a:pPr>
-                      <a:r>
-                        <a:rPr/>
-                        <a:t>EEA</a:t>
-                      </a:r>
-                    </a:p>
-                  </a:txBody>
-                </a:tc>
-                <a:tc>
-                  <a:txBody>
-                    <a:bodyPr/>
-                    <a:lstStyle/>
-                    <a:p>
-                      <a:pPr lvl="0" indent="0" marL="0" algn="l">
-                        <a:buNone/>
-                      </a:pPr>
-                      <a:r>
-                        <a:rPr/>
-                        <a:t>all</a:t>
-                      </a:r>
-                    </a:p>
-                  </a:txBody>
-                </a:tc>
-                <a:tc>
-                  <a:txBody>
-                    <a:bodyPr/>
-                    <a:lstStyle/>
-                    <a:p>
-                      <a:pPr lvl="0" indent="0" marL="0" algn="l">
-                        <a:buNone/>
-                      </a:pPr>
-                      <a:r>
-                        <a:rPr/>
-                        <a:t>Diabetes</a:t>
-                      </a:r>
-                    </a:p>
-                  </a:txBody>
-                </a:tc>
-                <a:tc>
-                  <a:txBody>
-                    <a:bodyPr/>
-                    <a:lstStyle/>
-                    <a:p>
-                      <a:pPr lvl="0" indent="0" marL="0" algn="r">
-                        <a:buNone/>
-                      </a:pPr>
-                      <a:r>
-                        <a:rPr/>
-                        <a:t>360</a:t>
-                      </a:r>
-                    </a:p>
-                  </a:txBody>
-                </a:tc>
-                <a:tc>
-                  <a:txBody>
-                    <a:bodyPr/>
-                    <a:lstStyle/>
-                    <a:p>
-                      <a:pPr lvl="0" indent="0" marL="0" algn="r">
-                        <a:buNone/>
-                      </a:pPr>
-                      <a:r>
-                        <a:rPr/>
-                        <a:t>474800</a:t>
+                        <a:t>road</a:t>
+                      </a:r>
+                    </a:p>
+                  </a:txBody>
+                </a:tc>
+                <a:tc>
+                  <a:txBody>
+                    <a:bodyPr/>
+                    <a:lstStyle/>
+                    <a:p>
+                      <a:pPr lvl="0" indent="0" marL="0" algn="l">
+                        <a:buNone/>
+                      </a:pPr>
+                      <a:r>
+                        <a:rPr/>
+                        <a:t>Bundesland</a:t>
+                      </a:r>
+                    </a:p>
+                  </a:txBody>
+                </a:tc>
+                <a:tc>
+                  <a:txBody>
+                    <a:bodyPr/>
+                    <a:lstStyle/>
+                    <a:p>
+                      <a:pPr lvl="0" indent="0" marL="0" algn="l">
+                        <a:buNone/>
+                      </a:pPr>
+                      <a:r>
+                        <a:rPr/>
+                        <a:t>major</a:t>
+                      </a:r>
+                    </a:p>
+                  </a:txBody>
+                </a:tc>
+                <a:tc>
+                  <a:txBody>
+                    <a:bodyPr/>
+                    <a:lstStyle/>
+                    <a:p>
+                      <a:pPr lvl="0" indent="0" marL="0" algn="l">
+                        <a:buNone/>
+                      </a:pPr>
+                      <a:r>
+                        <a:rPr/>
+                        <a:t>High noise annoyance</a:t>
+                      </a:r>
+                    </a:p>
+                  </a:txBody>
+                </a:tc>
+                <a:tc>
+                  <a:txBody>
+                    <a:bodyPr/>
+                    <a:lstStyle/>
+                    <a:p>
+                      <a:pPr lvl="0" indent="0" marL="0" algn="r">
+                        <a:buNone/>
+                      </a:pPr>
+                      <a:r>
+                        <a:rPr/>
+                        <a:t>8700</a:t>
+                      </a:r>
+                    </a:p>
+                  </a:txBody>
+                </a:tc>
+                <a:tc>
+                  <a:txBody>
+                    <a:bodyPr/>
+                    <a:lstStyle/>
+                    <a:p>
+                      <a:pPr lvl="0" indent="0" marL="0" algn="r">
+                        <a:buNone/>
+                      </a:pPr>
+                      <a:r>
+                        <a:rPr/>
+                        <a:t>2909567</a:t>
                       </a:r>
                     </a:p>
                   </a:txBody>
@@ -4554,82 +4681,82 @@
                       </a:pPr>
                       <a:r>
                         <a:rPr/>
-                        <a:t>air</a:t>
-                      </a:r>
-                    </a:p>
-                  </a:txBody>
-                </a:tc>
-                <a:tc>
-                  <a:txBody>
-                    <a:bodyPr/>
-                    <a:lstStyle/>
-                    <a:p>
-                      <a:pPr lvl="0" indent="0" marL="0" algn="l">
-                        <a:buNone/>
-                      </a:pPr>
-                      <a:r>
-                        <a:rPr/>
-                        <a:t>EEA</a:t>
-                      </a:r>
-                    </a:p>
-                  </a:txBody>
-                </a:tc>
-                <a:tc>
-                  <a:txBody>
-                    <a:bodyPr/>
-                    <a:lstStyle/>
-                    <a:p>
-                      <a:pPr lvl="0" indent="0" marL="0" algn="l">
-                        <a:buNone/>
-                      </a:pPr>
-                      <a:r>
-                        <a:rPr/>
-                        <a:t>all</a:t>
-                      </a:r>
-                    </a:p>
-                  </a:txBody>
-                </a:tc>
-                <a:tc>
-                  <a:txBody>
-                    <a:bodyPr/>
-                    <a:lstStyle/>
-                    <a:p>
-                      <a:pPr lvl="0" indent="0" marL="0" algn="l">
-                        <a:buNone/>
-                      </a:pPr>
-                      <a:r>
-                        <a:rPr/>
-                        <a:t>High noise annoyance</a:t>
-                      </a:r>
-                    </a:p>
-                  </a:txBody>
-                </a:tc>
-                <a:tc>
-                  <a:txBody>
-                    <a:bodyPr/>
-                    <a:lstStyle/>
-                    <a:p>
-                      <a:pPr lvl="0" indent="0" marL="0" algn="r">
-                        <a:buNone/>
-                      </a:pPr>
-                      <a:r>
-                        <a:rPr/>
-                        <a:t>360</a:t>
-                      </a:r>
-                    </a:p>
-                  </a:txBody>
-                </a:tc>
-                <a:tc>
-                  <a:txBody>
-                    <a:bodyPr/>
-                    <a:lstStyle/>
-                    <a:p>
-                      <a:pPr lvl="0" indent="0" marL="0" algn="r">
-                        <a:buNone/>
-                      </a:pPr>
-                      <a:r>
-                        <a:rPr/>
-                        <a:t>474800</a:t>
+                        <a:t>road</a:t>
+                      </a:r>
+                    </a:p>
+                  </a:txBody>
+                </a:tc>
+                <a:tc>
+                  <a:txBody>
+                    <a:bodyPr/>
+                    <a:lstStyle/>
+                    <a:p>
+                      <a:pPr lvl="0" indent="0" marL="0" algn="l">
+                        <a:buNone/>
+                      </a:pPr>
+                      <a:r>
+                        <a:rPr/>
+                        <a:t>Bundesland</a:t>
+                      </a:r>
+                    </a:p>
+                  </a:txBody>
+                </a:tc>
+                <a:tc>
+                  <a:txBody>
+                    <a:bodyPr/>
+                    <a:lstStyle/>
+                    <a:p>
+                      <a:pPr lvl="0" indent="0" marL="0" algn="l">
+                        <a:buNone/>
+                      </a:pPr>
+                      <a:r>
+                        <a:rPr/>
+                        <a:t>major</a:t>
+                      </a:r>
+                    </a:p>
+                  </a:txBody>
+                </a:tc>
+                <a:tc>
+                  <a:txBody>
+                    <a:bodyPr/>
+                    <a:lstStyle/>
+                    <a:p>
+                      <a:pPr lvl="0" indent="0" marL="0" algn="l">
+                        <a:buNone/>
+                      </a:pPr>
+                      <a:r>
+                        <a:rPr/>
+                        <a:t>All-cause mortality</a:t>
+                      </a:r>
+                    </a:p>
+                  </a:txBody>
+                </a:tc>
+                <a:tc>
+                  <a:txBody>
+                    <a:bodyPr/>
+                    <a:lstStyle/>
+                    <a:p>
+                      <a:pPr lvl="0" indent="0" marL="0" algn="r">
+                        <a:buNone/>
+                      </a:pPr>
+                      <a:r>
+                        <a:rPr/>
+                        <a:t>8700</a:t>
+                      </a:r>
+                    </a:p>
+                  </a:txBody>
+                </a:tc>
+                <a:tc>
+                  <a:txBody>
+                    <a:bodyPr/>
+                    <a:lstStyle/>
+                    <a:p>
+                      <a:pPr lvl="0" indent="0" marL="0" algn="r">
+                        <a:buNone/>
+                      </a:pPr>
+                      <a:r>
+                        <a:rPr/>
+                        <a:t>2909567</a:t>
                       </a:r>
                     </a:p>
                   </a:txBody>
@@ -4646,82 +4773,82 @@
                       </a:pPr>
                       <a:r>
                         <a:rPr/>
-                        <a:t>air</a:t>
-                      </a:r>
-                    </a:p>
-                  </a:txBody>
-                </a:tc>
-                <a:tc>
-                  <a:txBody>
-                    <a:bodyPr/>
-                    <a:lstStyle/>
-                    <a:p>
-                      <a:pPr lvl="0" indent="0" marL="0" algn="l">
-                        <a:buNone/>
-                      </a:pPr>
-                      <a:r>
-                        <a:rPr/>
-                        <a:t>EEA</a:t>
-                      </a:r>
-                    </a:p>
-                  </a:txBody>
-                </a:tc>
-                <a:tc>
-                  <a:txBody>
-                    <a:bodyPr/>
-                    <a:lstStyle/>
-                    <a:p>
-                      <a:pPr lvl="0" indent="0" marL="0" algn="l">
-                        <a:buNone/>
-                      </a:pPr>
-                      <a:r>
-                        <a:rPr/>
-                        <a:t>all</a:t>
-                      </a:r>
-                    </a:p>
-                  </a:txBody>
-                </a:tc>
-                <a:tc>
-                  <a:txBody>
-                    <a:bodyPr/>
-                    <a:lstStyle/>
-                    <a:p>
-                      <a:pPr lvl="0" indent="0" marL="0" algn="l">
-                        <a:buNone/>
-                      </a:pPr>
-                      <a:r>
-                        <a:rPr/>
-                        <a:t>High sleep disturbance</a:t>
-                      </a:r>
-                    </a:p>
-                  </a:txBody>
-                </a:tc>
-                <a:tc>
-                  <a:txBody>
-                    <a:bodyPr/>
-                    <a:lstStyle/>
-                    <a:p>
-                      <a:pPr lvl="0" indent="0" marL="0" algn="r">
-                        <a:buNone/>
-                      </a:pPr>
-                      <a:r>
-                        <a:rPr/>
-                        <a:t>360</a:t>
-                      </a:r>
-                    </a:p>
-                  </a:txBody>
-                </a:tc>
-                <a:tc>
-                  <a:txBody>
-                    <a:bodyPr/>
-                    <a:lstStyle/>
-                    <a:p>
-                      <a:pPr lvl="0" indent="0" marL="0" algn="r">
-                        <a:buNone/>
-                      </a:pPr>
-                      <a:r>
-                        <a:rPr/>
-                        <a:t>132400</a:t>
+                        <a:t>road</a:t>
+                      </a:r>
+                    </a:p>
+                  </a:txBody>
+                </a:tc>
+                <a:tc>
+                  <a:txBody>
+                    <a:bodyPr/>
+                    <a:lstStyle/>
+                    <a:p>
+                      <a:pPr lvl="0" indent="0" marL="0" algn="l">
+                        <a:buNone/>
+                      </a:pPr>
+                      <a:r>
+                        <a:rPr/>
+                        <a:t>Bundesland</a:t>
+                      </a:r>
+                    </a:p>
+                  </a:txBody>
+                </a:tc>
+                <a:tc>
+                  <a:txBody>
+                    <a:bodyPr/>
+                    <a:lstStyle/>
+                    <a:p>
+                      <a:pPr lvl="0" indent="0" marL="0" algn="l">
+                        <a:buNone/>
+                      </a:pPr>
+                      <a:r>
+                        <a:rPr/>
+                        <a:t>major</a:t>
+                      </a:r>
+                    </a:p>
+                  </a:txBody>
+                </a:tc>
+                <a:tc>
+                  <a:txBody>
+                    <a:bodyPr/>
+                    <a:lstStyle/>
+                    <a:p>
+                      <a:pPr lvl="0" indent="0" marL="0" algn="l">
+                        <a:buNone/>
+                      </a:pPr>
+                      <a:r>
+                        <a:rPr/>
+                        <a:t>Cardiovascular disease</a:t>
+                      </a:r>
+                    </a:p>
+                  </a:txBody>
+                </a:tc>
+                <a:tc>
+                  <a:txBody>
+                    <a:bodyPr/>
+                    <a:lstStyle/>
+                    <a:p>
+                      <a:pPr lvl="0" indent="0" marL="0" algn="r">
+                        <a:buNone/>
+                      </a:pPr>
+                      <a:r>
+                        <a:rPr/>
+                        <a:t>8700</a:t>
+                      </a:r>
+                    </a:p>
+                  </a:txBody>
+                </a:tc>
+                <a:tc>
+                  <a:txBody>
+                    <a:bodyPr/>
+                    <a:lstStyle/>
+                    <a:p>
+                      <a:pPr lvl="0" indent="0" marL="0" algn="r">
+                        <a:buNone/>
+                      </a:pPr>
+                      <a:r>
+                        <a:rPr/>
+                        <a:t>2909567</a:t>
                       </a:r>
                     </a:p>
                   </a:txBody>
@@ -4738,82 +4865,82 @@
                       </a:pPr>
                       <a:r>
                         <a:rPr/>
-                        <a:t>air</a:t>
-                      </a:r>
-                    </a:p>
-                  </a:txBody>
-                </a:tc>
-                <a:tc>
-                  <a:txBody>
-                    <a:bodyPr/>
-                    <a:lstStyle/>
-                    <a:p>
-                      <a:pPr lvl="0" indent="0" marL="0" algn="l">
-                        <a:buNone/>
-                      </a:pPr>
-                      <a:r>
-                        <a:rPr/>
-                        <a:t>EEA</a:t>
-                      </a:r>
-                    </a:p>
-                  </a:txBody>
-                </a:tc>
-                <a:tc>
-                  <a:txBody>
-                    <a:bodyPr/>
-                    <a:lstStyle/>
-                    <a:p>
-                      <a:pPr lvl="0" indent="0" marL="0" algn="l">
-                        <a:buNone/>
-                      </a:pPr>
-                      <a:r>
-                        <a:rPr/>
-                        <a:t>all</a:t>
-                      </a:r>
-                    </a:p>
-                  </a:txBody>
-                </a:tc>
-                <a:tc>
-                  <a:txBody>
-                    <a:bodyPr/>
-                    <a:lstStyle/>
-                    <a:p>
-                      <a:pPr lvl="0" indent="0" marL="0" algn="l">
-                        <a:buNone/>
-                      </a:pPr>
-                      <a:r>
-                        <a:rPr/>
-                        <a:t>Reading Comprehension</a:t>
-                      </a:r>
-                    </a:p>
-                  </a:txBody>
-                </a:tc>
-                <a:tc>
-                  <a:txBody>
-                    <a:bodyPr/>
-                    <a:lstStyle/>
-                    <a:p>
-                      <a:pPr lvl="0" indent="0" marL="0" algn="r">
-                        <a:buNone/>
-                      </a:pPr>
-                      <a:r>
-                        <a:rPr/>
-                        <a:t>360</a:t>
-                      </a:r>
-                    </a:p>
-                  </a:txBody>
-                </a:tc>
-                <a:tc>
-                  <a:txBody>
-                    <a:bodyPr/>
-                    <a:lstStyle/>
-                    <a:p>
-                      <a:pPr lvl="0" indent="0" marL="0" algn="r">
-                        <a:buNone/>
-                      </a:pPr>
-                      <a:r>
-                        <a:rPr/>
-                        <a:t>474800</a:t>
+                        <a:t>road</a:t>
+                      </a:r>
+                    </a:p>
+                  </a:txBody>
+                </a:tc>
+                <a:tc>
+                  <a:txBody>
+                    <a:bodyPr/>
+                    <a:lstStyle/>
+                    <a:p>
+                      <a:pPr lvl="0" indent="0" marL="0" algn="l">
+                        <a:buNone/>
+                      </a:pPr>
+                      <a:r>
+                        <a:rPr/>
+                        <a:t>Bundesland</a:t>
+                      </a:r>
+                    </a:p>
+                  </a:txBody>
+                </a:tc>
+                <a:tc>
+                  <a:txBody>
+                    <a:bodyPr/>
+                    <a:lstStyle/>
+                    <a:p>
+                      <a:pPr lvl="0" indent="0" marL="0" algn="l">
+                        <a:buNone/>
+                      </a:pPr>
+                      <a:r>
+                        <a:rPr/>
+                        <a:t>major</a:t>
+                      </a:r>
+                    </a:p>
+                  </a:txBody>
+                </a:tc>
+                <a:tc>
+                  <a:txBody>
+                    <a:bodyPr/>
+                    <a:lstStyle/>
+                    <a:p>
+                      <a:pPr lvl="0" indent="0" marL="0" algn="l">
+                        <a:buNone/>
+                      </a:pPr>
+                      <a:r>
+                        <a:rPr/>
+                        <a:t>Diabetes</a:t>
+                      </a:r>
+                    </a:p>
+                  </a:txBody>
+                </a:tc>
+                <a:tc>
+                  <a:txBody>
+                    <a:bodyPr/>
+                    <a:lstStyle/>
+                    <a:p>
+                      <a:pPr lvl="0" indent="0" marL="0" algn="r">
+                        <a:buNone/>
+                      </a:pPr>
+                      <a:r>
+                        <a:rPr/>
+                        <a:t>8700</a:t>
+                      </a:r>
+                    </a:p>
+                  </a:txBody>
+                </a:tc>
+                <a:tc>
+                  <a:txBody>
+                    <a:bodyPr/>
+                    <a:lstStyle/>
+                    <a:p>
+                      <a:pPr lvl="0" indent="0" marL="0" algn="r">
+                        <a:buNone/>
+                      </a:pPr>
+                      <a:r>
+                        <a:rPr/>
+                        <a:t>2909567</a:t>
                       </a:r>
                     </a:p>
                   </a:txBody>
@@ -4830,22 +4957,22 @@
                       </a:pPr>
                       <a:r>
                         <a:rPr/>
-                        <a:t>air</a:t>
-                      </a:r>
-                    </a:p>
-                  </a:txBody>
-                </a:tc>
-                <a:tc>
-                  <a:txBody>
-                    <a:bodyPr/>
-                    <a:lstStyle/>
-                    <a:p>
-                      <a:pPr lvl="0" indent="0" marL="0" algn="l">
-                        <a:buNone/>
-                      </a:pPr>
-                      <a:r>
-                        <a:rPr/>
-                        <a:t>EEA</a:t>
+                        <a:t>road</a:t>
+                      </a:r>
+                    </a:p>
+                  </a:txBody>
+                </a:tc>
+                <a:tc>
+                  <a:txBody>
+                    <a:bodyPr/>
+                    <a:lstStyle/>
+                    <a:p>
+                      <a:pPr lvl="0" indent="0" marL="0" algn="l">
+                        <a:buNone/>
+                      </a:pPr>
+                      <a:r>
+                        <a:rPr/>
+                        <a:t>Bundesland</a:t>
                       </a:r>
                     </a:p>
                   </a:txBody>
@@ -4875,37 +5002,37 @@
                       </a:pPr>
                       <a:r>
                         <a:rPr/>
-                        <a:t>All-cause mortality</a:t>
-                      </a:r>
-                    </a:p>
-                  </a:txBody>
-                </a:tc>
-                <a:tc>
-                  <a:txBody>
-                    <a:bodyPr/>
-                    <a:lstStyle/>
-                    <a:p>
-                      <a:pPr lvl="0" indent="0" marL="0" algn="r">
-                        <a:buNone/>
-                      </a:pPr>
-                      <a:r>
-                        <a:rPr/>
-                        <a:t>360</a:t>
-                      </a:r>
-                    </a:p>
-                  </a:txBody>
-                </a:tc>
-                <a:tc>
-                  <a:txBody>
-                    <a:bodyPr/>
-                    <a:lstStyle/>
-                    <a:p>
-                      <a:pPr lvl="0" indent="0" marL="0" algn="r">
-                        <a:buNone/>
-                      </a:pPr>
-                      <a:r>
-                        <a:rPr/>
-                        <a:t>456300</a:t>
+                        <a:t>Reading Comprehension</a:t>
+                      </a:r>
+                    </a:p>
+                  </a:txBody>
+                </a:tc>
+                <a:tc>
+                  <a:txBody>
+                    <a:bodyPr/>
+                    <a:lstStyle/>
+                    <a:p>
+                      <a:pPr lvl="0" indent="0" marL="0" algn="r">
+                        <a:buNone/>
+                      </a:pPr>
+                      <a:r>
+                        <a:rPr/>
+                        <a:t>8700</a:t>
+                      </a:r>
+                    </a:p>
+                  </a:txBody>
+                </a:tc>
+                <a:tc>
+                  <a:txBody>
+                    <a:bodyPr/>
+                    <a:lstStyle/>
+                    <a:p>
+                      <a:pPr lvl="0" indent="0" marL="0" algn="r">
+                        <a:buNone/>
+                      </a:pPr>
+                      <a:r>
+                        <a:rPr/>
+                        <a:t>2909567</a:t>
                       </a:r>
                     </a:p>
                   </a:txBody>
@@ -4922,22 +5049,22 @@
                       </a:pPr>
                       <a:r>
                         <a:rPr/>
-                        <a:t>air</a:t>
-                      </a:r>
-                    </a:p>
-                  </a:txBody>
-                </a:tc>
-                <a:tc>
-                  <a:txBody>
-                    <a:bodyPr/>
-                    <a:lstStyle/>
-                    <a:p>
-                      <a:pPr lvl="0" indent="0" marL="0" algn="l">
-                        <a:buNone/>
-                      </a:pPr>
-                      <a:r>
-                        <a:rPr/>
-                        <a:t>EEA</a:t>
+                        <a:t>road</a:t>
+                      </a:r>
+                    </a:p>
+                  </a:txBody>
+                </a:tc>
+                <a:tc>
+                  <a:txBody>
+                    <a:bodyPr/>
+                    <a:lstStyle/>
+                    <a:p>
+                      <a:pPr lvl="0" indent="0" marL="0" algn="l">
+                        <a:buNone/>
+                      </a:pPr>
+                      <a:r>
+                        <a:rPr/>
+                        <a:t>Bundesland</a:t>
                       </a:r>
                     </a:p>
                   </a:txBody>
@@ -4967,37 +5094,37 @@
                       </a:pPr>
                       <a:r>
                         <a:rPr/>
-                        <a:t>Cardiovascular disease</a:t>
-                      </a:r>
-                    </a:p>
-                  </a:txBody>
-                </a:tc>
-                <a:tc>
-                  <a:txBody>
-                    <a:bodyPr/>
-                    <a:lstStyle/>
-                    <a:p>
-                      <a:pPr lvl="0" indent="0" marL="0" algn="r">
-                        <a:buNone/>
-                      </a:pPr>
-                      <a:r>
-                        <a:rPr/>
-                        <a:t>360</a:t>
-                      </a:r>
-                    </a:p>
-                  </a:txBody>
-                </a:tc>
-                <a:tc>
-                  <a:txBody>
-                    <a:bodyPr/>
-                    <a:lstStyle/>
-                    <a:p>
-                      <a:pPr lvl="0" indent="0" marL="0" algn="r">
-                        <a:buNone/>
-                      </a:pPr>
-                      <a:r>
-                        <a:rPr/>
-                        <a:t>456300</a:t>
+                        <a:t>Behavioural problems</a:t>
+                      </a:r>
+                    </a:p>
+                  </a:txBody>
+                </a:tc>
+                <a:tc>
+                  <a:txBody>
+                    <a:bodyPr/>
+                    <a:lstStyle/>
+                    <a:p>
+                      <a:pPr lvl="0" indent="0" marL="0" algn="r">
+                        <a:buNone/>
+                      </a:pPr>
+                      <a:r>
+                        <a:rPr/>
+                        <a:t>8700</a:t>
+                      </a:r>
+                    </a:p>
+                  </a:txBody>
+                </a:tc>
+                <a:tc>
+                  <a:txBody>
+                    <a:bodyPr/>
+                    <a:lstStyle/>
+                    <a:p>
+                      <a:pPr lvl="0" indent="0" marL="0" algn="r">
+                        <a:buNone/>
+                      </a:pPr>
+                      <a:r>
+                        <a:rPr/>
+                        <a:t>2909567</a:t>
                       </a:r>
                     </a:p>
                   </a:txBody>
@@ -5014,22 +5141,22 @@
                       </a:pPr>
                       <a:r>
                         <a:rPr/>
-                        <a:t>air</a:t>
-                      </a:r>
-                    </a:p>
-                  </a:txBody>
-                </a:tc>
-                <a:tc>
-                  <a:txBody>
-                    <a:bodyPr/>
-                    <a:lstStyle/>
-                    <a:p>
-                      <a:pPr lvl="0" indent="0" marL="0" algn="l">
-                        <a:buNone/>
-                      </a:pPr>
-                      <a:r>
-                        <a:rPr/>
-                        <a:t>EEA</a:t>
+                        <a:t>road</a:t>
+                      </a:r>
+                    </a:p>
+                  </a:txBody>
+                </a:tc>
+                <a:tc>
+                  <a:txBody>
+                    <a:bodyPr/>
+                    <a:lstStyle/>
+                    <a:p>
+                      <a:pPr lvl="0" indent="0" marL="0" algn="l">
+                        <a:buNone/>
+                      </a:pPr>
+                      <a:r>
+                        <a:rPr/>
+                        <a:t>Bundesland</a:t>
                       </a:r>
                     </a:p>
                   </a:txBody>
@@ -5059,37 +5186,37 @@
                       </a:pPr>
                       <a:r>
                         <a:rPr/>
-                        <a:t>Diabetes</a:t>
-                      </a:r>
-                    </a:p>
-                  </a:txBody>
-                </a:tc>
-                <a:tc>
-                  <a:txBody>
-                    <a:bodyPr/>
-                    <a:lstStyle/>
-                    <a:p>
-                      <a:pPr lvl="0" indent="0" marL="0" algn="r">
-                        <a:buNone/>
-                      </a:pPr>
-                      <a:r>
-                        <a:rPr/>
-                        <a:t>360</a:t>
-                      </a:r>
-                    </a:p>
-                  </a:txBody>
-                </a:tc>
-                <a:tc>
-                  <a:txBody>
-                    <a:bodyPr/>
-                    <a:lstStyle/>
-                    <a:p>
-                      <a:pPr lvl="0" indent="0" marL="0" algn="r">
-                        <a:buNone/>
-                      </a:pPr>
-                      <a:r>
-                        <a:rPr/>
-                        <a:t>456300</a:t>
+                        <a:t>Overweight</a:t>
+                      </a:r>
+                    </a:p>
+                  </a:txBody>
+                </a:tc>
+                <a:tc>
+                  <a:txBody>
+                    <a:bodyPr/>
+                    <a:lstStyle/>
+                    <a:p>
+                      <a:pPr lvl="0" indent="0" marL="0" algn="r">
+                        <a:buNone/>
+                      </a:pPr>
+                      <a:r>
+                        <a:rPr/>
+                        <a:t>8700</a:t>
+                      </a:r>
+                    </a:p>
+                  </a:txBody>
+                </a:tc>
+                <a:tc>
+                  <a:txBody>
+                    <a:bodyPr/>
+                    <a:lstStyle/>
+                    <a:p>
+                      <a:pPr lvl="0" indent="0" marL="0" algn="r">
+                        <a:buNone/>
+                      </a:pPr>
+                      <a:r>
+                        <a:rPr/>
+                        <a:t>2909567</a:t>
                       </a:r>
                     </a:p>
                   </a:txBody>
@@ -5106,22 +5233,22 @@
                       </a:pPr>
                       <a:r>
                         <a:rPr/>
-                        <a:t>air</a:t>
-                      </a:r>
-                    </a:p>
-                  </a:txBody>
-                </a:tc>
-                <a:tc>
-                  <a:txBody>
-                    <a:bodyPr/>
-                    <a:lstStyle/>
-                    <a:p>
-                      <a:pPr lvl="0" indent="0" marL="0" algn="l">
-                        <a:buNone/>
-                      </a:pPr>
-                      <a:r>
-                        <a:rPr/>
-                        <a:t>EEA</a:t>
+                        <a:t>road</a:t>
+                      </a:r>
+                    </a:p>
+                  </a:txBody>
+                </a:tc>
+                <a:tc>
+                  <a:txBody>
+                    <a:bodyPr/>
+                    <a:lstStyle/>
+                    <a:p>
+                      <a:pPr lvl="0" indent="0" marL="0" algn="l">
+                        <a:buNone/>
+                      </a:pPr>
+                      <a:r>
+                        <a:rPr/>
+                        <a:t>Bundesland</a:t>
                       </a:r>
                     </a:p>
                   </a:txBody>
@@ -5151,37 +5278,37 @@
                       </a:pPr>
                       <a:r>
                         <a:rPr/>
-                        <a:t>High noise annoyance</a:t>
-                      </a:r>
-                    </a:p>
-                  </a:txBody>
-                </a:tc>
-                <a:tc>
-                  <a:txBody>
-                    <a:bodyPr/>
-                    <a:lstStyle/>
-                    <a:p>
-                      <a:pPr lvl="0" indent="0" marL="0" algn="r">
-                        <a:buNone/>
-                      </a:pPr>
-                      <a:r>
-                        <a:rPr/>
-                        <a:t>360</a:t>
-                      </a:r>
-                    </a:p>
-                  </a:txBody>
-                </a:tc>
-                <a:tc>
-                  <a:txBody>
-                    <a:bodyPr/>
-                    <a:lstStyle/>
-                    <a:p>
-                      <a:pPr lvl="0" indent="0" marL="0" algn="r">
-                        <a:buNone/>
-                      </a:pPr>
-                      <a:r>
-                        <a:rPr/>
-                        <a:t>456300</a:t>
+                        <a:t>High sleep disturbance</a:t>
+                      </a:r>
+                    </a:p>
+                  </a:txBody>
+                </a:tc>
+                <a:tc>
+                  <a:txBody>
+                    <a:bodyPr/>
+                    <a:lstStyle/>
+                    <a:p>
+                      <a:pPr lvl="0" indent="0" marL="0" algn="r">
+                        <a:buNone/>
+                      </a:pPr>
+                      <a:r>
+                        <a:rPr/>
+                        <a:t>8700</a:t>
+                      </a:r>
+                    </a:p>
+                  </a:txBody>
+                </a:tc>
+                <a:tc>
+                  <a:txBody>
+                    <a:bodyPr/>
+                    <a:lstStyle/>
+                    <a:p>
+                      <a:pPr lvl="0" indent="0" marL="0" algn="r">
+                        <a:buNone/>
+                      </a:pPr>
+                      <a:r>
+                        <a:rPr/>
+                        <a:t>1800891</a:t>
                       </a:r>
                     </a:p>
                   </a:txBody>
@@ -5213,7 +5340,7 @@
                       </a:pPr>
                       <a:r>
                         <a:rPr/>
-                        <a:t>EEA</a:t>
+                        <a:t>Bundesland</a:t>
                       </a:r>
                     </a:p>
                   </a:txBody>
@@ -5243,37 +5370,37 @@
                       </a:pPr>
                       <a:r>
                         <a:rPr/>
-                        <a:t>High sleep disturbance</a:t>
-                      </a:r>
-                    </a:p>
-                  </a:txBody>
-                </a:tc>
-                <a:tc>
-                  <a:txBody>
-                    <a:bodyPr/>
-                    <a:lstStyle/>
-                    <a:p>
-                      <a:pPr lvl="0" indent="0" marL="0" algn="r">
-                        <a:buNone/>
-                      </a:pPr>
-                      <a:r>
-                        <a:rPr/>
-                        <a:t>360</a:t>
-                      </a:r>
-                    </a:p>
-                  </a:txBody>
-                </a:tc>
-                <a:tc>
-                  <a:txBody>
-                    <a:bodyPr/>
-                    <a:lstStyle/>
-                    <a:p>
-                      <a:pPr lvl="0" indent="0" marL="0" algn="r">
-                        <a:buNone/>
-                      </a:pPr>
-                      <a:r>
-                        <a:rPr/>
-                        <a:t>131200</a:t>
+                        <a:t>High noise annoyance</a:t>
+                      </a:r>
+                    </a:p>
+                  </a:txBody>
+                </a:tc>
+                <a:tc>
+                  <a:txBody>
+                    <a:bodyPr/>
+                    <a:lstStyle/>
+                    <a:p>
+                      <a:pPr lvl="0" indent="0" marL="0" algn="r">
+                        <a:buNone/>
+                      </a:pPr>
+                      <a:r>
+                        <a:rPr/>
+                        <a:t>215</a:t>
+                      </a:r>
+                    </a:p>
+                  </a:txBody>
+                </a:tc>
+                <a:tc>
+                  <a:txBody>
+                    <a:bodyPr/>
+                    <a:lstStyle/>
+                    <a:p>
+                      <a:pPr lvl="0" indent="0" marL="0" algn="r">
+                        <a:buNone/>
+                      </a:pPr>
+                      <a:r>
+                        <a:rPr/>
+                        <a:t>381247</a:t>
                       </a:r>
                     </a:p>
                   </a:txBody>
@@ -5305,7 +5432,7 @@
                       </a:pPr>
                       <a:r>
                         <a:rPr/>
-                        <a:t>EEA</a:t>
+                        <a:t>Bundesland</a:t>
                       </a:r>
                     </a:p>
                   </a:txBody>
@@ -5335,37 +5462,37 @@
                       </a:pPr>
                       <a:r>
                         <a:rPr/>
-                        <a:t>Reading Comprehension</a:t>
-                      </a:r>
-                    </a:p>
-                  </a:txBody>
-                </a:tc>
-                <a:tc>
-                  <a:txBody>
-                    <a:bodyPr/>
-                    <a:lstStyle/>
-                    <a:p>
-                      <a:pPr lvl="0" indent="0" marL="0" algn="r">
-                        <a:buNone/>
-                      </a:pPr>
-                      <a:r>
-                        <a:rPr/>
-                        <a:t>360</a:t>
-                      </a:r>
-                    </a:p>
-                  </a:txBody>
-                </a:tc>
-                <a:tc>
-                  <a:txBody>
-                    <a:bodyPr/>
-                    <a:lstStyle/>
-                    <a:p>
-                      <a:pPr lvl="0" indent="0" marL="0" algn="r">
-                        <a:buNone/>
-                      </a:pPr>
-                      <a:r>
-                        <a:rPr/>
-                        <a:t>456300</a:t>
+                        <a:t>All-cause mortality</a:t>
+                      </a:r>
+                    </a:p>
+                  </a:txBody>
+                </a:tc>
+                <a:tc>
+                  <a:txBody>
+                    <a:bodyPr/>
+                    <a:lstStyle/>
+                    <a:p>
+                      <a:pPr lvl="0" indent="0" marL="0" algn="r">
+                        <a:buNone/>
+                      </a:pPr>
+                      <a:r>
+                        <a:rPr/>
+                        <a:t>215</a:t>
+                      </a:r>
+                    </a:p>
+                  </a:txBody>
+                </a:tc>
+                <a:tc>
+                  <a:txBody>
+                    <a:bodyPr/>
+                    <a:lstStyle/>
+                    <a:p>
+                      <a:pPr lvl="0" indent="0" marL="0" algn="r">
+                        <a:buNone/>
+                      </a:pPr>
+                      <a:r>
+                        <a:rPr/>
+                        <a:t>381247</a:t>
                       </a:r>
                     </a:p>
                   </a:txBody>
@@ -5382,7 +5509,7 @@
                       </a:pPr>
                       <a:r>
                         <a:rPr/>
-                        <a:t>industry</a:t>
+                        <a:t>air</a:t>
                       </a:r>
                     </a:p>
                   </a:txBody>
@@ -5427,37 +5554,37 @@
                       </a:pPr>
                       <a:r>
                         <a:rPr/>
-                        <a:t>High noise annoyance</a:t>
-                      </a:r>
-                    </a:p>
-                  </a:txBody>
-                </a:tc>
-                <a:tc>
-                  <a:txBody>
-                    <a:bodyPr/>
-                    <a:lstStyle/>
-                    <a:p>
-                      <a:pPr lvl="0" indent="0" marL="0" algn="r">
-                        <a:buNone/>
-                      </a:pPr>
-                      <a:r>
-                        <a:rPr/>
-                        <a:t>30</a:t>
-                      </a:r>
-                    </a:p>
-                  </a:txBody>
-                </a:tc>
-                <a:tc>
-                  <a:txBody>
-                    <a:bodyPr/>
-                    <a:lstStyle/>
-                    <a:p>
-                      <a:pPr lvl="0" indent="0" marL="0" algn="r">
-                        <a:buNone/>
-                      </a:pPr>
-                      <a:r>
-                        <a:rPr/>
-                        <a:t>6336</a:t>
+                        <a:t>Cardiovascular disease</a:t>
+                      </a:r>
+                    </a:p>
+                  </a:txBody>
+                </a:tc>
+                <a:tc>
+                  <a:txBody>
+                    <a:bodyPr/>
+                    <a:lstStyle/>
+                    <a:p>
+                      <a:pPr lvl="0" indent="0" marL="0" algn="r">
+                        <a:buNone/>
+                      </a:pPr>
+                      <a:r>
+                        <a:rPr/>
+                        <a:t>215</a:t>
+                      </a:r>
+                    </a:p>
+                  </a:txBody>
+                </a:tc>
+                <a:tc>
+                  <a:txBody>
+                    <a:bodyPr/>
+                    <a:lstStyle/>
+                    <a:p>
+                      <a:pPr lvl="0" indent="0" marL="0" algn="r">
+                        <a:buNone/>
+                      </a:pPr>
+                      <a:r>
+                        <a:rPr/>
+                        <a:t>381247</a:t>
                       </a:r>
                     </a:p>
                   </a:txBody>
@@ -5474,7 +5601,7 @@
                       </a:pPr>
                       <a:r>
                         <a:rPr/>
-                        <a:t>industry</a:t>
+                        <a:t>air</a:t>
                       </a:r>
                     </a:p>
                   </a:txBody>
@@ -5519,37 +5646,37 @@
                       </a:pPr>
                       <a:r>
                         <a:rPr/>
-                        <a:t>High sleep disturbance</a:t>
-                      </a:r>
-                    </a:p>
-                  </a:txBody>
-                </a:tc>
-                <a:tc>
-                  <a:txBody>
-                    <a:bodyPr/>
-                    <a:lstStyle/>
-                    <a:p>
-                      <a:pPr lvl="0" indent="0" marL="0" algn="r">
-                        <a:buNone/>
-                      </a:pPr>
-                      <a:r>
-                        <a:rPr/>
-                        <a:t>30</a:t>
-                      </a:r>
-                    </a:p>
-                  </a:txBody>
-                </a:tc>
-                <a:tc>
-                  <a:txBody>
-                    <a:bodyPr/>
-                    <a:lstStyle/>
-                    <a:p>
-                      <a:pPr lvl="0" indent="0" marL="0" algn="r">
-                        <a:buNone/>
-                      </a:pPr>
-                      <a:r>
-                        <a:rPr/>
-                        <a:t>4806</a:t>
+                        <a:t>Diabetes</a:t>
+                      </a:r>
+                    </a:p>
+                  </a:txBody>
+                </a:tc>
+                <a:tc>
+                  <a:txBody>
+                    <a:bodyPr/>
+                    <a:lstStyle/>
+                    <a:p>
+                      <a:pPr lvl="0" indent="0" marL="0" algn="r">
+                        <a:buNone/>
+                      </a:pPr>
+                      <a:r>
+                        <a:rPr/>
+                        <a:t>215</a:t>
+                      </a:r>
+                    </a:p>
+                  </a:txBody>
+                </a:tc>
+                <a:tc>
+                  <a:txBody>
+                    <a:bodyPr/>
+                    <a:lstStyle/>
+                    <a:p>
+                      <a:pPr lvl="0" indent="0" marL="0" algn="r">
+                        <a:buNone/>
+                      </a:pPr>
+                      <a:r>
+                        <a:rPr/>
+                        <a:t>381247</a:t>
                       </a:r>
                     </a:p>
                   </a:txBody>
@@ -5566,82 +5693,82 @@
                       </a:pPr>
                       <a:r>
                         <a:rPr/>
-                        <a:t>rail</a:t>
-                      </a:r>
-                    </a:p>
-                  </a:txBody>
-                </a:tc>
-                <a:tc>
-                  <a:txBody>
-                    <a:bodyPr/>
-                    <a:lstStyle/>
-                    <a:p>
-                      <a:pPr lvl="0" indent="0" marL="0" algn="l">
-                        <a:buNone/>
-                      </a:pPr>
-                      <a:r>
-                        <a:rPr/>
-                        <a:t>EEA</a:t>
-                      </a:r>
-                    </a:p>
-                  </a:txBody>
-                </a:tc>
-                <a:tc>
-                  <a:txBody>
-                    <a:bodyPr/>
-                    <a:lstStyle/>
-                    <a:p>
-                      <a:pPr lvl="0" indent="0" marL="0" algn="l">
-                        <a:buNone/>
-                      </a:pPr>
-                      <a:r>
-                        <a:rPr/>
-                        <a:t>all</a:t>
-                      </a:r>
-                    </a:p>
-                  </a:txBody>
-                </a:tc>
-                <a:tc>
-                  <a:txBody>
-                    <a:bodyPr/>
-                    <a:lstStyle/>
-                    <a:p>
-                      <a:pPr lvl="0" indent="0" marL="0" algn="l">
-                        <a:buNone/>
-                      </a:pPr>
-                      <a:r>
-                        <a:rPr/>
-                        <a:t>All-cause mortality</a:t>
-                      </a:r>
-                    </a:p>
-                  </a:txBody>
-                </a:tc>
-                <a:tc>
-                  <a:txBody>
-                    <a:bodyPr/>
-                    <a:lstStyle/>
-                    <a:p>
-                      <a:pPr lvl="0" indent="0" marL="0" algn="r">
-                        <a:buNone/>
-                      </a:pPr>
-                      <a:r>
-                        <a:rPr/>
-                        <a:t>360</a:t>
-                      </a:r>
-                    </a:p>
-                  </a:txBody>
-                </a:tc>
-                <a:tc>
-                  <a:txBody>
-                    <a:bodyPr/>
-                    <a:lstStyle/>
-                    <a:p>
-                      <a:pPr lvl="0" indent="0" marL="0" algn="r">
-                        <a:buNone/>
-                      </a:pPr>
-                      <a:r>
-                        <a:rPr/>
-                        <a:t>2531400</a:t>
+                        <a:t>air</a:t>
+                      </a:r>
+                    </a:p>
+                  </a:txBody>
+                </a:tc>
+                <a:tc>
+                  <a:txBody>
+                    <a:bodyPr/>
+                    <a:lstStyle/>
+                    <a:p>
+                      <a:pPr lvl="0" indent="0" marL="0" algn="l">
+                        <a:buNone/>
+                      </a:pPr>
+                      <a:r>
+                        <a:rPr/>
+                        <a:t>Bundesland</a:t>
+                      </a:r>
+                    </a:p>
+                  </a:txBody>
+                </a:tc>
+                <a:tc>
+                  <a:txBody>
+                    <a:bodyPr/>
+                    <a:lstStyle/>
+                    <a:p>
+                      <a:pPr lvl="0" indent="0" marL="0" algn="l">
+                        <a:buNone/>
+                      </a:pPr>
+                      <a:r>
+                        <a:rPr/>
+                        <a:t>major</a:t>
+                      </a:r>
+                    </a:p>
+                  </a:txBody>
+                </a:tc>
+                <a:tc>
+                  <a:txBody>
+                    <a:bodyPr/>
+                    <a:lstStyle/>
+                    <a:p>
+                      <a:pPr lvl="0" indent="0" marL="0" algn="l">
+                        <a:buNone/>
+                      </a:pPr>
+                      <a:r>
+                        <a:rPr/>
+                        <a:t>Reading Comprehension</a:t>
+                      </a:r>
+                    </a:p>
+                  </a:txBody>
+                </a:tc>
+                <a:tc>
+                  <a:txBody>
+                    <a:bodyPr/>
+                    <a:lstStyle/>
+                    <a:p>
+                      <a:pPr lvl="0" indent="0" marL="0" algn="r">
+                        <a:buNone/>
+                      </a:pPr>
+                      <a:r>
+                        <a:rPr/>
+                        <a:t>215</a:t>
+                      </a:r>
+                    </a:p>
+                  </a:txBody>
+                </a:tc>
+                <a:tc>
+                  <a:txBody>
+                    <a:bodyPr/>
+                    <a:lstStyle/>
+                    <a:p>
+                      <a:pPr lvl="0" indent="0" marL="0" algn="r">
+                        <a:buNone/>
+                      </a:pPr>
+                      <a:r>
+                        <a:rPr/>
+                        <a:t>381247</a:t>
                       </a:r>
                     </a:p>
                   </a:txBody>
@@ -5658,82 +5785,82 @@
                       </a:pPr>
                       <a:r>
                         <a:rPr/>
-                        <a:t>rail</a:t>
-                      </a:r>
-                    </a:p>
-                  </a:txBody>
-                </a:tc>
-                <a:tc>
-                  <a:txBody>
-                    <a:bodyPr/>
-                    <a:lstStyle/>
-                    <a:p>
-                      <a:pPr lvl="0" indent="0" marL="0" algn="l">
-                        <a:buNone/>
-                      </a:pPr>
-                      <a:r>
-                        <a:rPr/>
-                        <a:t>EEA</a:t>
-                      </a:r>
-                    </a:p>
-                  </a:txBody>
-                </a:tc>
-                <a:tc>
-                  <a:txBody>
-                    <a:bodyPr/>
-                    <a:lstStyle/>
-                    <a:p>
-                      <a:pPr lvl="0" indent="0" marL="0" algn="l">
-                        <a:buNone/>
-                      </a:pPr>
-                      <a:r>
-                        <a:rPr/>
-                        <a:t>all</a:t>
-                      </a:r>
-                    </a:p>
-                  </a:txBody>
-                </a:tc>
-                <a:tc>
-                  <a:txBody>
-                    <a:bodyPr/>
-                    <a:lstStyle/>
-                    <a:p>
-                      <a:pPr lvl="0" indent="0" marL="0" algn="l">
-                        <a:buNone/>
-                      </a:pPr>
-                      <a:r>
-                        <a:rPr/>
-                        <a:t>Cardiovascular disease</a:t>
-                      </a:r>
-                    </a:p>
-                  </a:txBody>
-                </a:tc>
-                <a:tc>
-                  <a:txBody>
-                    <a:bodyPr/>
-                    <a:lstStyle/>
-                    <a:p>
-                      <a:pPr lvl="0" indent="0" marL="0" algn="r">
-                        <a:buNone/>
-                      </a:pPr>
-                      <a:r>
-                        <a:rPr/>
-                        <a:t>360</a:t>
-                      </a:r>
-                    </a:p>
-                  </a:txBody>
-                </a:tc>
-                <a:tc>
-                  <a:txBody>
-                    <a:bodyPr/>
-                    <a:lstStyle/>
-                    <a:p>
-                      <a:pPr lvl="0" indent="0" marL="0" algn="r">
-                        <a:buNone/>
-                      </a:pPr>
-                      <a:r>
-                        <a:rPr/>
-                        <a:t>2531400</a:t>
+                        <a:t>air</a:t>
+                      </a:r>
+                    </a:p>
+                  </a:txBody>
+                </a:tc>
+                <a:tc>
+                  <a:txBody>
+                    <a:bodyPr/>
+                    <a:lstStyle/>
+                    <a:p>
+                      <a:pPr lvl="0" indent="0" marL="0" algn="l">
+                        <a:buNone/>
+                      </a:pPr>
+                      <a:r>
+                        <a:rPr/>
+                        <a:t>Bundesland</a:t>
+                      </a:r>
+                    </a:p>
+                  </a:txBody>
+                </a:tc>
+                <a:tc>
+                  <a:txBody>
+                    <a:bodyPr/>
+                    <a:lstStyle/>
+                    <a:p>
+                      <a:pPr lvl="0" indent="0" marL="0" algn="l">
+                        <a:buNone/>
+                      </a:pPr>
+                      <a:r>
+                        <a:rPr/>
+                        <a:t>major</a:t>
+                      </a:r>
+                    </a:p>
+                  </a:txBody>
+                </a:tc>
+                <a:tc>
+                  <a:txBody>
+                    <a:bodyPr/>
+                    <a:lstStyle/>
+                    <a:p>
+                      <a:pPr lvl="0" indent="0" marL="0" algn="l">
+                        <a:buNone/>
+                      </a:pPr>
+                      <a:r>
+                        <a:rPr/>
+                        <a:t>Behavioural problems</a:t>
+                      </a:r>
+                    </a:p>
+                  </a:txBody>
+                </a:tc>
+                <a:tc>
+                  <a:txBody>
+                    <a:bodyPr/>
+                    <a:lstStyle/>
+                    <a:p>
+                      <a:pPr lvl="0" indent="0" marL="0" algn="r">
+                        <a:buNone/>
+                      </a:pPr>
+                      <a:r>
+                        <a:rPr/>
+                        <a:t>215</a:t>
+                      </a:r>
+                    </a:p>
+                  </a:txBody>
+                </a:tc>
+                <a:tc>
+                  <a:txBody>
+                    <a:bodyPr/>
+                    <a:lstStyle/>
+                    <a:p>
+                      <a:pPr lvl="0" indent="0" marL="0" algn="r">
+                        <a:buNone/>
+                      </a:pPr>
+                      <a:r>
+                        <a:rPr/>
+                        <a:t>381247</a:t>
                       </a:r>
                     </a:p>
                   </a:txBody>
@@ -5750,82 +5877,82 @@
                       </a:pPr>
                       <a:r>
                         <a:rPr/>
-                        <a:t>rail</a:t>
-                      </a:r>
-                    </a:p>
-                  </a:txBody>
-                </a:tc>
-                <a:tc>
-                  <a:txBody>
-                    <a:bodyPr/>
-                    <a:lstStyle/>
-                    <a:p>
-                      <a:pPr lvl="0" indent="0" marL="0" algn="l">
-                        <a:buNone/>
-                      </a:pPr>
-                      <a:r>
-                        <a:rPr/>
-                        <a:t>EEA</a:t>
-                      </a:r>
-                    </a:p>
-                  </a:txBody>
-                </a:tc>
-                <a:tc>
-                  <a:txBody>
-                    <a:bodyPr/>
-                    <a:lstStyle/>
-                    <a:p>
-                      <a:pPr lvl="0" indent="0" marL="0" algn="l">
-                        <a:buNone/>
-                      </a:pPr>
-                      <a:r>
-                        <a:rPr/>
-                        <a:t>all</a:t>
-                      </a:r>
-                    </a:p>
-                  </a:txBody>
-                </a:tc>
-                <a:tc>
-                  <a:txBody>
-                    <a:bodyPr/>
-                    <a:lstStyle/>
-                    <a:p>
-                      <a:pPr lvl="0" indent="0" marL="0" algn="l">
-                        <a:buNone/>
-                      </a:pPr>
-                      <a:r>
-                        <a:rPr/>
-                        <a:t>Diabetes</a:t>
-                      </a:r>
-                    </a:p>
-                  </a:txBody>
-                </a:tc>
-                <a:tc>
-                  <a:txBody>
-                    <a:bodyPr/>
-                    <a:lstStyle/>
-                    <a:p>
-                      <a:pPr lvl="0" indent="0" marL="0" algn="r">
-                        <a:buNone/>
-                      </a:pPr>
-                      <a:r>
-                        <a:rPr/>
-                        <a:t>360</a:t>
-                      </a:r>
-                    </a:p>
-                  </a:txBody>
-                </a:tc>
-                <a:tc>
-                  <a:txBody>
-                    <a:bodyPr/>
-                    <a:lstStyle/>
-                    <a:p>
-                      <a:pPr lvl="0" indent="0" marL="0" algn="r">
-                        <a:buNone/>
-                      </a:pPr>
-                      <a:r>
-                        <a:rPr/>
-                        <a:t>2531400</a:t>
+                        <a:t>air</a:t>
+                      </a:r>
+                    </a:p>
+                  </a:txBody>
+                </a:tc>
+                <a:tc>
+                  <a:txBody>
+                    <a:bodyPr/>
+                    <a:lstStyle/>
+                    <a:p>
+                      <a:pPr lvl="0" indent="0" marL="0" algn="l">
+                        <a:buNone/>
+                      </a:pPr>
+                      <a:r>
+                        <a:rPr/>
+                        <a:t>Bundesland</a:t>
+                      </a:r>
+                    </a:p>
+                  </a:txBody>
+                </a:tc>
+                <a:tc>
+                  <a:txBody>
+                    <a:bodyPr/>
+                    <a:lstStyle/>
+                    <a:p>
+                      <a:pPr lvl="0" indent="0" marL="0" algn="l">
+                        <a:buNone/>
+                      </a:pPr>
+                      <a:r>
+                        <a:rPr/>
+                        <a:t>major</a:t>
+                      </a:r>
+                    </a:p>
+                  </a:txBody>
+                </a:tc>
+                <a:tc>
+                  <a:txBody>
+                    <a:bodyPr/>
+                    <a:lstStyle/>
+                    <a:p>
+                      <a:pPr lvl="0" indent="0" marL="0" algn="l">
+                        <a:buNone/>
+                      </a:pPr>
+                      <a:r>
+                        <a:rPr/>
+                        <a:t>Overweight</a:t>
+                      </a:r>
+                    </a:p>
+                  </a:txBody>
+                </a:tc>
+                <a:tc>
+                  <a:txBody>
+                    <a:bodyPr/>
+                    <a:lstStyle/>
+                    <a:p>
+                      <a:pPr lvl="0" indent="0" marL="0" algn="r">
+                        <a:buNone/>
+                      </a:pPr>
+                      <a:r>
+                        <a:rPr/>
+                        <a:t>215</a:t>
+                      </a:r>
+                    </a:p>
+                  </a:txBody>
+                </a:tc>
+                <a:tc>
+                  <a:txBody>
+                    <a:bodyPr/>
+                    <a:lstStyle/>
+                    <a:p>
+                      <a:pPr lvl="0" indent="0" marL="0" algn="r">
+                        <a:buNone/>
+                      </a:pPr>
+                      <a:r>
+                        <a:rPr/>
+                        <a:t>381247</a:t>
                       </a:r>
                     </a:p>
                   </a:txBody>
@@ -5842,82 +5969,82 @@
                       </a:pPr>
                       <a:r>
                         <a:rPr/>
-                        <a:t>rail</a:t>
-                      </a:r>
-                    </a:p>
-                  </a:txBody>
-                </a:tc>
-                <a:tc>
-                  <a:txBody>
-                    <a:bodyPr/>
-                    <a:lstStyle/>
-                    <a:p>
-                      <a:pPr lvl="0" indent="0" marL="0" algn="l">
-                        <a:buNone/>
-                      </a:pPr>
-                      <a:r>
-                        <a:rPr/>
-                        <a:t>EEA</a:t>
-                      </a:r>
-                    </a:p>
-                  </a:txBody>
-                </a:tc>
-                <a:tc>
-                  <a:txBody>
-                    <a:bodyPr/>
-                    <a:lstStyle/>
-                    <a:p>
-                      <a:pPr lvl="0" indent="0" marL="0" algn="l">
-                        <a:buNone/>
-                      </a:pPr>
-                      <a:r>
-                        <a:rPr/>
-                        <a:t>all</a:t>
-                      </a:r>
-                    </a:p>
-                  </a:txBody>
-                </a:tc>
-                <a:tc>
-                  <a:txBody>
-                    <a:bodyPr/>
-                    <a:lstStyle/>
-                    <a:p>
-                      <a:pPr lvl="0" indent="0" marL="0" algn="l">
-                        <a:buNone/>
-                      </a:pPr>
-                      <a:r>
-                        <a:rPr/>
-                        <a:t>High noise annoyance</a:t>
-                      </a:r>
-                    </a:p>
-                  </a:txBody>
-                </a:tc>
-                <a:tc>
-                  <a:txBody>
-                    <a:bodyPr/>
-                    <a:lstStyle/>
-                    <a:p>
-                      <a:pPr lvl="0" indent="0" marL="0" algn="r">
-                        <a:buNone/>
-                      </a:pPr>
-                      <a:r>
-                        <a:rPr/>
-                        <a:t>360</a:t>
-                      </a:r>
-                    </a:p>
-                  </a:txBody>
-                </a:tc>
-                <a:tc>
-                  <a:txBody>
-                    <a:bodyPr/>
-                    <a:lstStyle/>
-                    <a:p>
-                      <a:pPr lvl="0" indent="0" marL="0" algn="r">
-                        <a:buNone/>
-                      </a:pPr>
-                      <a:r>
-                        <a:rPr/>
-                        <a:t>2531400</a:t>
+                        <a:t>air</a:t>
+                      </a:r>
+                    </a:p>
+                  </a:txBody>
+                </a:tc>
+                <a:tc>
+                  <a:txBody>
+                    <a:bodyPr/>
+                    <a:lstStyle/>
+                    <a:p>
+                      <a:pPr lvl="0" indent="0" marL="0" algn="l">
+                        <a:buNone/>
+                      </a:pPr>
+                      <a:r>
+                        <a:rPr/>
+                        <a:t>Bundesland</a:t>
+                      </a:r>
+                    </a:p>
+                  </a:txBody>
+                </a:tc>
+                <a:tc>
+                  <a:txBody>
+                    <a:bodyPr/>
+                    <a:lstStyle/>
+                    <a:p>
+                      <a:pPr lvl="0" indent="0" marL="0" algn="l">
+                        <a:buNone/>
+                      </a:pPr>
+                      <a:r>
+                        <a:rPr/>
+                        <a:t>major</a:t>
+                      </a:r>
+                    </a:p>
+                  </a:txBody>
+                </a:tc>
+                <a:tc>
+                  <a:txBody>
+                    <a:bodyPr/>
+                    <a:lstStyle/>
+                    <a:p>
+                      <a:pPr lvl="0" indent="0" marL="0" algn="l">
+                        <a:buNone/>
+                      </a:pPr>
+                      <a:r>
+                        <a:rPr/>
+                        <a:t>High sleep disturbance</a:t>
+                      </a:r>
+                    </a:p>
+                  </a:txBody>
+                </a:tc>
+                <a:tc>
+                  <a:txBody>
+                    <a:bodyPr/>
+                    <a:lstStyle/>
+                    <a:p>
+                      <a:pPr lvl="0" indent="0" marL="0" algn="r">
+                        <a:buNone/>
+                      </a:pPr>
+                      <a:r>
+                        <a:rPr/>
+                        <a:t>215</a:t>
+                      </a:r>
+                    </a:p>
+                  </a:txBody>
+                </a:tc>
+                <a:tc>
+                  <a:txBody>
+                    <a:bodyPr/>
+                    <a:lstStyle/>
+                    <a:p>
+                      <a:pPr lvl="0" indent="0" marL="0" algn="r">
+                        <a:buNone/>
+                      </a:pPr>
+                      <a:r>
+                        <a:rPr/>
+                        <a:t>82638</a:t>
                       </a:r>
                     </a:p>
                   </a:txBody>
@@ -5934,82 +6061,82 @@
                       </a:pPr>
                       <a:r>
                         <a:rPr/>
-                        <a:t>rail</a:t>
-                      </a:r>
-                    </a:p>
-                  </a:txBody>
-                </a:tc>
-                <a:tc>
-                  <a:txBody>
-                    <a:bodyPr/>
-                    <a:lstStyle/>
-                    <a:p>
-                      <a:pPr lvl="0" indent="0" marL="0" algn="l">
-                        <a:buNone/>
-                      </a:pPr>
-                      <a:r>
-                        <a:rPr/>
-                        <a:t>EEA</a:t>
-                      </a:r>
-                    </a:p>
-                  </a:txBody>
-                </a:tc>
-                <a:tc>
-                  <a:txBody>
-                    <a:bodyPr/>
-                    <a:lstStyle/>
-                    <a:p>
-                      <a:pPr lvl="0" indent="0" marL="0" algn="l">
-                        <a:buNone/>
-                      </a:pPr>
-                      <a:r>
-                        <a:rPr/>
-                        <a:t>all</a:t>
-                      </a:r>
-                    </a:p>
-                  </a:txBody>
-                </a:tc>
-                <a:tc>
-                  <a:txBody>
-                    <a:bodyPr/>
-                    <a:lstStyle/>
-                    <a:p>
-                      <a:pPr lvl="0" indent="0" marL="0" algn="l">
-                        <a:buNone/>
-                      </a:pPr>
-                      <a:r>
-                        <a:rPr/>
-                        <a:t>High sleep disturbance</a:t>
-                      </a:r>
-                    </a:p>
-                  </a:txBody>
-                </a:tc>
-                <a:tc>
-                  <a:txBody>
-                    <a:bodyPr/>
-                    <a:lstStyle/>
-                    <a:p>
-                      <a:pPr lvl="0" indent="0" marL="0" algn="r">
-                        <a:buNone/>
-                      </a:pPr>
-                      <a:r>
-                        <a:rPr/>
-                        <a:t>360</a:t>
-                      </a:r>
-                    </a:p>
-                  </a:txBody>
-                </a:tc>
-                <a:tc>
-                  <a:txBody>
-                    <a:bodyPr/>
-                    <a:lstStyle/>
-                    <a:p>
-                      <a:pPr lvl="0" indent="0" marL="0" algn="r">
-                        <a:buNone/>
-                      </a:pPr>
-                      <a:r>
-                        <a:rPr/>
-                        <a:t>1882700</a:t>
+                        <a:t>industry</a:t>
+                      </a:r>
+                    </a:p>
+                  </a:txBody>
+                </a:tc>
+                <a:tc>
+                  <a:txBody>
+                    <a:bodyPr/>
+                    <a:lstStyle/>
+                    <a:p>
+                      <a:pPr lvl="0" indent="0" marL="0" algn="l">
+                        <a:buNone/>
+                      </a:pPr>
+                      <a:r>
+                        <a:rPr/>
+                        <a:t>Bundesland</a:t>
+                      </a:r>
+                    </a:p>
+                  </a:txBody>
+                </a:tc>
+                <a:tc>
+                  <a:txBody>
+                    <a:bodyPr/>
+                    <a:lstStyle/>
+                    <a:p>
+                      <a:pPr lvl="0" indent="0" marL="0" algn="l">
+                        <a:buNone/>
+                      </a:pPr>
+                      <a:r>
+                        <a:rPr/>
+                        <a:t>major</a:t>
+                      </a:r>
+                    </a:p>
+                  </a:txBody>
+                </a:tc>
+                <a:tc>
+                  <a:txBody>
+                    <a:bodyPr/>
+                    <a:lstStyle/>
+                    <a:p>
+                      <a:pPr lvl="0" indent="0" marL="0" algn="l">
+                        <a:buNone/>
+                      </a:pPr>
+                      <a:r>
+                        <a:rPr/>
+                        <a:t>High noise annoyance</a:t>
+                      </a:r>
+                    </a:p>
+                  </a:txBody>
+                </a:tc>
+                <a:tc>
+                  <a:txBody>
+                    <a:bodyPr/>
+                    <a:lstStyle/>
+                    <a:p>
+                      <a:pPr lvl="0" indent="0" marL="0" algn="r">
+                        <a:buNone/>
+                      </a:pPr>
+                      <a:r>
+                        <a:rPr/>
+                        <a:t>30</a:t>
+                      </a:r>
+                    </a:p>
+                  </a:txBody>
+                </a:tc>
+                <a:tc>
+                  <a:txBody>
+                    <a:bodyPr/>
+                    <a:lstStyle/>
+                    <a:p>
+                      <a:pPr lvl="0" indent="0" marL="0" algn="r">
+                        <a:buNone/>
+                      </a:pPr>
+                      <a:r>
+                        <a:rPr/>
+                        <a:t>6336</a:t>
                       </a:r>
                     </a:p>
                   </a:txBody>
@@ -6026,22 +6153,22 @@
                       </a:pPr>
                       <a:r>
                         <a:rPr/>
-                        <a:t>rail</a:t>
-                      </a:r>
-                    </a:p>
-                  </a:txBody>
-                </a:tc>
-                <a:tc>
-                  <a:txBody>
-                    <a:bodyPr/>
-                    <a:lstStyle/>
-                    <a:p>
-                      <a:pPr lvl="0" indent="0" marL="0" algn="l">
-                        <a:buNone/>
-                      </a:pPr>
-                      <a:r>
-                        <a:rPr/>
-                        <a:t>EEA</a:t>
+                        <a:t>industry</a:t>
+                      </a:r>
+                    </a:p>
+                  </a:txBody>
+                </a:tc>
+                <a:tc>
+                  <a:txBody>
+                    <a:bodyPr/>
+                    <a:lstStyle/>
+                    <a:p>
+                      <a:pPr lvl="0" indent="0" marL="0" algn="l">
+                        <a:buNone/>
+                      </a:pPr>
+                      <a:r>
+                        <a:rPr/>
+                        <a:t>Bundesland</a:t>
                       </a:r>
                     </a:p>
                   </a:txBody>
@@ -6071,37 +6198,37 @@
                       </a:pPr>
                       <a:r>
                         <a:rPr/>
-                        <a:t>All-cause mortality</a:t>
-                      </a:r>
-                    </a:p>
-                  </a:txBody>
-                </a:tc>
-                <a:tc>
-                  <a:txBody>
-                    <a:bodyPr/>
-                    <a:lstStyle/>
-                    <a:p>
-                      <a:pPr lvl="0" indent="0" marL="0" algn="r">
-                        <a:buNone/>
-                      </a:pPr>
-                      <a:r>
-                        <a:rPr/>
-                        <a:t>360</a:t>
-                      </a:r>
-                    </a:p>
-                  </a:txBody>
-                </a:tc>
-                <a:tc>
-                  <a:txBody>
-                    <a:bodyPr/>
-                    <a:lstStyle/>
-                    <a:p>
-                      <a:pPr lvl="0" indent="0" marL="0" algn="r">
-                        <a:buNone/>
-                      </a:pPr>
-                      <a:r>
-                        <a:rPr/>
-                        <a:t>1220100</a:t>
+                        <a:t>High sleep disturbance</a:t>
+                      </a:r>
+                    </a:p>
+                  </a:txBody>
+                </a:tc>
+                <a:tc>
+                  <a:txBody>
+                    <a:bodyPr/>
+                    <a:lstStyle/>
+                    <a:p>
+                      <a:pPr lvl="0" indent="0" marL="0" algn="r">
+                        <a:buNone/>
+                      </a:pPr>
+                      <a:r>
+                        <a:rPr/>
+                        <a:t>30</a:t>
+                      </a:r>
+                    </a:p>
+                  </a:txBody>
+                </a:tc>
+                <a:tc>
+                  <a:txBody>
+                    <a:bodyPr/>
+                    <a:lstStyle/>
+                    <a:p>
+                      <a:pPr lvl="0" indent="0" marL="0" algn="r">
+                        <a:buNone/>
+                      </a:pPr>
+                      <a:r>
+                        <a:rPr/>
+                        <a:t>4806</a:t>
                       </a:r>
                     </a:p>
                   </a:txBody>
@@ -6118,7 +6245,7 @@
                       </a:pPr>
                       <a:r>
                         <a:rPr/>
-                        <a:t>rail</a:t>
+                        <a:t>road</a:t>
                       </a:r>
                     </a:p>
                   </a:txBody>
@@ -6148,22 +6275,22 @@
                       </a:pPr>
                       <a:r>
                         <a:rPr/>
-                        <a:t>major</a:t>
-                      </a:r>
-                    </a:p>
-                  </a:txBody>
-                </a:tc>
-                <a:tc>
-                  <a:txBody>
-                    <a:bodyPr/>
-                    <a:lstStyle/>
-                    <a:p>
-                      <a:pPr lvl="0" indent="0" marL="0" algn="l">
-                        <a:buNone/>
-                      </a:pPr>
-                      <a:r>
-                        <a:rPr/>
-                        <a:t>Cardiovascular disease</a:t>
+                        <a:t>all</a:t>
+                      </a:r>
+                    </a:p>
+                  </a:txBody>
+                </a:tc>
+                <a:tc>
+                  <a:txBody>
+                    <a:bodyPr/>
+                    <a:lstStyle/>
+                    <a:p>
+                      <a:pPr lvl="0" indent="0" marL="0" algn="l">
+                        <a:buNone/>
+                      </a:pPr>
+                      <a:r>
+                        <a:rPr/>
+                        <a:t>High noise annoyance</a:t>
                       </a:r>
                     </a:p>
                   </a:txBody>
@@ -6193,7 +6320,7 @@
                       </a:pPr>
                       <a:r>
                         <a:rPr/>
-                        <a:t>1220100</a:t>
+                        <a:t>10387800</a:t>
                       </a:r>
                     </a:p>
                   </a:txBody>
@@ -6210,7 +6337,7 @@
                       </a:pPr>
                       <a:r>
                         <a:rPr/>
-                        <a:t>rail</a:t>
+                        <a:t>road</a:t>
                       </a:r>
                     </a:p>
                   </a:txBody>
@@ -6240,22 +6367,22 @@
                       </a:pPr>
                       <a:r>
                         <a:rPr/>
-                        <a:t>major</a:t>
-                      </a:r>
-                    </a:p>
-                  </a:txBody>
-                </a:tc>
-                <a:tc>
-                  <a:txBody>
-                    <a:bodyPr/>
-                    <a:lstStyle/>
-                    <a:p>
-                      <a:pPr lvl="0" indent="0" marL="0" algn="l">
-                        <a:buNone/>
-                      </a:pPr>
-                      <a:r>
-                        <a:rPr/>
-                        <a:t>Diabetes</a:t>
+                        <a:t>all</a:t>
+                      </a:r>
+                    </a:p>
+                  </a:txBody>
+                </a:tc>
+                <a:tc>
+                  <a:txBody>
+                    <a:bodyPr/>
+                    <a:lstStyle/>
+                    <a:p>
+                      <a:pPr lvl="0" indent="0" marL="0" algn="l">
+                        <a:buNone/>
+                      </a:pPr>
+                      <a:r>
+                        <a:rPr/>
+                        <a:t>All-cause mortality</a:t>
                       </a:r>
                     </a:p>
                   </a:txBody>
@@ -6285,7 +6412,7 @@
                       </a:pPr>
                       <a:r>
                         <a:rPr/>
-                        <a:t>1220100</a:t>
+                        <a:t>10387800</a:t>
                       </a:r>
                     </a:p>
                   </a:txBody>
@@ -6302,7 +6429,7 @@
                       </a:pPr>
                       <a:r>
                         <a:rPr/>
-                        <a:t>rail</a:t>
+                        <a:t>road</a:t>
                       </a:r>
                     </a:p>
                   </a:txBody>
@@ -6332,22 +6459,22 @@
                       </a:pPr>
                       <a:r>
                         <a:rPr/>
-                        <a:t>major</a:t>
-                      </a:r>
-                    </a:p>
-                  </a:txBody>
-                </a:tc>
-                <a:tc>
-                  <a:txBody>
-                    <a:bodyPr/>
-                    <a:lstStyle/>
-                    <a:p>
-                      <a:pPr lvl="0" indent="0" marL="0" algn="l">
-                        <a:buNone/>
-                      </a:pPr>
-                      <a:r>
-                        <a:rPr/>
-                        <a:t>High noise annoyance</a:t>
+                        <a:t>all</a:t>
+                      </a:r>
+                    </a:p>
+                  </a:txBody>
+                </a:tc>
+                <a:tc>
+                  <a:txBody>
+                    <a:bodyPr/>
+                    <a:lstStyle/>
+                    <a:p>
+                      <a:pPr lvl="0" indent="0" marL="0" algn="l">
+                        <a:buNone/>
+                      </a:pPr>
+                      <a:r>
+                        <a:rPr/>
+                        <a:t>Cardiovascular disease</a:t>
                       </a:r>
                     </a:p>
                   </a:txBody>
@@ -6377,7 +6504,7 @@
                       </a:pPr>
                       <a:r>
                         <a:rPr/>
-                        <a:t>1220100</a:t>
+                        <a:t>10387800</a:t>
                       </a:r>
                     </a:p>
                   </a:txBody>
@@ -6394,7 +6521,7 @@
                       </a:pPr>
                       <a:r>
                         <a:rPr/>
-                        <a:t>rail</a:t>
+                        <a:t>road</a:t>
                       </a:r>
                     </a:p>
                   </a:txBody>
@@ -6424,22 +6551,22 @@
                       </a:pPr>
                       <a:r>
                         <a:rPr/>
-                        <a:t>major</a:t>
-                      </a:r>
-                    </a:p>
-                  </a:txBody>
-                </a:tc>
-                <a:tc>
-                  <a:txBody>
-                    <a:bodyPr/>
-                    <a:lstStyle/>
-                    <a:p>
-                      <a:pPr lvl="0" indent="0" marL="0" algn="l">
-                        <a:buNone/>
-                      </a:pPr>
-                      <a:r>
-                        <a:rPr/>
-                        <a:t>High sleep disturbance</a:t>
+                        <a:t>all</a:t>
+                      </a:r>
+                    </a:p>
+                  </a:txBody>
+                </a:tc>
+                <a:tc>
+                  <a:txBody>
+                    <a:bodyPr/>
+                    <a:lstStyle/>
+                    <a:p>
+                      <a:pPr lvl="0" indent="0" marL="0" algn="l">
+                        <a:buNone/>
+                      </a:pPr>
+                      <a:r>
+                        <a:rPr/>
+                        <a:t>Diabetes</a:t>
                       </a:r>
                     </a:p>
                   </a:txBody>
@@ -6469,7 +6596,7 @@
                       </a:pPr>
                       <a:r>
                         <a:rPr/>
-                        <a:t>935700</a:t>
+                        <a:t>10387800</a:t>
                       </a:r>
                     </a:p>
                   </a:txBody>
@@ -6501,7 +6628,7 @@
                       </a:pPr>
                       <a:r>
                         <a:rPr/>
-                        <a:t>Bundesland</a:t>
+                        <a:t>EEA</a:t>
                       </a:r>
                     </a:p>
                   </a:txBody>
@@ -6531,37 +6658,37 @@
                       </a:pPr>
                       <a:r>
                         <a:rPr/>
-                        <a:t>All-cause mortality</a:t>
-                      </a:r>
-                    </a:p>
-                  </a:txBody>
-                </a:tc>
-                <a:tc>
-                  <a:txBody>
-                    <a:bodyPr/>
-                    <a:lstStyle/>
-                    <a:p>
-                      <a:pPr lvl="0" indent="0" marL="0" algn="r">
-                        <a:buNone/>
-                      </a:pPr>
-                      <a:r>
-                        <a:rPr/>
-                        <a:t>30</a:t>
-                      </a:r>
-                    </a:p>
-                  </a:txBody>
-                </a:tc>
-                <a:tc>
-                  <a:txBody>
-                    <a:bodyPr/>
-                    <a:lstStyle/>
-                    <a:p>
-                      <a:pPr lvl="0" indent="0" marL="0" algn="r">
-                        <a:buNone/>
-                      </a:pPr>
-                      <a:r>
-                        <a:rPr/>
-                        <a:t>688104</a:t>
+                        <a:t>Reading Comprehension</a:t>
+                      </a:r>
+                    </a:p>
+                  </a:txBody>
+                </a:tc>
+                <a:tc>
+                  <a:txBody>
+                    <a:bodyPr/>
+                    <a:lstStyle/>
+                    <a:p>
+                      <a:pPr lvl="0" indent="0" marL="0" algn="r">
+                        <a:buNone/>
+                      </a:pPr>
+                      <a:r>
+                        <a:rPr/>
+                        <a:t>360</a:t>
+                      </a:r>
+                    </a:p>
+                  </a:txBody>
+                </a:tc>
+                <a:tc>
+                  <a:txBody>
+                    <a:bodyPr/>
+                    <a:lstStyle/>
+                    <a:p>
+                      <a:pPr lvl="0" indent="0" marL="0" algn="r">
+                        <a:buNone/>
+                      </a:pPr>
+                      <a:r>
+                        <a:rPr/>
+                        <a:t>10387800</a:t>
                       </a:r>
                     </a:p>
                   </a:txBody>
@@ -6593,7 +6720,7 @@
                       </a:pPr>
                       <a:r>
                         <a:rPr/>
-                        <a:t>Bundesland</a:t>
+                        <a:t>EEA</a:t>
                       </a:r>
                     </a:p>
                   </a:txBody>
@@ -6623,37 +6750,37 @@
                       </a:pPr>
                       <a:r>
                         <a:rPr/>
-                        <a:t>Cardiovascular disease</a:t>
-                      </a:r>
-                    </a:p>
-                  </a:txBody>
-                </a:tc>
-                <a:tc>
-                  <a:txBody>
-                    <a:bodyPr/>
-                    <a:lstStyle/>
-                    <a:p>
-                      <a:pPr lvl="0" indent="0" marL="0" algn="r">
-                        <a:buNone/>
-                      </a:pPr>
-                      <a:r>
-                        <a:rPr/>
-                        <a:t>30</a:t>
-                      </a:r>
-                    </a:p>
-                  </a:txBody>
-                </a:tc>
-                <a:tc>
-                  <a:txBody>
-                    <a:bodyPr/>
-                    <a:lstStyle/>
-                    <a:p>
-                      <a:pPr lvl="0" indent="0" marL="0" algn="r">
-                        <a:buNone/>
-                      </a:pPr>
-                      <a:r>
-                        <a:rPr/>
-                        <a:t>688104</a:t>
+                        <a:t>Behavioural problems</a:t>
+                      </a:r>
+                    </a:p>
+                  </a:txBody>
+                </a:tc>
+                <a:tc>
+                  <a:txBody>
+                    <a:bodyPr/>
+                    <a:lstStyle/>
+                    <a:p>
+                      <a:pPr lvl="0" indent="0" marL="0" algn="r">
+                        <a:buNone/>
+                      </a:pPr>
+                      <a:r>
+                        <a:rPr/>
+                        <a:t>360</a:t>
+                      </a:r>
+                    </a:p>
+                  </a:txBody>
+                </a:tc>
+                <a:tc>
+                  <a:txBody>
+                    <a:bodyPr/>
+                    <a:lstStyle/>
+                    <a:p>
+                      <a:pPr lvl="0" indent="0" marL="0" algn="r">
+                        <a:buNone/>
+                      </a:pPr>
+                      <a:r>
+                        <a:rPr/>
+                        <a:t>10387800</a:t>
                       </a:r>
                     </a:p>
                   </a:txBody>
@@ -6685,7 +6812,7 @@
                       </a:pPr>
                       <a:r>
                         <a:rPr/>
-                        <a:t>Bundesland</a:t>
+                        <a:t>EEA</a:t>
                       </a:r>
                     </a:p>
                   </a:txBody>
@@ -6715,37 +6842,37 @@
                       </a:pPr>
                       <a:r>
                         <a:rPr/>
-                        <a:t>Diabetes</a:t>
-                      </a:r>
-                    </a:p>
-                  </a:txBody>
-                </a:tc>
-                <a:tc>
-                  <a:txBody>
-                    <a:bodyPr/>
-                    <a:lstStyle/>
-                    <a:p>
-                      <a:pPr lvl="0" indent="0" marL="0" algn="r">
-                        <a:buNone/>
-                      </a:pPr>
-                      <a:r>
-                        <a:rPr/>
-                        <a:t>30</a:t>
-                      </a:r>
-                    </a:p>
-                  </a:txBody>
-                </a:tc>
-                <a:tc>
-                  <a:txBody>
-                    <a:bodyPr/>
-                    <a:lstStyle/>
-                    <a:p>
-                      <a:pPr lvl="0" indent="0" marL="0" algn="r">
-                        <a:buNone/>
-                      </a:pPr>
-                      <a:r>
-                        <a:rPr/>
-                        <a:t>688104</a:t>
+                        <a:t>Overweight</a:t>
+                      </a:r>
+                    </a:p>
+                  </a:txBody>
+                </a:tc>
+                <a:tc>
+                  <a:txBody>
+                    <a:bodyPr/>
+                    <a:lstStyle/>
+                    <a:p>
+                      <a:pPr lvl="0" indent="0" marL="0" algn="r">
+                        <a:buNone/>
+                      </a:pPr>
+                      <a:r>
+                        <a:rPr/>
+                        <a:t>360</a:t>
+                      </a:r>
+                    </a:p>
+                  </a:txBody>
+                </a:tc>
+                <a:tc>
+                  <a:txBody>
+                    <a:bodyPr/>
+                    <a:lstStyle/>
+                    <a:p>
+                      <a:pPr lvl="0" indent="0" marL="0" algn="r">
+                        <a:buNone/>
+                      </a:pPr>
+                      <a:r>
+                        <a:rPr/>
+                        <a:t>10387800</a:t>
                       </a:r>
                     </a:p>
                   </a:txBody>
@@ -6777,7 +6904,7 @@
                       </a:pPr>
                       <a:r>
                         <a:rPr/>
-                        <a:t>Bundesland</a:t>
+                        <a:t>EEA</a:t>
                       </a:r>
                     </a:p>
                   </a:txBody>
@@ -6807,37 +6934,37 @@
                       </a:pPr>
                       <a:r>
                         <a:rPr/>
-                        <a:t>High noise annoyance</a:t>
-                      </a:r>
-                    </a:p>
-                  </a:txBody>
-                </a:tc>
-                <a:tc>
-                  <a:txBody>
-                    <a:bodyPr/>
-                    <a:lstStyle/>
-                    <a:p>
-                      <a:pPr lvl="0" indent="0" marL="0" algn="r">
-                        <a:buNone/>
-                      </a:pPr>
-                      <a:r>
-                        <a:rPr/>
-                        <a:t>30</a:t>
-                      </a:r>
-                    </a:p>
-                  </a:txBody>
-                </a:tc>
-                <a:tc>
-                  <a:txBody>
-                    <a:bodyPr/>
-                    <a:lstStyle/>
-                    <a:p>
-                      <a:pPr lvl="0" indent="0" marL="0" algn="r">
-                        <a:buNone/>
-                      </a:pPr>
-                      <a:r>
-                        <a:rPr/>
-                        <a:t>688104</a:t>
+                        <a:t>High sleep disturbance</a:t>
+                      </a:r>
+                    </a:p>
+                  </a:txBody>
+                </a:tc>
+                <a:tc>
+                  <a:txBody>
+                    <a:bodyPr/>
+                    <a:lstStyle/>
+                    <a:p>
+                      <a:pPr lvl="0" indent="0" marL="0" algn="r">
+                        <a:buNone/>
+                      </a:pPr>
+                      <a:r>
+                        <a:rPr/>
+                        <a:t>360</a:t>
+                      </a:r>
+                    </a:p>
+                  </a:txBody>
+                </a:tc>
+                <a:tc>
+                  <a:txBody>
+                    <a:bodyPr/>
+                    <a:lstStyle/>
+                    <a:p>
+                      <a:pPr lvl="0" indent="0" marL="0" algn="r">
+                        <a:buNone/>
+                      </a:pPr>
+                      <a:r>
+                        <a:rPr/>
+                        <a:t>7495900</a:t>
                       </a:r>
                     </a:p>
                   </a:txBody>
@@ -6869,67 +6996,67 @@
                       </a:pPr>
                       <a:r>
                         <a:rPr/>
-                        <a:t>Bundesland</a:t>
-                      </a:r>
-                    </a:p>
-                  </a:txBody>
-                </a:tc>
-                <a:tc>
-                  <a:txBody>
-                    <a:bodyPr/>
-                    <a:lstStyle/>
-                    <a:p>
-                      <a:pPr lvl="0" indent="0" marL="0" algn="l">
-                        <a:buNone/>
-                      </a:pPr>
-                      <a:r>
-                        <a:rPr/>
-                        <a:t>all</a:t>
-                      </a:r>
-                    </a:p>
-                  </a:txBody>
-                </a:tc>
-                <a:tc>
-                  <a:txBody>
-                    <a:bodyPr/>
-                    <a:lstStyle/>
-                    <a:p>
-                      <a:pPr lvl="0" indent="0" marL="0" algn="l">
-                        <a:buNone/>
-                      </a:pPr>
-                      <a:r>
-                        <a:rPr/>
-                        <a:t>High sleep disturbance</a:t>
-                      </a:r>
-                    </a:p>
-                  </a:txBody>
-                </a:tc>
-                <a:tc>
-                  <a:txBody>
-                    <a:bodyPr/>
-                    <a:lstStyle/>
-                    <a:p>
-                      <a:pPr lvl="0" indent="0" marL="0" algn="r">
-                        <a:buNone/>
-                      </a:pPr>
-                      <a:r>
-                        <a:rPr/>
-                        <a:t>30</a:t>
-                      </a:r>
-                    </a:p>
-                  </a:txBody>
-                </a:tc>
-                <a:tc>
-                  <a:txBody>
-                    <a:bodyPr/>
-                    <a:lstStyle/>
-                    <a:p>
-                      <a:pPr lvl="0" indent="0" marL="0" algn="r">
-                        <a:buNone/>
-                      </a:pPr>
-                      <a:r>
-                        <a:rPr/>
-                        <a:t>514053</a:t>
+                        <a:t>EEA</a:t>
+                      </a:r>
+                    </a:p>
+                  </a:txBody>
+                </a:tc>
+                <a:tc>
+                  <a:txBody>
+                    <a:bodyPr/>
+                    <a:lstStyle/>
+                    <a:p>
+                      <a:pPr lvl="0" indent="0" marL="0" algn="l">
+                        <a:buNone/>
+                      </a:pPr>
+                      <a:r>
+                        <a:rPr/>
+                        <a:t>major</a:t>
+                      </a:r>
+                    </a:p>
+                  </a:txBody>
+                </a:tc>
+                <a:tc>
+                  <a:txBody>
+                    <a:bodyPr/>
+                    <a:lstStyle/>
+                    <a:p>
+                      <a:pPr lvl="0" indent="0" marL="0" algn="l">
+                        <a:buNone/>
+                      </a:pPr>
+                      <a:r>
+                        <a:rPr/>
+                        <a:t>High noise annoyance</a:t>
+                      </a:r>
+                    </a:p>
+                  </a:txBody>
+                </a:tc>
+                <a:tc>
+                  <a:txBody>
+                    <a:bodyPr/>
+                    <a:lstStyle/>
+                    <a:p>
+                      <a:pPr lvl="0" indent="0" marL="0" algn="r">
+                        <a:buNone/>
+                      </a:pPr>
+                      <a:r>
+                        <a:rPr/>
+                        <a:t>360</a:t>
+                      </a:r>
+                    </a:p>
+                  </a:txBody>
+                </a:tc>
+                <a:tc>
+                  <a:txBody>
+                    <a:bodyPr/>
+                    <a:lstStyle/>
+                    <a:p>
+                      <a:pPr lvl="0" indent="0" marL="0" algn="r">
+                        <a:buNone/>
+                      </a:pPr>
+                      <a:r>
+                        <a:rPr/>
+                        <a:t>6651200</a:t>
                       </a:r>
                     </a:p>
                   </a:txBody>
@@ -6961,7 +7088,7 @@
                       </a:pPr>
                       <a:r>
                         <a:rPr/>
-                        <a:t>Bundesland</a:t>
+                        <a:t>EEA</a:t>
                       </a:r>
                     </a:p>
                   </a:txBody>
@@ -7006,22 +7133,22 @@
                       </a:pPr>
                       <a:r>
                         <a:rPr/>
-                        <a:t>8700</a:t>
-                      </a:r>
-                    </a:p>
-                  </a:txBody>
-                </a:tc>
-                <a:tc>
-                  <a:txBody>
-                    <a:bodyPr/>
-                    <a:lstStyle/>
-                    <a:p>
-                      <a:pPr lvl="0" indent="0" marL="0" algn="r">
-                        <a:buNone/>
-                      </a:pPr>
-                      <a:r>
-                        <a:rPr/>
-                        <a:t>2909567</a:t>
+                        <a:t>360</a:t>
+                      </a:r>
+                    </a:p>
+                  </a:txBody>
+                </a:tc>
+                <a:tc>
+                  <a:txBody>
+                    <a:bodyPr/>
+                    <a:lstStyle/>
+                    <a:p>
+                      <a:pPr lvl="0" indent="0" marL="0" algn="r">
+                        <a:buNone/>
+                      </a:pPr>
+                      <a:r>
+                        <a:rPr/>
+                        <a:t>6651200</a:t>
                       </a:r>
                     </a:p>
                   </a:txBody>
@@ -7053,7 +7180,7 @@
                       </a:pPr>
                       <a:r>
                         <a:rPr/>
-                        <a:t>Bundesland</a:t>
+                        <a:t>EEA</a:t>
                       </a:r>
                     </a:p>
                   </a:txBody>
@@ -7098,22 +7225,22 @@
                       </a:pPr>
                       <a:r>
                         <a:rPr/>
-                        <a:t>8700</a:t>
-                      </a:r>
-                    </a:p>
-                  </a:txBody>
-                </a:tc>
-                <a:tc>
-                  <a:txBody>
-                    <a:bodyPr/>
-                    <a:lstStyle/>
-                    <a:p>
-                      <a:pPr lvl="0" indent="0" marL="0" algn="r">
-                        <a:buNone/>
-                      </a:pPr>
-                      <a:r>
-                        <a:rPr/>
-                        <a:t>2909567</a:t>
+                        <a:t>360</a:t>
+                      </a:r>
+                    </a:p>
+                  </a:txBody>
+                </a:tc>
+                <a:tc>
+                  <a:txBody>
+                    <a:bodyPr/>
+                    <a:lstStyle/>
+                    <a:p>
+                      <a:pPr lvl="0" indent="0" marL="0" algn="r">
+                        <a:buNone/>
+                      </a:pPr>
+                      <a:r>
+                        <a:rPr/>
+                        <a:t>6651200</a:t>
                       </a:r>
                     </a:p>
                   </a:txBody>
@@ -7145,7 +7272,7 @@
                       </a:pPr>
                       <a:r>
                         <a:rPr/>
-                        <a:t>Bundesland</a:t>
+                        <a:t>EEA</a:t>
                       </a:r>
                     </a:p>
                   </a:txBody>
@@ -7190,22 +7317,22 @@
                       </a:pPr>
                       <a:r>
                         <a:rPr/>
-                        <a:t>8700</a:t>
-                      </a:r>
-                    </a:p>
-                  </a:txBody>
-                </a:tc>
-                <a:tc>
-                  <a:txBody>
-                    <a:bodyPr/>
-                    <a:lstStyle/>
-                    <a:p>
-                      <a:pPr lvl="0" indent="0" marL="0" algn="r">
-                        <a:buNone/>
-                      </a:pPr>
-                      <a:r>
-                        <a:rPr/>
-                        <a:t>2909567</a:t>
+                        <a:t>360</a:t>
+                      </a:r>
+                    </a:p>
+                  </a:txBody>
+                </a:tc>
+                <a:tc>
+                  <a:txBody>
+                    <a:bodyPr/>
+                    <a:lstStyle/>
+                    <a:p>
+                      <a:pPr lvl="0" indent="0" marL="0" algn="r">
+                        <a:buNone/>
+                      </a:pPr>
+                      <a:r>
+                        <a:rPr/>
+                        <a:t>6651200</a:t>
                       </a:r>
                     </a:p>
                   </a:txBody>
@@ -7237,7 +7364,7 @@
                       </a:pPr>
                       <a:r>
                         <a:rPr/>
-                        <a:t>Bundesland</a:t>
+                        <a:t>EEA</a:t>
                       </a:r>
                     </a:p>
                   </a:txBody>
@@ -7267,37 +7394,37 @@
                       </a:pPr>
                       <a:r>
                         <a:rPr/>
-                        <a:t>High noise annoyance</a:t>
-                      </a:r>
-                    </a:p>
-                  </a:txBody>
-                </a:tc>
-                <a:tc>
-                  <a:txBody>
-                    <a:bodyPr/>
-                    <a:lstStyle/>
-                    <a:p>
-                      <a:pPr lvl="0" indent="0" marL="0" algn="r">
-                        <a:buNone/>
-                      </a:pPr>
-                      <a:r>
-                        <a:rPr/>
-                        <a:t>8700</a:t>
-                      </a:r>
-                    </a:p>
-                  </a:txBody>
-                </a:tc>
-                <a:tc>
-                  <a:txBody>
-                    <a:bodyPr/>
-                    <a:lstStyle/>
-                    <a:p>
-                      <a:pPr lvl="0" indent="0" marL="0" algn="r">
-                        <a:buNone/>
-                      </a:pPr>
-                      <a:r>
-                        <a:rPr/>
-                        <a:t>2909567</a:t>
+                        <a:t>Reading Comprehension</a:t>
+                      </a:r>
+                    </a:p>
+                  </a:txBody>
+                </a:tc>
+                <a:tc>
+                  <a:txBody>
+                    <a:bodyPr/>
+                    <a:lstStyle/>
+                    <a:p>
+                      <a:pPr lvl="0" indent="0" marL="0" algn="r">
+                        <a:buNone/>
+                      </a:pPr>
+                      <a:r>
+                        <a:rPr/>
+                        <a:t>360</a:t>
+                      </a:r>
+                    </a:p>
+                  </a:txBody>
+                </a:tc>
+                <a:tc>
+                  <a:txBody>
+                    <a:bodyPr/>
+                    <a:lstStyle/>
+                    <a:p>
+                      <a:pPr lvl="0" indent="0" marL="0" algn="r">
+                        <a:buNone/>
+                      </a:pPr>
+                      <a:r>
+                        <a:rPr/>
+                        <a:t>6651200</a:t>
                       </a:r>
                     </a:p>
                   </a:txBody>
@@ -7329,7 +7456,7 @@
                       </a:pPr>
                       <a:r>
                         <a:rPr/>
-                        <a:t>Bundesland</a:t>
+                        <a:t>EEA</a:t>
                       </a:r>
                     </a:p>
                   </a:txBody>
@@ -7359,37 +7486,37 @@
                       </a:pPr>
                       <a:r>
                         <a:rPr/>
-                        <a:t>High sleep disturbance</a:t>
-                      </a:r>
-                    </a:p>
-                  </a:txBody>
-                </a:tc>
-                <a:tc>
-                  <a:txBody>
-                    <a:bodyPr/>
-                    <a:lstStyle/>
-                    <a:p>
-                      <a:pPr lvl="0" indent="0" marL="0" algn="r">
-                        <a:buNone/>
-                      </a:pPr>
-                      <a:r>
-                        <a:rPr/>
-                        <a:t>8700</a:t>
-                      </a:r>
-                    </a:p>
-                  </a:txBody>
-                </a:tc>
-                <a:tc>
-                  <a:txBody>
-                    <a:bodyPr/>
-                    <a:lstStyle/>
-                    <a:p>
-                      <a:pPr lvl="0" indent="0" marL="0" algn="r">
-                        <a:buNone/>
-                      </a:pPr>
-                      <a:r>
-                        <a:rPr/>
-                        <a:t>1800891</a:t>
+                        <a:t>Behavioural problems</a:t>
+                      </a:r>
+                    </a:p>
+                  </a:txBody>
+                </a:tc>
+                <a:tc>
+                  <a:txBody>
+                    <a:bodyPr/>
+                    <a:lstStyle/>
+                    <a:p>
+                      <a:pPr lvl="0" indent="0" marL="0" algn="r">
+                        <a:buNone/>
+                      </a:pPr>
+                      <a:r>
+                        <a:rPr/>
+                        <a:t>360</a:t>
+                      </a:r>
+                    </a:p>
+                  </a:txBody>
+                </a:tc>
+                <a:tc>
+                  <a:txBody>
+                    <a:bodyPr/>
+                    <a:lstStyle/>
+                    <a:p>
+                      <a:pPr lvl="0" indent="0" marL="0" algn="r">
+                        <a:buNone/>
+                      </a:pPr>
+                      <a:r>
+                        <a:rPr/>
+                        <a:t>6651200</a:t>
                       </a:r>
                     </a:p>
                   </a:txBody>
@@ -7436,22 +7563,22 @@
                       </a:pPr>
                       <a:r>
                         <a:rPr/>
-                        <a:t>all</a:t>
-                      </a:r>
-                    </a:p>
-                  </a:txBody>
-                </a:tc>
-                <a:tc>
-                  <a:txBody>
-                    <a:bodyPr/>
-                    <a:lstStyle/>
-                    <a:p>
-                      <a:pPr lvl="0" indent="0" marL="0" algn="l">
-                        <a:buNone/>
-                      </a:pPr>
-                      <a:r>
-                        <a:rPr/>
-                        <a:t>All-cause mortality</a:t>
+                        <a:t>major</a:t>
+                      </a:r>
+                    </a:p>
+                  </a:txBody>
+                </a:tc>
+                <a:tc>
+                  <a:txBody>
+                    <a:bodyPr/>
+                    <a:lstStyle/>
+                    <a:p>
+                      <a:pPr lvl="0" indent="0" marL="0" algn="l">
+                        <a:buNone/>
+                      </a:pPr>
+                      <a:r>
+                        <a:rPr/>
+                        <a:t>Overweight</a:t>
                       </a:r>
                     </a:p>
                   </a:txBody>
@@ -7481,7 +7608,7 @@
                       </a:pPr>
                       <a:r>
                         <a:rPr/>
-                        <a:t>10387800</a:t>
+                        <a:t>6651200</a:t>
                       </a:r>
                     </a:p>
                   </a:txBody>
@@ -7528,22 +7655,22 @@
                       </a:pPr>
                       <a:r>
                         <a:rPr/>
-                        <a:t>all</a:t>
-                      </a:r>
-                    </a:p>
-                  </a:txBody>
-                </a:tc>
-                <a:tc>
-                  <a:txBody>
-                    <a:bodyPr/>
-                    <a:lstStyle/>
-                    <a:p>
-                      <a:pPr lvl="0" indent="0" marL="0" algn="l">
-                        <a:buNone/>
-                      </a:pPr>
-                      <a:r>
-                        <a:rPr/>
-                        <a:t>Cardiovascular disease</a:t>
+                        <a:t>major</a:t>
+                      </a:r>
+                    </a:p>
+                  </a:txBody>
+                </a:tc>
+                <a:tc>
+                  <a:txBody>
+                    <a:bodyPr/>
+                    <a:lstStyle/>
+                    <a:p>
+                      <a:pPr lvl="0" indent="0" marL="0" algn="l">
+                        <a:buNone/>
+                      </a:pPr>
+                      <a:r>
+                        <a:rPr/>
+                        <a:t>High sleep disturbance</a:t>
                       </a:r>
                     </a:p>
                   </a:txBody>
@@ -7573,7 +7700,7 @@
                       </a:pPr>
                       <a:r>
                         <a:rPr/>
-                        <a:t>10387800</a:t>
+                        <a:t>4763200</a:t>
                       </a:r>
                     </a:p>
                   </a:txBody>
@@ -7590,7 +7717,7 @@
                       </a:pPr>
                       <a:r>
                         <a:rPr/>
-                        <a:t>road</a:t>
+                        <a:t>air</a:t>
                       </a:r>
                     </a:p>
                   </a:txBody>
@@ -7635,7 +7762,7 @@
                       </a:pPr>
                       <a:r>
                         <a:rPr/>
-                        <a:t>Diabetes</a:t>
+                        <a:t>High noise annoyance</a:t>
                       </a:r>
                     </a:p>
                   </a:txBody>
@@ -7665,7 +7792,7 @@
                       </a:pPr>
                       <a:r>
                         <a:rPr/>
-                        <a:t>10387800</a:t>
+                        <a:t>474800</a:t>
                       </a:r>
                     </a:p>
                   </a:txBody>
@@ -7682,7 +7809,7 @@
                       </a:pPr>
                       <a:r>
                         <a:rPr/>
-                        <a:t>road</a:t>
+                        <a:t>air</a:t>
                       </a:r>
                     </a:p>
                   </a:txBody>
@@ -7727,7 +7854,7 @@
                       </a:pPr>
                       <a:r>
                         <a:rPr/>
-                        <a:t>High noise annoyance</a:t>
+                        <a:t>All-cause mortality</a:t>
                       </a:r>
                     </a:p>
                   </a:txBody>
@@ -7757,7 +7884,7 @@
                       </a:pPr>
                       <a:r>
                         <a:rPr/>
-                        <a:t>10387800</a:t>
+                        <a:t>474800</a:t>
                       </a:r>
                     </a:p>
                   </a:txBody>
@@ -7774,7 +7901,7 @@
                       </a:pPr>
                       <a:r>
                         <a:rPr/>
-                        <a:t>road</a:t>
+                        <a:t>air</a:t>
                       </a:r>
                     </a:p>
                   </a:txBody>
@@ -7819,7 +7946,7 @@
                       </a:pPr>
                       <a:r>
                         <a:rPr/>
-                        <a:t>High sleep disturbance</a:t>
+                        <a:t>Cardiovascular disease</a:t>
                       </a:r>
                     </a:p>
                   </a:txBody>
@@ -7849,7 +7976,7 @@
                       </a:pPr>
                       <a:r>
                         <a:rPr/>
-                        <a:t>7495900</a:t>
+                        <a:t>474800</a:t>
                       </a:r>
                     </a:p>
                   </a:txBody>
@@ -7866,7 +7993,7 @@
                       </a:pPr>
                       <a:r>
                         <a:rPr/>
-                        <a:t>road</a:t>
+                        <a:t>air</a:t>
                       </a:r>
                     </a:p>
                   </a:txBody>
@@ -7896,22 +8023,22 @@
                       </a:pPr>
                       <a:r>
                         <a:rPr/>
-                        <a:t>major</a:t>
-                      </a:r>
-                    </a:p>
-                  </a:txBody>
-                </a:tc>
-                <a:tc>
-                  <a:txBody>
-                    <a:bodyPr/>
-                    <a:lstStyle/>
-                    <a:p>
-                      <a:pPr lvl="0" indent="0" marL="0" algn="l">
-                        <a:buNone/>
-                      </a:pPr>
-                      <a:r>
-                        <a:rPr/>
-                        <a:t>All-cause mortality</a:t>
+                        <a:t>all</a:t>
+                      </a:r>
+                    </a:p>
+                  </a:txBody>
+                </a:tc>
+                <a:tc>
+                  <a:txBody>
+                    <a:bodyPr/>
+                    <a:lstStyle/>
+                    <a:p>
+                      <a:pPr lvl="0" indent="0" marL="0" algn="l">
+                        <a:buNone/>
+                      </a:pPr>
+                      <a:r>
+                        <a:rPr/>
+                        <a:t>Diabetes</a:t>
                       </a:r>
                     </a:p>
                   </a:txBody>
@@ -7941,7 +8068,7 @@
                       </a:pPr>
                       <a:r>
                         <a:rPr/>
-                        <a:t>6651200</a:t>
+                        <a:t>474800</a:t>
                       </a:r>
                     </a:p>
                   </a:txBody>
@@ -7958,7 +8085,7 @@
                       </a:pPr>
                       <a:r>
                         <a:rPr/>
-                        <a:t>road</a:t>
+                        <a:t>air</a:t>
                       </a:r>
                     </a:p>
                   </a:txBody>
@@ -7988,22 +8115,22 @@
                       </a:pPr>
                       <a:r>
                         <a:rPr/>
-                        <a:t>major</a:t>
-                      </a:r>
-                    </a:p>
-                  </a:txBody>
-                </a:tc>
-                <a:tc>
-                  <a:txBody>
-                    <a:bodyPr/>
-                    <a:lstStyle/>
-                    <a:p>
-                      <a:pPr lvl="0" indent="0" marL="0" algn="l">
-                        <a:buNone/>
-                      </a:pPr>
-                      <a:r>
-                        <a:rPr/>
-                        <a:t>Cardiovascular disease</a:t>
+                        <a:t>all</a:t>
+                      </a:r>
+                    </a:p>
+                  </a:txBody>
+                </a:tc>
+                <a:tc>
+                  <a:txBody>
+                    <a:bodyPr/>
+                    <a:lstStyle/>
+                    <a:p>
+                      <a:pPr lvl="0" indent="0" marL="0" algn="l">
+                        <a:buNone/>
+                      </a:pPr>
+                      <a:r>
+                        <a:rPr/>
+                        <a:t>Reading Comprehension</a:t>
                       </a:r>
                     </a:p>
                   </a:txBody>
@@ -8033,7 +8160,7 @@
                       </a:pPr>
                       <a:r>
                         <a:rPr/>
-                        <a:t>6651200</a:t>
+                        <a:t>474800</a:t>
                       </a:r>
                     </a:p>
                   </a:txBody>
@@ -8050,7 +8177,7 @@
                       </a:pPr>
                       <a:r>
                         <a:rPr/>
-                        <a:t>road</a:t>
+                        <a:t>air</a:t>
                       </a:r>
                     </a:p>
                   </a:txBody>
@@ -8080,22 +8207,22 @@
                       </a:pPr>
                       <a:r>
                         <a:rPr/>
-                        <a:t>major</a:t>
-                      </a:r>
-                    </a:p>
-                  </a:txBody>
-                </a:tc>
-                <a:tc>
-                  <a:txBody>
-                    <a:bodyPr/>
-                    <a:lstStyle/>
-                    <a:p>
-                      <a:pPr lvl="0" indent="0" marL="0" algn="l">
-                        <a:buNone/>
-                      </a:pPr>
-                      <a:r>
-                        <a:rPr/>
-                        <a:t>Diabetes</a:t>
+                        <a:t>all</a:t>
+                      </a:r>
+                    </a:p>
+                  </a:txBody>
+                </a:tc>
+                <a:tc>
+                  <a:txBody>
+                    <a:bodyPr/>
+                    <a:lstStyle/>
+                    <a:p>
+                      <a:pPr lvl="0" indent="0" marL="0" algn="l">
+                        <a:buNone/>
+                      </a:pPr>
+                      <a:r>
+                        <a:rPr/>
+                        <a:t>Behavioural problems</a:t>
                       </a:r>
                     </a:p>
                   </a:txBody>
@@ -8125,7 +8252,7 @@
                       </a:pPr>
                       <a:r>
                         <a:rPr/>
-                        <a:t>6651200</a:t>
+                        <a:t>474800</a:t>
                       </a:r>
                     </a:p>
                   </a:txBody>
@@ -8142,7 +8269,7 @@
                       </a:pPr>
                       <a:r>
                         <a:rPr/>
-                        <a:t>road</a:t>
+                        <a:t>air</a:t>
                       </a:r>
                     </a:p>
                   </a:txBody>
@@ -8172,22 +8299,22 @@
                       </a:pPr>
                       <a:r>
                         <a:rPr/>
-                        <a:t>major</a:t>
-                      </a:r>
-                    </a:p>
-                  </a:txBody>
-                </a:tc>
-                <a:tc>
-                  <a:txBody>
-                    <a:bodyPr/>
-                    <a:lstStyle/>
-                    <a:p>
-                      <a:pPr lvl="0" indent="0" marL="0" algn="l">
-                        <a:buNone/>
-                      </a:pPr>
-                      <a:r>
-                        <a:rPr/>
-                        <a:t>High noise annoyance</a:t>
+                        <a:t>all</a:t>
+                      </a:r>
+                    </a:p>
+                  </a:txBody>
+                </a:tc>
+                <a:tc>
+                  <a:txBody>
+                    <a:bodyPr/>
+                    <a:lstStyle/>
+                    <a:p>
+                      <a:pPr lvl="0" indent="0" marL="0" algn="l">
+                        <a:buNone/>
+                      </a:pPr>
+                      <a:r>
+                        <a:rPr/>
+                        <a:t>Overweight</a:t>
                       </a:r>
                     </a:p>
                   </a:txBody>
@@ -8217,7 +8344,7 @@
                       </a:pPr>
                       <a:r>
                         <a:rPr/>
-                        <a:t>6651200</a:t>
+                        <a:t>474800</a:t>
                       </a:r>
                     </a:p>
                   </a:txBody>
@@ -8234,7 +8361,7 @@
                       </a:pPr>
                       <a:r>
                         <a:rPr/>
-                        <a:t>road</a:t>
+                        <a:t>air</a:t>
                       </a:r>
                     </a:p>
                   </a:txBody>
@@ -8264,6 +8391,98 @@
                       </a:pPr>
                       <a:r>
                         <a:rPr/>
+                        <a:t>all</a:t>
+                      </a:r>
+                    </a:p>
+                  </a:txBody>
+                </a:tc>
+                <a:tc>
+                  <a:txBody>
+                    <a:bodyPr/>
+                    <a:lstStyle/>
+                    <a:p>
+                      <a:pPr lvl="0" indent="0" marL="0" algn="l">
+                        <a:buNone/>
+                      </a:pPr>
+                      <a:r>
+                        <a:rPr/>
+                        <a:t>High sleep disturbance</a:t>
+                      </a:r>
+                    </a:p>
+                  </a:txBody>
+                </a:tc>
+                <a:tc>
+                  <a:txBody>
+                    <a:bodyPr/>
+                    <a:lstStyle/>
+                    <a:p>
+                      <a:pPr lvl="0" indent="0" marL="0" algn="r">
+                        <a:buNone/>
+                      </a:pPr>
+                      <a:r>
+                        <a:rPr/>
+                        <a:t>360</a:t>
+                      </a:r>
+                    </a:p>
+                  </a:txBody>
+                </a:tc>
+                <a:tc>
+                  <a:txBody>
+                    <a:bodyPr/>
+                    <a:lstStyle/>
+                    <a:p>
+                      <a:pPr lvl="0" indent="0" marL="0" algn="r">
+                        <a:buNone/>
+                      </a:pPr>
+                      <a:r>
+                        <a:rPr/>
+                        <a:t>132400</a:t>
+                      </a:r>
+                    </a:p>
+                  </a:txBody>
+                </a:tc>
+              </a:tr>
+              <a:tr h="0">
+                <a:tc>
+                  <a:txBody>
+                    <a:bodyPr/>
+                    <a:lstStyle/>
+                    <a:p>
+                      <a:pPr lvl="0" indent="0" marL="0" algn="l">
+                        <a:buNone/>
+                      </a:pPr>
+                      <a:r>
+                        <a:rPr/>
+                        <a:t>air</a:t>
+                      </a:r>
+                    </a:p>
+                  </a:txBody>
+                </a:tc>
+                <a:tc>
+                  <a:txBody>
+                    <a:bodyPr/>
+                    <a:lstStyle/>
+                    <a:p>
+                      <a:pPr lvl="0" indent="0" marL="0" algn="l">
+                        <a:buNone/>
+                      </a:pPr>
+                      <a:r>
+                        <a:rPr/>
+                        <a:t>EEA</a:t>
+                      </a:r>
+                    </a:p>
+                  </a:txBody>
+                </a:tc>
+                <a:tc>
+                  <a:txBody>
+                    <a:bodyPr/>
+                    <a:lstStyle/>
+                    <a:p>
+                      <a:pPr lvl="0" indent="0" marL="0" algn="l">
+                        <a:buNone/>
+                      </a:pPr>
+                      <a:r>
+                        <a:rPr/>
                         <a:t>major</a:t>
                       </a:r>
                     </a:p>
@@ -8279,6 +8498,650 @@
                       </a:pPr>
                       <a:r>
                         <a:rPr/>
+                        <a:t>High noise annoyance</a:t>
+                      </a:r>
+                    </a:p>
+                  </a:txBody>
+                </a:tc>
+                <a:tc>
+                  <a:txBody>
+                    <a:bodyPr/>
+                    <a:lstStyle/>
+                    <a:p>
+                      <a:pPr lvl="0" indent="0" marL="0" algn="r">
+                        <a:buNone/>
+                      </a:pPr>
+                      <a:r>
+                        <a:rPr/>
+                        <a:t>360</a:t>
+                      </a:r>
+                    </a:p>
+                  </a:txBody>
+                </a:tc>
+                <a:tc>
+                  <a:txBody>
+                    <a:bodyPr/>
+                    <a:lstStyle/>
+                    <a:p>
+                      <a:pPr lvl="0" indent="0" marL="0" algn="r">
+                        <a:buNone/>
+                      </a:pPr>
+                      <a:r>
+                        <a:rPr/>
+                        <a:t>456300</a:t>
+                      </a:r>
+                    </a:p>
+                  </a:txBody>
+                </a:tc>
+              </a:tr>
+              <a:tr h="0">
+                <a:tc>
+                  <a:txBody>
+                    <a:bodyPr/>
+                    <a:lstStyle/>
+                    <a:p>
+                      <a:pPr lvl="0" indent="0" marL="0" algn="l">
+                        <a:buNone/>
+                      </a:pPr>
+                      <a:r>
+                        <a:rPr/>
+                        <a:t>air</a:t>
+                      </a:r>
+                    </a:p>
+                  </a:txBody>
+                </a:tc>
+                <a:tc>
+                  <a:txBody>
+                    <a:bodyPr/>
+                    <a:lstStyle/>
+                    <a:p>
+                      <a:pPr lvl="0" indent="0" marL="0" algn="l">
+                        <a:buNone/>
+                      </a:pPr>
+                      <a:r>
+                        <a:rPr/>
+                        <a:t>EEA</a:t>
+                      </a:r>
+                    </a:p>
+                  </a:txBody>
+                </a:tc>
+                <a:tc>
+                  <a:txBody>
+                    <a:bodyPr/>
+                    <a:lstStyle/>
+                    <a:p>
+                      <a:pPr lvl="0" indent="0" marL="0" algn="l">
+                        <a:buNone/>
+                      </a:pPr>
+                      <a:r>
+                        <a:rPr/>
+                        <a:t>major</a:t>
+                      </a:r>
+                    </a:p>
+                  </a:txBody>
+                </a:tc>
+                <a:tc>
+                  <a:txBody>
+                    <a:bodyPr/>
+                    <a:lstStyle/>
+                    <a:p>
+                      <a:pPr lvl="0" indent="0" marL="0" algn="l">
+                        <a:buNone/>
+                      </a:pPr>
+                      <a:r>
+                        <a:rPr/>
+                        <a:t>All-cause mortality</a:t>
+                      </a:r>
+                    </a:p>
+                  </a:txBody>
+                </a:tc>
+                <a:tc>
+                  <a:txBody>
+                    <a:bodyPr/>
+                    <a:lstStyle/>
+                    <a:p>
+                      <a:pPr lvl="0" indent="0" marL="0" algn="r">
+                        <a:buNone/>
+                      </a:pPr>
+                      <a:r>
+                        <a:rPr/>
+                        <a:t>360</a:t>
+                      </a:r>
+                    </a:p>
+                  </a:txBody>
+                </a:tc>
+                <a:tc>
+                  <a:txBody>
+                    <a:bodyPr/>
+                    <a:lstStyle/>
+                    <a:p>
+                      <a:pPr lvl="0" indent="0" marL="0" algn="r">
+                        <a:buNone/>
+                      </a:pPr>
+                      <a:r>
+                        <a:rPr/>
+                        <a:t>456300</a:t>
+                      </a:r>
+                    </a:p>
+                  </a:txBody>
+                </a:tc>
+              </a:tr>
+              <a:tr h="0">
+                <a:tc>
+                  <a:txBody>
+                    <a:bodyPr/>
+                    <a:lstStyle/>
+                    <a:p>
+                      <a:pPr lvl="0" indent="0" marL="0" algn="l">
+                        <a:buNone/>
+                      </a:pPr>
+                      <a:r>
+                        <a:rPr/>
+                        <a:t>air</a:t>
+                      </a:r>
+                    </a:p>
+                  </a:txBody>
+                </a:tc>
+                <a:tc>
+                  <a:txBody>
+                    <a:bodyPr/>
+                    <a:lstStyle/>
+                    <a:p>
+                      <a:pPr lvl="0" indent="0" marL="0" algn="l">
+                        <a:buNone/>
+                      </a:pPr>
+                      <a:r>
+                        <a:rPr/>
+                        <a:t>EEA</a:t>
+                      </a:r>
+                    </a:p>
+                  </a:txBody>
+                </a:tc>
+                <a:tc>
+                  <a:txBody>
+                    <a:bodyPr/>
+                    <a:lstStyle/>
+                    <a:p>
+                      <a:pPr lvl="0" indent="0" marL="0" algn="l">
+                        <a:buNone/>
+                      </a:pPr>
+                      <a:r>
+                        <a:rPr/>
+                        <a:t>major</a:t>
+                      </a:r>
+                    </a:p>
+                  </a:txBody>
+                </a:tc>
+                <a:tc>
+                  <a:txBody>
+                    <a:bodyPr/>
+                    <a:lstStyle/>
+                    <a:p>
+                      <a:pPr lvl="0" indent="0" marL="0" algn="l">
+                        <a:buNone/>
+                      </a:pPr>
+                      <a:r>
+                        <a:rPr/>
+                        <a:t>Cardiovascular disease</a:t>
+                      </a:r>
+                    </a:p>
+                  </a:txBody>
+                </a:tc>
+                <a:tc>
+                  <a:txBody>
+                    <a:bodyPr/>
+                    <a:lstStyle/>
+                    <a:p>
+                      <a:pPr lvl="0" indent="0" marL="0" algn="r">
+                        <a:buNone/>
+                      </a:pPr>
+                      <a:r>
+                        <a:rPr/>
+                        <a:t>360</a:t>
+                      </a:r>
+                    </a:p>
+                  </a:txBody>
+                </a:tc>
+                <a:tc>
+                  <a:txBody>
+                    <a:bodyPr/>
+                    <a:lstStyle/>
+                    <a:p>
+                      <a:pPr lvl="0" indent="0" marL="0" algn="r">
+                        <a:buNone/>
+                      </a:pPr>
+                      <a:r>
+                        <a:rPr/>
+                        <a:t>456300</a:t>
+                      </a:r>
+                    </a:p>
+                  </a:txBody>
+                </a:tc>
+              </a:tr>
+              <a:tr h="0">
+                <a:tc>
+                  <a:txBody>
+                    <a:bodyPr/>
+                    <a:lstStyle/>
+                    <a:p>
+                      <a:pPr lvl="0" indent="0" marL="0" algn="l">
+                        <a:buNone/>
+                      </a:pPr>
+                      <a:r>
+                        <a:rPr/>
+                        <a:t>air</a:t>
+                      </a:r>
+                    </a:p>
+                  </a:txBody>
+                </a:tc>
+                <a:tc>
+                  <a:txBody>
+                    <a:bodyPr/>
+                    <a:lstStyle/>
+                    <a:p>
+                      <a:pPr lvl="0" indent="0" marL="0" algn="l">
+                        <a:buNone/>
+                      </a:pPr>
+                      <a:r>
+                        <a:rPr/>
+                        <a:t>EEA</a:t>
+                      </a:r>
+                    </a:p>
+                  </a:txBody>
+                </a:tc>
+                <a:tc>
+                  <a:txBody>
+                    <a:bodyPr/>
+                    <a:lstStyle/>
+                    <a:p>
+                      <a:pPr lvl="0" indent="0" marL="0" algn="l">
+                        <a:buNone/>
+                      </a:pPr>
+                      <a:r>
+                        <a:rPr/>
+                        <a:t>major</a:t>
+                      </a:r>
+                    </a:p>
+                  </a:txBody>
+                </a:tc>
+                <a:tc>
+                  <a:txBody>
+                    <a:bodyPr/>
+                    <a:lstStyle/>
+                    <a:p>
+                      <a:pPr lvl="0" indent="0" marL="0" algn="l">
+                        <a:buNone/>
+                      </a:pPr>
+                      <a:r>
+                        <a:rPr/>
+                        <a:t>Diabetes</a:t>
+                      </a:r>
+                    </a:p>
+                  </a:txBody>
+                </a:tc>
+                <a:tc>
+                  <a:txBody>
+                    <a:bodyPr/>
+                    <a:lstStyle/>
+                    <a:p>
+                      <a:pPr lvl="0" indent="0" marL="0" algn="r">
+                        <a:buNone/>
+                      </a:pPr>
+                      <a:r>
+                        <a:rPr/>
+                        <a:t>360</a:t>
+                      </a:r>
+                    </a:p>
+                  </a:txBody>
+                </a:tc>
+                <a:tc>
+                  <a:txBody>
+                    <a:bodyPr/>
+                    <a:lstStyle/>
+                    <a:p>
+                      <a:pPr lvl="0" indent="0" marL="0" algn="r">
+                        <a:buNone/>
+                      </a:pPr>
+                      <a:r>
+                        <a:rPr/>
+                        <a:t>456300</a:t>
+                      </a:r>
+                    </a:p>
+                  </a:txBody>
+                </a:tc>
+              </a:tr>
+              <a:tr h="0">
+                <a:tc>
+                  <a:txBody>
+                    <a:bodyPr/>
+                    <a:lstStyle/>
+                    <a:p>
+                      <a:pPr lvl="0" indent="0" marL="0" algn="l">
+                        <a:buNone/>
+                      </a:pPr>
+                      <a:r>
+                        <a:rPr/>
+                        <a:t>air</a:t>
+                      </a:r>
+                    </a:p>
+                  </a:txBody>
+                </a:tc>
+                <a:tc>
+                  <a:txBody>
+                    <a:bodyPr/>
+                    <a:lstStyle/>
+                    <a:p>
+                      <a:pPr lvl="0" indent="0" marL="0" algn="l">
+                        <a:buNone/>
+                      </a:pPr>
+                      <a:r>
+                        <a:rPr/>
+                        <a:t>EEA</a:t>
+                      </a:r>
+                    </a:p>
+                  </a:txBody>
+                </a:tc>
+                <a:tc>
+                  <a:txBody>
+                    <a:bodyPr/>
+                    <a:lstStyle/>
+                    <a:p>
+                      <a:pPr lvl="0" indent="0" marL="0" algn="l">
+                        <a:buNone/>
+                      </a:pPr>
+                      <a:r>
+                        <a:rPr/>
+                        <a:t>major</a:t>
+                      </a:r>
+                    </a:p>
+                  </a:txBody>
+                </a:tc>
+                <a:tc>
+                  <a:txBody>
+                    <a:bodyPr/>
+                    <a:lstStyle/>
+                    <a:p>
+                      <a:pPr lvl="0" indent="0" marL="0" algn="l">
+                        <a:buNone/>
+                      </a:pPr>
+                      <a:r>
+                        <a:rPr/>
+                        <a:t>Reading Comprehension</a:t>
+                      </a:r>
+                    </a:p>
+                  </a:txBody>
+                </a:tc>
+                <a:tc>
+                  <a:txBody>
+                    <a:bodyPr/>
+                    <a:lstStyle/>
+                    <a:p>
+                      <a:pPr lvl="0" indent="0" marL="0" algn="r">
+                        <a:buNone/>
+                      </a:pPr>
+                      <a:r>
+                        <a:rPr/>
+                        <a:t>360</a:t>
+                      </a:r>
+                    </a:p>
+                  </a:txBody>
+                </a:tc>
+                <a:tc>
+                  <a:txBody>
+                    <a:bodyPr/>
+                    <a:lstStyle/>
+                    <a:p>
+                      <a:pPr lvl="0" indent="0" marL="0" algn="r">
+                        <a:buNone/>
+                      </a:pPr>
+                      <a:r>
+                        <a:rPr/>
+                        <a:t>456300</a:t>
+                      </a:r>
+                    </a:p>
+                  </a:txBody>
+                </a:tc>
+              </a:tr>
+              <a:tr h="0">
+                <a:tc>
+                  <a:txBody>
+                    <a:bodyPr/>
+                    <a:lstStyle/>
+                    <a:p>
+                      <a:pPr lvl="0" indent="0" marL="0" algn="l">
+                        <a:buNone/>
+                      </a:pPr>
+                      <a:r>
+                        <a:rPr/>
+                        <a:t>air</a:t>
+                      </a:r>
+                    </a:p>
+                  </a:txBody>
+                </a:tc>
+                <a:tc>
+                  <a:txBody>
+                    <a:bodyPr/>
+                    <a:lstStyle/>
+                    <a:p>
+                      <a:pPr lvl="0" indent="0" marL="0" algn="l">
+                        <a:buNone/>
+                      </a:pPr>
+                      <a:r>
+                        <a:rPr/>
+                        <a:t>EEA</a:t>
+                      </a:r>
+                    </a:p>
+                  </a:txBody>
+                </a:tc>
+                <a:tc>
+                  <a:txBody>
+                    <a:bodyPr/>
+                    <a:lstStyle/>
+                    <a:p>
+                      <a:pPr lvl="0" indent="0" marL="0" algn="l">
+                        <a:buNone/>
+                      </a:pPr>
+                      <a:r>
+                        <a:rPr/>
+                        <a:t>major</a:t>
+                      </a:r>
+                    </a:p>
+                  </a:txBody>
+                </a:tc>
+                <a:tc>
+                  <a:txBody>
+                    <a:bodyPr/>
+                    <a:lstStyle/>
+                    <a:p>
+                      <a:pPr lvl="0" indent="0" marL="0" algn="l">
+                        <a:buNone/>
+                      </a:pPr>
+                      <a:r>
+                        <a:rPr/>
+                        <a:t>Behavioural problems</a:t>
+                      </a:r>
+                    </a:p>
+                  </a:txBody>
+                </a:tc>
+                <a:tc>
+                  <a:txBody>
+                    <a:bodyPr/>
+                    <a:lstStyle/>
+                    <a:p>
+                      <a:pPr lvl="0" indent="0" marL="0" algn="r">
+                        <a:buNone/>
+                      </a:pPr>
+                      <a:r>
+                        <a:rPr/>
+                        <a:t>360</a:t>
+                      </a:r>
+                    </a:p>
+                  </a:txBody>
+                </a:tc>
+                <a:tc>
+                  <a:txBody>
+                    <a:bodyPr/>
+                    <a:lstStyle/>
+                    <a:p>
+                      <a:pPr lvl="0" indent="0" marL="0" algn="r">
+                        <a:buNone/>
+                      </a:pPr>
+                      <a:r>
+                        <a:rPr/>
+                        <a:t>456300</a:t>
+                      </a:r>
+                    </a:p>
+                  </a:txBody>
+                </a:tc>
+              </a:tr>
+              <a:tr h="0">
+                <a:tc>
+                  <a:txBody>
+                    <a:bodyPr/>
+                    <a:lstStyle/>
+                    <a:p>
+                      <a:pPr lvl="0" indent="0" marL="0" algn="l">
+                        <a:buNone/>
+                      </a:pPr>
+                      <a:r>
+                        <a:rPr/>
+                        <a:t>air</a:t>
+                      </a:r>
+                    </a:p>
+                  </a:txBody>
+                </a:tc>
+                <a:tc>
+                  <a:txBody>
+                    <a:bodyPr/>
+                    <a:lstStyle/>
+                    <a:p>
+                      <a:pPr lvl="0" indent="0" marL="0" algn="l">
+                        <a:buNone/>
+                      </a:pPr>
+                      <a:r>
+                        <a:rPr/>
+                        <a:t>EEA</a:t>
+                      </a:r>
+                    </a:p>
+                  </a:txBody>
+                </a:tc>
+                <a:tc>
+                  <a:txBody>
+                    <a:bodyPr/>
+                    <a:lstStyle/>
+                    <a:p>
+                      <a:pPr lvl="0" indent="0" marL="0" algn="l">
+                        <a:buNone/>
+                      </a:pPr>
+                      <a:r>
+                        <a:rPr/>
+                        <a:t>major</a:t>
+                      </a:r>
+                    </a:p>
+                  </a:txBody>
+                </a:tc>
+                <a:tc>
+                  <a:txBody>
+                    <a:bodyPr/>
+                    <a:lstStyle/>
+                    <a:p>
+                      <a:pPr lvl="0" indent="0" marL="0" algn="l">
+                        <a:buNone/>
+                      </a:pPr>
+                      <a:r>
+                        <a:rPr/>
+                        <a:t>Overweight</a:t>
+                      </a:r>
+                    </a:p>
+                  </a:txBody>
+                </a:tc>
+                <a:tc>
+                  <a:txBody>
+                    <a:bodyPr/>
+                    <a:lstStyle/>
+                    <a:p>
+                      <a:pPr lvl="0" indent="0" marL="0" algn="r">
+                        <a:buNone/>
+                      </a:pPr>
+                      <a:r>
+                        <a:rPr/>
+                        <a:t>360</a:t>
+                      </a:r>
+                    </a:p>
+                  </a:txBody>
+                </a:tc>
+                <a:tc>
+                  <a:txBody>
+                    <a:bodyPr/>
+                    <a:lstStyle/>
+                    <a:p>
+                      <a:pPr lvl="0" indent="0" marL="0" algn="r">
+                        <a:buNone/>
+                      </a:pPr>
+                      <a:r>
+                        <a:rPr/>
+                        <a:t>456300</a:t>
+                      </a:r>
+                    </a:p>
+                  </a:txBody>
+                </a:tc>
+              </a:tr>
+              <a:tr h="0">
+                <a:tc>
+                  <a:txBody>
+                    <a:bodyPr/>
+                    <a:lstStyle/>
+                    <a:p>
+                      <a:pPr lvl="0" indent="0" marL="0" algn="l">
+                        <a:buNone/>
+                      </a:pPr>
+                      <a:r>
+                        <a:rPr/>
+                        <a:t>air</a:t>
+                      </a:r>
+                    </a:p>
+                  </a:txBody>
+                </a:tc>
+                <a:tc>
+                  <a:txBody>
+                    <a:bodyPr/>
+                    <a:lstStyle/>
+                    <a:p>
+                      <a:pPr lvl="0" indent="0" marL="0" algn="l">
+                        <a:buNone/>
+                      </a:pPr>
+                      <a:r>
+                        <a:rPr/>
+                        <a:t>EEA</a:t>
+                      </a:r>
+                    </a:p>
+                  </a:txBody>
+                </a:tc>
+                <a:tc>
+                  <a:txBody>
+                    <a:bodyPr/>
+                    <a:lstStyle/>
+                    <a:p>
+                      <a:pPr lvl="0" indent="0" marL="0" algn="l">
+                        <a:buNone/>
+                      </a:pPr>
+                      <a:r>
+                        <a:rPr/>
+                        <a:t>major</a:t>
+                      </a:r>
+                    </a:p>
+                  </a:txBody>
+                </a:tc>
+                <a:tc>
+                  <a:txBody>
+                    <a:bodyPr/>
+                    <a:lstStyle/>
+                    <a:p>
+                      <a:pPr lvl="0" indent="0" marL="0" algn="l">
+                        <a:buNone/>
+                      </a:pPr>
+                      <a:r>
+                        <a:rPr/>
                         <a:t>High sleep disturbance</a:t>
                       </a:r>
                     </a:p>
@@ -8309,7 +9172,1479 @@
                       </a:pPr>
                       <a:r>
                         <a:rPr/>
-                        <a:t>4763200</a:t>
+                        <a:t>131200</a:t>
+                      </a:r>
+                    </a:p>
+                  </a:txBody>
+                </a:tc>
+              </a:tr>
+              <a:tr h="0">
+                <a:tc>
+                  <a:txBody>
+                    <a:bodyPr/>
+                    <a:lstStyle/>
+                    <a:p>
+                      <a:pPr lvl="0" indent="0" marL="0" algn="l">
+                        <a:buNone/>
+                      </a:pPr>
+                      <a:r>
+                        <a:rPr/>
+                        <a:t>rail</a:t>
+                      </a:r>
+                    </a:p>
+                  </a:txBody>
+                </a:tc>
+                <a:tc>
+                  <a:txBody>
+                    <a:bodyPr/>
+                    <a:lstStyle/>
+                    <a:p>
+                      <a:pPr lvl="0" indent="0" marL="0" algn="l">
+                        <a:buNone/>
+                      </a:pPr>
+                      <a:r>
+                        <a:rPr/>
+                        <a:t>EEA</a:t>
+                      </a:r>
+                    </a:p>
+                  </a:txBody>
+                </a:tc>
+                <a:tc>
+                  <a:txBody>
+                    <a:bodyPr/>
+                    <a:lstStyle/>
+                    <a:p>
+                      <a:pPr lvl="0" indent="0" marL="0" algn="l">
+                        <a:buNone/>
+                      </a:pPr>
+                      <a:r>
+                        <a:rPr/>
+                        <a:t>all</a:t>
+                      </a:r>
+                    </a:p>
+                  </a:txBody>
+                </a:tc>
+                <a:tc>
+                  <a:txBody>
+                    <a:bodyPr/>
+                    <a:lstStyle/>
+                    <a:p>
+                      <a:pPr lvl="0" indent="0" marL="0" algn="l">
+                        <a:buNone/>
+                      </a:pPr>
+                      <a:r>
+                        <a:rPr/>
+                        <a:t>High noise annoyance</a:t>
+                      </a:r>
+                    </a:p>
+                  </a:txBody>
+                </a:tc>
+                <a:tc>
+                  <a:txBody>
+                    <a:bodyPr/>
+                    <a:lstStyle/>
+                    <a:p>
+                      <a:pPr lvl="0" indent="0" marL="0" algn="r">
+                        <a:buNone/>
+                      </a:pPr>
+                      <a:r>
+                        <a:rPr/>
+                        <a:t>360</a:t>
+                      </a:r>
+                    </a:p>
+                  </a:txBody>
+                </a:tc>
+                <a:tc>
+                  <a:txBody>
+                    <a:bodyPr/>
+                    <a:lstStyle/>
+                    <a:p>
+                      <a:pPr lvl="0" indent="0" marL="0" algn="r">
+                        <a:buNone/>
+                      </a:pPr>
+                      <a:r>
+                        <a:rPr/>
+                        <a:t>2531400</a:t>
+                      </a:r>
+                    </a:p>
+                  </a:txBody>
+                </a:tc>
+              </a:tr>
+              <a:tr h="0">
+                <a:tc>
+                  <a:txBody>
+                    <a:bodyPr/>
+                    <a:lstStyle/>
+                    <a:p>
+                      <a:pPr lvl="0" indent="0" marL="0" algn="l">
+                        <a:buNone/>
+                      </a:pPr>
+                      <a:r>
+                        <a:rPr/>
+                        <a:t>rail</a:t>
+                      </a:r>
+                    </a:p>
+                  </a:txBody>
+                </a:tc>
+                <a:tc>
+                  <a:txBody>
+                    <a:bodyPr/>
+                    <a:lstStyle/>
+                    <a:p>
+                      <a:pPr lvl="0" indent="0" marL="0" algn="l">
+                        <a:buNone/>
+                      </a:pPr>
+                      <a:r>
+                        <a:rPr/>
+                        <a:t>EEA</a:t>
+                      </a:r>
+                    </a:p>
+                  </a:txBody>
+                </a:tc>
+                <a:tc>
+                  <a:txBody>
+                    <a:bodyPr/>
+                    <a:lstStyle/>
+                    <a:p>
+                      <a:pPr lvl="0" indent="0" marL="0" algn="l">
+                        <a:buNone/>
+                      </a:pPr>
+                      <a:r>
+                        <a:rPr/>
+                        <a:t>all</a:t>
+                      </a:r>
+                    </a:p>
+                  </a:txBody>
+                </a:tc>
+                <a:tc>
+                  <a:txBody>
+                    <a:bodyPr/>
+                    <a:lstStyle/>
+                    <a:p>
+                      <a:pPr lvl="0" indent="0" marL="0" algn="l">
+                        <a:buNone/>
+                      </a:pPr>
+                      <a:r>
+                        <a:rPr/>
+                        <a:t>All-cause mortality</a:t>
+                      </a:r>
+                    </a:p>
+                  </a:txBody>
+                </a:tc>
+                <a:tc>
+                  <a:txBody>
+                    <a:bodyPr/>
+                    <a:lstStyle/>
+                    <a:p>
+                      <a:pPr lvl="0" indent="0" marL="0" algn="r">
+                        <a:buNone/>
+                      </a:pPr>
+                      <a:r>
+                        <a:rPr/>
+                        <a:t>360</a:t>
+                      </a:r>
+                    </a:p>
+                  </a:txBody>
+                </a:tc>
+                <a:tc>
+                  <a:txBody>
+                    <a:bodyPr/>
+                    <a:lstStyle/>
+                    <a:p>
+                      <a:pPr lvl="0" indent="0" marL="0" algn="r">
+                        <a:buNone/>
+                      </a:pPr>
+                      <a:r>
+                        <a:rPr/>
+                        <a:t>2531400</a:t>
+                      </a:r>
+                    </a:p>
+                  </a:txBody>
+                </a:tc>
+              </a:tr>
+              <a:tr h="0">
+                <a:tc>
+                  <a:txBody>
+                    <a:bodyPr/>
+                    <a:lstStyle/>
+                    <a:p>
+                      <a:pPr lvl="0" indent="0" marL="0" algn="l">
+                        <a:buNone/>
+                      </a:pPr>
+                      <a:r>
+                        <a:rPr/>
+                        <a:t>rail</a:t>
+                      </a:r>
+                    </a:p>
+                  </a:txBody>
+                </a:tc>
+                <a:tc>
+                  <a:txBody>
+                    <a:bodyPr/>
+                    <a:lstStyle/>
+                    <a:p>
+                      <a:pPr lvl="0" indent="0" marL="0" algn="l">
+                        <a:buNone/>
+                      </a:pPr>
+                      <a:r>
+                        <a:rPr/>
+                        <a:t>EEA</a:t>
+                      </a:r>
+                    </a:p>
+                  </a:txBody>
+                </a:tc>
+                <a:tc>
+                  <a:txBody>
+                    <a:bodyPr/>
+                    <a:lstStyle/>
+                    <a:p>
+                      <a:pPr lvl="0" indent="0" marL="0" algn="l">
+                        <a:buNone/>
+                      </a:pPr>
+                      <a:r>
+                        <a:rPr/>
+                        <a:t>all</a:t>
+                      </a:r>
+                    </a:p>
+                  </a:txBody>
+                </a:tc>
+                <a:tc>
+                  <a:txBody>
+                    <a:bodyPr/>
+                    <a:lstStyle/>
+                    <a:p>
+                      <a:pPr lvl="0" indent="0" marL="0" algn="l">
+                        <a:buNone/>
+                      </a:pPr>
+                      <a:r>
+                        <a:rPr/>
+                        <a:t>Cardiovascular disease</a:t>
+                      </a:r>
+                    </a:p>
+                  </a:txBody>
+                </a:tc>
+                <a:tc>
+                  <a:txBody>
+                    <a:bodyPr/>
+                    <a:lstStyle/>
+                    <a:p>
+                      <a:pPr lvl="0" indent="0" marL="0" algn="r">
+                        <a:buNone/>
+                      </a:pPr>
+                      <a:r>
+                        <a:rPr/>
+                        <a:t>360</a:t>
+                      </a:r>
+                    </a:p>
+                  </a:txBody>
+                </a:tc>
+                <a:tc>
+                  <a:txBody>
+                    <a:bodyPr/>
+                    <a:lstStyle/>
+                    <a:p>
+                      <a:pPr lvl="0" indent="0" marL="0" algn="r">
+                        <a:buNone/>
+                      </a:pPr>
+                      <a:r>
+                        <a:rPr/>
+                        <a:t>2531400</a:t>
+                      </a:r>
+                    </a:p>
+                  </a:txBody>
+                </a:tc>
+              </a:tr>
+              <a:tr h="0">
+                <a:tc>
+                  <a:txBody>
+                    <a:bodyPr/>
+                    <a:lstStyle/>
+                    <a:p>
+                      <a:pPr lvl="0" indent="0" marL="0" algn="l">
+                        <a:buNone/>
+                      </a:pPr>
+                      <a:r>
+                        <a:rPr/>
+                        <a:t>rail</a:t>
+                      </a:r>
+                    </a:p>
+                  </a:txBody>
+                </a:tc>
+                <a:tc>
+                  <a:txBody>
+                    <a:bodyPr/>
+                    <a:lstStyle/>
+                    <a:p>
+                      <a:pPr lvl="0" indent="0" marL="0" algn="l">
+                        <a:buNone/>
+                      </a:pPr>
+                      <a:r>
+                        <a:rPr/>
+                        <a:t>EEA</a:t>
+                      </a:r>
+                    </a:p>
+                  </a:txBody>
+                </a:tc>
+                <a:tc>
+                  <a:txBody>
+                    <a:bodyPr/>
+                    <a:lstStyle/>
+                    <a:p>
+                      <a:pPr lvl="0" indent="0" marL="0" algn="l">
+                        <a:buNone/>
+                      </a:pPr>
+                      <a:r>
+                        <a:rPr/>
+                        <a:t>all</a:t>
+                      </a:r>
+                    </a:p>
+                  </a:txBody>
+                </a:tc>
+                <a:tc>
+                  <a:txBody>
+                    <a:bodyPr/>
+                    <a:lstStyle/>
+                    <a:p>
+                      <a:pPr lvl="0" indent="0" marL="0" algn="l">
+                        <a:buNone/>
+                      </a:pPr>
+                      <a:r>
+                        <a:rPr/>
+                        <a:t>Diabetes</a:t>
+                      </a:r>
+                    </a:p>
+                  </a:txBody>
+                </a:tc>
+                <a:tc>
+                  <a:txBody>
+                    <a:bodyPr/>
+                    <a:lstStyle/>
+                    <a:p>
+                      <a:pPr lvl="0" indent="0" marL="0" algn="r">
+                        <a:buNone/>
+                      </a:pPr>
+                      <a:r>
+                        <a:rPr/>
+                        <a:t>360</a:t>
+                      </a:r>
+                    </a:p>
+                  </a:txBody>
+                </a:tc>
+                <a:tc>
+                  <a:txBody>
+                    <a:bodyPr/>
+                    <a:lstStyle/>
+                    <a:p>
+                      <a:pPr lvl="0" indent="0" marL="0" algn="r">
+                        <a:buNone/>
+                      </a:pPr>
+                      <a:r>
+                        <a:rPr/>
+                        <a:t>2531400</a:t>
+                      </a:r>
+                    </a:p>
+                  </a:txBody>
+                </a:tc>
+              </a:tr>
+              <a:tr h="0">
+                <a:tc>
+                  <a:txBody>
+                    <a:bodyPr/>
+                    <a:lstStyle/>
+                    <a:p>
+                      <a:pPr lvl="0" indent="0" marL="0" algn="l">
+                        <a:buNone/>
+                      </a:pPr>
+                      <a:r>
+                        <a:rPr/>
+                        <a:t>rail</a:t>
+                      </a:r>
+                    </a:p>
+                  </a:txBody>
+                </a:tc>
+                <a:tc>
+                  <a:txBody>
+                    <a:bodyPr/>
+                    <a:lstStyle/>
+                    <a:p>
+                      <a:pPr lvl="0" indent="0" marL="0" algn="l">
+                        <a:buNone/>
+                      </a:pPr>
+                      <a:r>
+                        <a:rPr/>
+                        <a:t>EEA</a:t>
+                      </a:r>
+                    </a:p>
+                  </a:txBody>
+                </a:tc>
+                <a:tc>
+                  <a:txBody>
+                    <a:bodyPr/>
+                    <a:lstStyle/>
+                    <a:p>
+                      <a:pPr lvl="0" indent="0" marL="0" algn="l">
+                        <a:buNone/>
+                      </a:pPr>
+                      <a:r>
+                        <a:rPr/>
+                        <a:t>all</a:t>
+                      </a:r>
+                    </a:p>
+                  </a:txBody>
+                </a:tc>
+                <a:tc>
+                  <a:txBody>
+                    <a:bodyPr/>
+                    <a:lstStyle/>
+                    <a:p>
+                      <a:pPr lvl="0" indent="0" marL="0" algn="l">
+                        <a:buNone/>
+                      </a:pPr>
+                      <a:r>
+                        <a:rPr/>
+                        <a:t>Reading Comprehension</a:t>
+                      </a:r>
+                    </a:p>
+                  </a:txBody>
+                </a:tc>
+                <a:tc>
+                  <a:txBody>
+                    <a:bodyPr/>
+                    <a:lstStyle/>
+                    <a:p>
+                      <a:pPr lvl="0" indent="0" marL="0" algn="r">
+                        <a:buNone/>
+                      </a:pPr>
+                      <a:r>
+                        <a:rPr/>
+                        <a:t>360</a:t>
+                      </a:r>
+                    </a:p>
+                  </a:txBody>
+                </a:tc>
+                <a:tc>
+                  <a:txBody>
+                    <a:bodyPr/>
+                    <a:lstStyle/>
+                    <a:p>
+                      <a:pPr lvl="0" indent="0" marL="0" algn="r">
+                        <a:buNone/>
+                      </a:pPr>
+                      <a:r>
+                        <a:rPr/>
+                        <a:t>2531400</a:t>
+                      </a:r>
+                    </a:p>
+                  </a:txBody>
+                </a:tc>
+              </a:tr>
+              <a:tr h="0">
+                <a:tc>
+                  <a:txBody>
+                    <a:bodyPr/>
+                    <a:lstStyle/>
+                    <a:p>
+                      <a:pPr lvl="0" indent="0" marL="0" algn="l">
+                        <a:buNone/>
+                      </a:pPr>
+                      <a:r>
+                        <a:rPr/>
+                        <a:t>rail</a:t>
+                      </a:r>
+                    </a:p>
+                  </a:txBody>
+                </a:tc>
+                <a:tc>
+                  <a:txBody>
+                    <a:bodyPr/>
+                    <a:lstStyle/>
+                    <a:p>
+                      <a:pPr lvl="0" indent="0" marL="0" algn="l">
+                        <a:buNone/>
+                      </a:pPr>
+                      <a:r>
+                        <a:rPr/>
+                        <a:t>EEA</a:t>
+                      </a:r>
+                    </a:p>
+                  </a:txBody>
+                </a:tc>
+                <a:tc>
+                  <a:txBody>
+                    <a:bodyPr/>
+                    <a:lstStyle/>
+                    <a:p>
+                      <a:pPr lvl="0" indent="0" marL="0" algn="l">
+                        <a:buNone/>
+                      </a:pPr>
+                      <a:r>
+                        <a:rPr/>
+                        <a:t>all</a:t>
+                      </a:r>
+                    </a:p>
+                  </a:txBody>
+                </a:tc>
+                <a:tc>
+                  <a:txBody>
+                    <a:bodyPr/>
+                    <a:lstStyle/>
+                    <a:p>
+                      <a:pPr lvl="0" indent="0" marL="0" algn="l">
+                        <a:buNone/>
+                      </a:pPr>
+                      <a:r>
+                        <a:rPr/>
+                        <a:t>Behavioural problems</a:t>
+                      </a:r>
+                    </a:p>
+                  </a:txBody>
+                </a:tc>
+                <a:tc>
+                  <a:txBody>
+                    <a:bodyPr/>
+                    <a:lstStyle/>
+                    <a:p>
+                      <a:pPr lvl="0" indent="0" marL="0" algn="r">
+                        <a:buNone/>
+                      </a:pPr>
+                      <a:r>
+                        <a:rPr/>
+                        <a:t>360</a:t>
+                      </a:r>
+                    </a:p>
+                  </a:txBody>
+                </a:tc>
+                <a:tc>
+                  <a:txBody>
+                    <a:bodyPr/>
+                    <a:lstStyle/>
+                    <a:p>
+                      <a:pPr lvl="0" indent="0" marL="0" algn="r">
+                        <a:buNone/>
+                      </a:pPr>
+                      <a:r>
+                        <a:rPr/>
+                        <a:t>2531400</a:t>
+                      </a:r>
+                    </a:p>
+                  </a:txBody>
+                </a:tc>
+              </a:tr>
+              <a:tr h="0">
+                <a:tc>
+                  <a:txBody>
+                    <a:bodyPr/>
+                    <a:lstStyle/>
+                    <a:p>
+                      <a:pPr lvl="0" indent="0" marL="0" algn="l">
+                        <a:buNone/>
+                      </a:pPr>
+                      <a:r>
+                        <a:rPr/>
+                        <a:t>rail</a:t>
+                      </a:r>
+                    </a:p>
+                  </a:txBody>
+                </a:tc>
+                <a:tc>
+                  <a:txBody>
+                    <a:bodyPr/>
+                    <a:lstStyle/>
+                    <a:p>
+                      <a:pPr lvl="0" indent="0" marL="0" algn="l">
+                        <a:buNone/>
+                      </a:pPr>
+                      <a:r>
+                        <a:rPr/>
+                        <a:t>EEA</a:t>
+                      </a:r>
+                    </a:p>
+                  </a:txBody>
+                </a:tc>
+                <a:tc>
+                  <a:txBody>
+                    <a:bodyPr/>
+                    <a:lstStyle/>
+                    <a:p>
+                      <a:pPr lvl="0" indent="0" marL="0" algn="l">
+                        <a:buNone/>
+                      </a:pPr>
+                      <a:r>
+                        <a:rPr/>
+                        <a:t>all</a:t>
+                      </a:r>
+                    </a:p>
+                  </a:txBody>
+                </a:tc>
+                <a:tc>
+                  <a:txBody>
+                    <a:bodyPr/>
+                    <a:lstStyle/>
+                    <a:p>
+                      <a:pPr lvl="0" indent="0" marL="0" algn="l">
+                        <a:buNone/>
+                      </a:pPr>
+                      <a:r>
+                        <a:rPr/>
+                        <a:t>Overweight</a:t>
+                      </a:r>
+                    </a:p>
+                  </a:txBody>
+                </a:tc>
+                <a:tc>
+                  <a:txBody>
+                    <a:bodyPr/>
+                    <a:lstStyle/>
+                    <a:p>
+                      <a:pPr lvl="0" indent="0" marL="0" algn="r">
+                        <a:buNone/>
+                      </a:pPr>
+                      <a:r>
+                        <a:rPr/>
+                        <a:t>360</a:t>
+                      </a:r>
+                    </a:p>
+                  </a:txBody>
+                </a:tc>
+                <a:tc>
+                  <a:txBody>
+                    <a:bodyPr/>
+                    <a:lstStyle/>
+                    <a:p>
+                      <a:pPr lvl="0" indent="0" marL="0" algn="r">
+                        <a:buNone/>
+                      </a:pPr>
+                      <a:r>
+                        <a:rPr/>
+                        <a:t>2531400</a:t>
+                      </a:r>
+                    </a:p>
+                  </a:txBody>
+                </a:tc>
+              </a:tr>
+              <a:tr h="0">
+                <a:tc>
+                  <a:txBody>
+                    <a:bodyPr/>
+                    <a:lstStyle/>
+                    <a:p>
+                      <a:pPr lvl="0" indent="0" marL="0" algn="l">
+                        <a:buNone/>
+                      </a:pPr>
+                      <a:r>
+                        <a:rPr/>
+                        <a:t>rail</a:t>
+                      </a:r>
+                    </a:p>
+                  </a:txBody>
+                </a:tc>
+                <a:tc>
+                  <a:txBody>
+                    <a:bodyPr/>
+                    <a:lstStyle/>
+                    <a:p>
+                      <a:pPr lvl="0" indent="0" marL="0" algn="l">
+                        <a:buNone/>
+                      </a:pPr>
+                      <a:r>
+                        <a:rPr/>
+                        <a:t>EEA</a:t>
+                      </a:r>
+                    </a:p>
+                  </a:txBody>
+                </a:tc>
+                <a:tc>
+                  <a:txBody>
+                    <a:bodyPr/>
+                    <a:lstStyle/>
+                    <a:p>
+                      <a:pPr lvl="0" indent="0" marL="0" algn="l">
+                        <a:buNone/>
+                      </a:pPr>
+                      <a:r>
+                        <a:rPr/>
+                        <a:t>all</a:t>
+                      </a:r>
+                    </a:p>
+                  </a:txBody>
+                </a:tc>
+                <a:tc>
+                  <a:txBody>
+                    <a:bodyPr/>
+                    <a:lstStyle/>
+                    <a:p>
+                      <a:pPr lvl="0" indent="0" marL="0" algn="l">
+                        <a:buNone/>
+                      </a:pPr>
+                      <a:r>
+                        <a:rPr/>
+                        <a:t>High sleep disturbance</a:t>
+                      </a:r>
+                    </a:p>
+                  </a:txBody>
+                </a:tc>
+                <a:tc>
+                  <a:txBody>
+                    <a:bodyPr/>
+                    <a:lstStyle/>
+                    <a:p>
+                      <a:pPr lvl="0" indent="0" marL="0" algn="r">
+                        <a:buNone/>
+                      </a:pPr>
+                      <a:r>
+                        <a:rPr/>
+                        <a:t>360</a:t>
+                      </a:r>
+                    </a:p>
+                  </a:txBody>
+                </a:tc>
+                <a:tc>
+                  <a:txBody>
+                    <a:bodyPr/>
+                    <a:lstStyle/>
+                    <a:p>
+                      <a:pPr lvl="0" indent="0" marL="0" algn="r">
+                        <a:buNone/>
+                      </a:pPr>
+                      <a:r>
+                        <a:rPr/>
+                        <a:t>1882700</a:t>
+                      </a:r>
+                    </a:p>
+                  </a:txBody>
+                </a:tc>
+              </a:tr>
+              <a:tr h="0">
+                <a:tc>
+                  <a:txBody>
+                    <a:bodyPr/>
+                    <a:lstStyle/>
+                    <a:p>
+                      <a:pPr lvl="0" indent="0" marL="0" algn="l">
+                        <a:buNone/>
+                      </a:pPr>
+                      <a:r>
+                        <a:rPr/>
+                        <a:t>rail</a:t>
+                      </a:r>
+                    </a:p>
+                  </a:txBody>
+                </a:tc>
+                <a:tc>
+                  <a:txBody>
+                    <a:bodyPr/>
+                    <a:lstStyle/>
+                    <a:p>
+                      <a:pPr lvl="0" indent="0" marL="0" algn="l">
+                        <a:buNone/>
+                      </a:pPr>
+                      <a:r>
+                        <a:rPr/>
+                        <a:t>EEA</a:t>
+                      </a:r>
+                    </a:p>
+                  </a:txBody>
+                </a:tc>
+                <a:tc>
+                  <a:txBody>
+                    <a:bodyPr/>
+                    <a:lstStyle/>
+                    <a:p>
+                      <a:pPr lvl="0" indent="0" marL="0" algn="l">
+                        <a:buNone/>
+                      </a:pPr>
+                      <a:r>
+                        <a:rPr/>
+                        <a:t>major</a:t>
+                      </a:r>
+                    </a:p>
+                  </a:txBody>
+                </a:tc>
+                <a:tc>
+                  <a:txBody>
+                    <a:bodyPr/>
+                    <a:lstStyle/>
+                    <a:p>
+                      <a:pPr lvl="0" indent="0" marL="0" algn="l">
+                        <a:buNone/>
+                      </a:pPr>
+                      <a:r>
+                        <a:rPr/>
+                        <a:t>High noise annoyance</a:t>
+                      </a:r>
+                    </a:p>
+                  </a:txBody>
+                </a:tc>
+                <a:tc>
+                  <a:txBody>
+                    <a:bodyPr/>
+                    <a:lstStyle/>
+                    <a:p>
+                      <a:pPr lvl="0" indent="0" marL="0" algn="r">
+                        <a:buNone/>
+                      </a:pPr>
+                      <a:r>
+                        <a:rPr/>
+                        <a:t>360</a:t>
+                      </a:r>
+                    </a:p>
+                  </a:txBody>
+                </a:tc>
+                <a:tc>
+                  <a:txBody>
+                    <a:bodyPr/>
+                    <a:lstStyle/>
+                    <a:p>
+                      <a:pPr lvl="0" indent="0" marL="0" algn="r">
+                        <a:buNone/>
+                      </a:pPr>
+                      <a:r>
+                        <a:rPr/>
+                        <a:t>1220100</a:t>
+                      </a:r>
+                    </a:p>
+                  </a:txBody>
+                </a:tc>
+              </a:tr>
+              <a:tr h="0">
+                <a:tc>
+                  <a:txBody>
+                    <a:bodyPr/>
+                    <a:lstStyle/>
+                    <a:p>
+                      <a:pPr lvl="0" indent="0" marL="0" algn="l">
+                        <a:buNone/>
+                      </a:pPr>
+                      <a:r>
+                        <a:rPr/>
+                        <a:t>rail</a:t>
+                      </a:r>
+                    </a:p>
+                  </a:txBody>
+                </a:tc>
+                <a:tc>
+                  <a:txBody>
+                    <a:bodyPr/>
+                    <a:lstStyle/>
+                    <a:p>
+                      <a:pPr lvl="0" indent="0" marL="0" algn="l">
+                        <a:buNone/>
+                      </a:pPr>
+                      <a:r>
+                        <a:rPr/>
+                        <a:t>EEA</a:t>
+                      </a:r>
+                    </a:p>
+                  </a:txBody>
+                </a:tc>
+                <a:tc>
+                  <a:txBody>
+                    <a:bodyPr/>
+                    <a:lstStyle/>
+                    <a:p>
+                      <a:pPr lvl="0" indent="0" marL="0" algn="l">
+                        <a:buNone/>
+                      </a:pPr>
+                      <a:r>
+                        <a:rPr/>
+                        <a:t>major</a:t>
+                      </a:r>
+                    </a:p>
+                  </a:txBody>
+                </a:tc>
+                <a:tc>
+                  <a:txBody>
+                    <a:bodyPr/>
+                    <a:lstStyle/>
+                    <a:p>
+                      <a:pPr lvl="0" indent="0" marL="0" algn="l">
+                        <a:buNone/>
+                      </a:pPr>
+                      <a:r>
+                        <a:rPr/>
+                        <a:t>All-cause mortality</a:t>
+                      </a:r>
+                    </a:p>
+                  </a:txBody>
+                </a:tc>
+                <a:tc>
+                  <a:txBody>
+                    <a:bodyPr/>
+                    <a:lstStyle/>
+                    <a:p>
+                      <a:pPr lvl="0" indent="0" marL="0" algn="r">
+                        <a:buNone/>
+                      </a:pPr>
+                      <a:r>
+                        <a:rPr/>
+                        <a:t>360</a:t>
+                      </a:r>
+                    </a:p>
+                  </a:txBody>
+                </a:tc>
+                <a:tc>
+                  <a:txBody>
+                    <a:bodyPr/>
+                    <a:lstStyle/>
+                    <a:p>
+                      <a:pPr lvl="0" indent="0" marL="0" algn="r">
+                        <a:buNone/>
+                      </a:pPr>
+                      <a:r>
+                        <a:rPr/>
+                        <a:t>1220100</a:t>
+                      </a:r>
+                    </a:p>
+                  </a:txBody>
+                </a:tc>
+              </a:tr>
+              <a:tr h="0">
+                <a:tc>
+                  <a:txBody>
+                    <a:bodyPr/>
+                    <a:lstStyle/>
+                    <a:p>
+                      <a:pPr lvl="0" indent="0" marL="0" algn="l">
+                        <a:buNone/>
+                      </a:pPr>
+                      <a:r>
+                        <a:rPr/>
+                        <a:t>rail</a:t>
+                      </a:r>
+                    </a:p>
+                  </a:txBody>
+                </a:tc>
+                <a:tc>
+                  <a:txBody>
+                    <a:bodyPr/>
+                    <a:lstStyle/>
+                    <a:p>
+                      <a:pPr lvl="0" indent="0" marL="0" algn="l">
+                        <a:buNone/>
+                      </a:pPr>
+                      <a:r>
+                        <a:rPr/>
+                        <a:t>EEA</a:t>
+                      </a:r>
+                    </a:p>
+                  </a:txBody>
+                </a:tc>
+                <a:tc>
+                  <a:txBody>
+                    <a:bodyPr/>
+                    <a:lstStyle/>
+                    <a:p>
+                      <a:pPr lvl="0" indent="0" marL="0" algn="l">
+                        <a:buNone/>
+                      </a:pPr>
+                      <a:r>
+                        <a:rPr/>
+                        <a:t>major</a:t>
+                      </a:r>
+                    </a:p>
+                  </a:txBody>
+                </a:tc>
+                <a:tc>
+                  <a:txBody>
+                    <a:bodyPr/>
+                    <a:lstStyle/>
+                    <a:p>
+                      <a:pPr lvl="0" indent="0" marL="0" algn="l">
+                        <a:buNone/>
+                      </a:pPr>
+                      <a:r>
+                        <a:rPr/>
+                        <a:t>Cardiovascular disease</a:t>
+                      </a:r>
+                    </a:p>
+                  </a:txBody>
+                </a:tc>
+                <a:tc>
+                  <a:txBody>
+                    <a:bodyPr/>
+                    <a:lstStyle/>
+                    <a:p>
+                      <a:pPr lvl="0" indent="0" marL="0" algn="r">
+                        <a:buNone/>
+                      </a:pPr>
+                      <a:r>
+                        <a:rPr/>
+                        <a:t>360</a:t>
+                      </a:r>
+                    </a:p>
+                  </a:txBody>
+                </a:tc>
+                <a:tc>
+                  <a:txBody>
+                    <a:bodyPr/>
+                    <a:lstStyle/>
+                    <a:p>
+                      <a:pPr lvl="0" indent="0" marL="0" algn="r">
+                        <a:buNone/>
+                      </a:pPr>
+                      <a:r>
+                        <a:rPr/>
+                        <a:t>1220100</a:t>
+                      </a:r>
+                    </a:p>
+                  </a:txBody>
+                </a:tc>
+              </a:tr>
+              <a:tr h="0">
+                <a:tc>
+                  <a:txBody>
+                    <a:bodyPr/>
+                    <a:lstStyle/>
+                    <a:p>
+                      <a:pPr lvl="0" indent="0" marL="0" algn="l">
+                        <a:buNone/>
+                      </a:pPr>
+                      <a:r>
+                        <a:rPr/>
+                        <a:t>rail</a:t>
+                      </a:r>
+                    </a:p>
+                  </a:txBody>
+                </a:tc>
+                <a:tc>
+                  <a:txBody>
+                    <a:bodyPr/>
+                    <a:lstStyle/>
+                    <a:p>
+                      <a:pPr lvl="0" indent="0" marL="0" algn="l">
+                        <a:buNone/>
+                      </a:pPr>
+                      <a:r>
+                        <a:rPr/>
+                        <a:t>EEA</a:t>
+                      </a:r>
+                    </a:p>
+                  </a:txBody>
+                </a:tc>
+                <a:tc>
+                  <a:txBody>
+                    <a:bodyPr/>
+                    <a:lstStyle/>
+                    <a:p>
+                      <a:pPr lvl="0" indent="0" marL="0" algn="l">
+                        <a:buNone/>
+                      </a:pPr>
+                      <a:r>
+                        <a:rPr/>
+                        <a:t>major</a:t>
+                      </a:r>
+                    </a:p>
+                  </a:txBody>
+                </a:tc>
+                <a:tc>
+                  <a:txBody>
+                    <a:bodyPr/>
+                    <a:lstStyle/>
+                    <a:p>
+                      <a:pPr lvl="0" indent="0" marL="0" algn="l">
+                        <a:buNone/>
+                      </a:pPr>
+                      <a:r>
+                        <a:rPr/>
+                        <a:t>Diabetes</a:t>
+                      </a:r>
+                    </a:p>
+                  </a:txBody>
+                </a:tc>
+                <a:tc>
+                  <a:txBody>
+                    <a:bodyPr/>
+                    <a:lstStyle/>
+                    <a:p>
+                      <a:pPr lvl="0" indent="0" marL="0" algn="r">
+                        <a:buNone/>
+                      </a:pPr>
+                      <a:r>
+                        <a:rPr/>
+                        <a:t>360</a:t>
+                      </a:r>
+                    </a:p>
+                  </a:txBody>
+                </a:tc>
+                <a:tc>
+                  <a:txBody>
+                    <a:bodyPr/>
+                    <a:lstStyle/>
+                    <a:p>
+                      <a:pPr lvl="0" indent="0" marL="0" algn="r">
+                        <a:buNone/>
+                      </a:pPr>
+                      <a:r>
+                        <a:rPr/>
+                        <a:t>1220100</a:t>
+                      </a:r>
+                    </a:p>
+                  </a:txBody>
+                </a:tc>
+              </a:tr>
+              <a:tr h="0">
+                <a:tc>
+                  <a:txBody>
+                    <a:bodyPr/>
+                    <a:lstStyle/>
+                    <a:p>
+                      <a:pPr lvl="0" indent="0" marL="0" algn="l">
+                        <a:buNone/>
+                      </a:pPr>
+                      <a:r>
+                        <a:rPr/>
+                        <a:t>rail</a:t>
+                      </a:r>
+                    </a:p>
+                  </a:txBody>
+                </a:tc>
+                <a:tc>
+                  <a:txBody>
+                    <a:bodyPr/>
+                    <a:lstStyle/>
+                    <a:p>
+                      <a:pPr lvl="0" indent="0" marL="0" algn="l">
+                        <a:buNone/>
+                      </a:pPr>
+                      <a:r>
+                        <a:rPr/>
+                        <a:t>EEA</a:t>
+                      </a:r>
+                    </a:p>
+                  </a:txBody>
+                </a:tc>
+                <a:tc>
+                  <a:txBody>
+                    <a:bodyPr/>
+                    <a:lstStyle/>
+                    <a:p>
+                      <a:pPr lvl="0" indent="0" marL="0" algn="l">
+                        <a:buNone/>
+                      </a:pPr>
+                      <a:r>
+                        <a:rPr/>
+                        <a:t>major</a:t>
+                      </a:r>
+                    </a:p>
+                  </a:txBody>
+                </a:tc>
+                <a:tc>
+                  <a:txBody>
+                    <a:bodyPr/>
+                    <a:lstStyle/>
+                    <a:p>
+                      <a:pPr lvl="0" indent="0" marL="0" algn="l">
+                        <a:buNone/>
+                      </a:pPr>
+                      <a:r>
+                        <a:rPr/>
+                        <a:t>Reading Comprehension</a:t>
+                      </a:r>
+                    </a:p>
+                  </a:txBody>
+                </a:tc>
+                <a:tc>
+                  <a:txBody>
+                    <a:bodyPr/>
+                    <a:lstStyle/>
+                    <a:p>
+                      <a:pPr lvl="0" indent="0" marL="0" algn="r">
+                        <a:buNone/>
+                      </a:pPr>
+                      <a:r>
+                        <a:rPr/>
+                        <a:t>360</a:t>
+                      </a:r>
+                    </a:p>
+                  </a:txBody>
+                </a:tc>
+                <a:tc>
+                  <a:txBody>
+                    <a:bodyPr/>
+                    <a:lstStyle/>
+                    <a:p>
+                      <a:pPr lvl="0" indent="0" marL="0" algn="r">
+                        <a:buNone/>
+                      </a:pPr>
+                      <a:r>
+                        <a:rPr/>
+                        <a:t>1220100</a:t>
+                      </a:r>
+                    </a:p>
+                  </a:txBody>
+                </a:tc>
+              </a:tr>
+              <a:tr h="0">
+                <a:tc>
+                  <a:txBody>
+                    <a:bodyPr/>
+                    <a:lstStyle/>
+                    <a:p>
+                      <a:pPr lvl="0" indent="0" marL="0" algn="l">
+                        <a:buNone/>
+                      </a:pPr>
+                      <a:r>
+                        <a:rPr/>
+                        <a:t>rail</a:t>
+                      </a:r>
+                    </a:p>
+                  </a:txBody>
+                </a:tc>
+                <a:tc>
+                  <a:txBody>
+                    <a:bodyPr/>
+                    <a:lstStyle/>
+                    <a:p>
+                      <a:pPr lvl="0" indent="0" marL="0" algn="l">
+                        <a:buNone/>
+                      </a:pPr>
+                      <a:r>
+                        <a:rPr/>
+                        <a:t>EEA</a:t>
+                      </a:r>
+                    </a:p>
+                  </a:txBody>
+                </a:tc>
+                <a:tc>
+                  <a:txBody>
+                    <a:bodyPr/>
+                    <a:lstStyle/>
+                    <a:p>
+                      <a:pPr lvl="0" indent="0" marL="0" algn="l">
+                        <a:buNone/>
+                      </a:pPr>
+                      <a:r>
+                        <a:rPr/>
+                        <a:t>major</a:t>
+                      </a:r>
+                    </a:p>
+                  </a:txBody>
+                </a:tc>
+                <a:tc>
+                  <a:txBody>
+                    <a:bodyPr/>
+                    <a:lstStyle/>
+                    <a:p>
+                      <a:pPr lvl="0" indent="0" marL="0" algn="l">
+                        <a:buNone/>
+                      </a:pPr>
+                      <a:r>
+                        <a:rPr/>
+                        <a:t>Behavioural problems</a:t>
+                      </a:r>
+                    </a:p>
+                  </a:txBody>
+                </a:tc>
+                <a:tc>
+                  <a:txBody>
+                    <a:bodyPr/>
+                    <a:lstStyle/>
+                    <a:p>
+                      <a:pPr lvl="0" indent="0" marL="0" algn="r">
+                        <a:buNone/>
+                      </a:pPr>
+                      <a:r>
+                        <a:rPr/>
+                        <a:t>360</a:t>
+                      </a:r>
+                    </a:p>
+                  </a:txBody>
+                </a:tc>
+                <a:tc>
+                  <a:txBody>
+                    <a:bodyPr/>
+                    <a:lstStyle/>
+                    <a:p>
+                      <a:pPr lvl="0" indent="0" marL="0" algn="r">
+                        <a:buNone/>
+                      </a:pPr>
+                      <a:r>
+                        <a:rPr/>
+                        <a:t>1220100</a:t>
+                      </a:r>
+                    </a:p>
+                  </a:txBody>
+                </a:tc>
+              </a:tr>
+              <a:tr h="0">
+                <a:tc>
+                  <a:txBody>
+                    <a:bodyPr/>
+                    <a:lstStyle/>
+                    <a:p>
+                      <a:pPr lvl="0" indent="0" marL="0" algn="l">
+                        <a:buNone/>
+                      </a:pPr>
+                      <a:r>
+                        <a:rPr/>
+                        <a:t>rail</a:t>
+                      </a:r>
+                    </a:p>
+                  </a:txBody>
+                </a:tc>
+                <a:tc>
+                  <a:txBody>
+                    <a:bodyPr/>
+                    <a:lstStyle/>
+                    <a:p>
+                      <a:pPr lvl="0" indent="0" marL="0" algn="l">
+                        <a:buNone/>
+                      </a:pPr>
+                      <a:r>
+                        <a:rPr/>
+                        <a:t>EEA</a:t>
+                      </a:r>
+                    </a:p>
+                  </a:txBody>
+                </a:tc>
+                <a:tc>
+                  <a:txBody>
+                    <a:bodyPr/>
+                    <a:lstStyle/>
+                    <a:p>
+                      <a:pPr lvl="0" indent="0" marL="0" algn="l">
+                        <a:buNone/>
+                      </a:pPr>
+                      <a:r>
+                        <a:rPr/>
+                        <a:t>major</a:t>
+                      </a:r>
+                    </a:p>
+                  </a:txBody>
+                </a:tc>
+                <a:tc>
+                  <a:txBody>
+                    <a:bodyPr/>
+                    <a:lstStyle/>
+                    <a:p>
+                      <a:pPr lvl="0" indent="0" marL="0" algn="l">
+                        <a:buNone/>
+                      </a:pPr>
+                      <a:r>
+                        <a:rPr/>
+                        <a:t>Overweight</a:t>
+                      </a:r>
+                    </a:p>
+                  </a:txBody>
+                </a:tc>
+                <a:tc>
+                  <a:txBody>
+                    <a:bodyPr/>
+                    <a:lstStyle/>
+                    <a:p>
+                      <a:pPr lvl="0" indent="0" marL="0" algn="r">
+                        <a:buNone/>
+                      </a:pPr>
+                      <a:r>
+                        <a:rPr/>
+                        <a:t>360</a:t>
+                      </a:r>
+                    </a:p>
+                  </a:txBody>
+                </a:tc>
+                <a:tc>
+                  <a:txBody>
+                    <a:bodyPr/>
+                    <a:lstStyle/>
+                    <a:p>
+                      <a:pPr lvl="0" indent="0" marL="0" algn="r">
+                        <a:buNone/>
+                      </a:pPr>
+                      <a:r>
+                        <a:rPr/>
+                        <a:t>1220100</a:t>
+                      </a:r>
+                    </a:p>
+                  </a:txBody>
+                </a:tc>
+              </a:tr>
+              <a:tr h="0">
+                <a:tc>
+                  <a:txBody>
+                    <a:bodyPr/>
+                    <a:lstStyle/>
+                    <a:p>
+                      <a:pPr lvl="0" indent="0" marL="0" algn="l">
+                        <a:buNone/>
+                      </a:pPr>
+                      <a:r>
+                        <a:rPr/>
+                        <a:t>rail</a:t>
+                      </a:r>
+                    </a:p>
+                  </a:txBody>
+                </a:tc>
+                <a:tc>
+                  <a:txBody>
+                    <a:bodyPr/>
+                    <a:lstStyle/>
+                    <a:p>
+                      <a:pPr lvl="0" indent="0" marL="0" algn="l">
+                        <a:buNone/>
+                      </a:pPr>
+                      <a:r>
+                        <a:rPr/>
+                        <a:t>EEA</a:t>
+                      </a:r>
+                    </a:p>
+                  </a:txBody>
+                </a:tc>
+                <a:tc>
+                  <a:txBody>
+                    <a:bodyPr/>
+                    <a:lstStyle/>
+                    <a:p>
+                      <a:pPr lvl="0" indent="0" marL="0" algn="l">
+                        <a:buNone/>
+                      </a:pPr>
+                      <a:r>
+                        <a:rPr/>
+                        <a:t>major</a:t>
+                      </a:r>
+                    </a:p>
+                  </a:txBody>
+                </a:tc>
+                <a:tc>
+                  <a:txBody>
+                    <a:bodyPr/>
+                    <a:lstStyle/>
+                    <a:p>
+                      <a:pPr lvl="0" indent="0" marL="0" algn="l">
+                        <a:buNone/>
+                      </a:pPr>
+                      <a:r>
+                        <a:rPr/>
+                        <a:t>High sleep disturbance</a:t>
+                      </a:r>
+                    </a:p>
+                  </a:txBody>
+                </a:tc>
+                <a:tc>
+                  <a:txBody>
+                    <a:bodyPr/>
+                    <a:lstStyle/>
+                    <a:p>
+                      <a:pPr lvl="0" indent="0" marL="0" algn="r">
+                        <a:buNone/>
+                      </a:pPr>
+                      <a:r>
+                        <a:rPr/>
+                        <a:t>360</a:t>
+                      </a:r>
+                    </a:p>
+                  </a:txBody>
+                </a:tc>
+                <a:tc>
+                  <a:txBody>
+                    <a:bodyPr/>
+                    <a:lstStyle/>
+                    <a:p>
+                      <a:pPr lvl="0" indent="0" marL="0" algn="r">
+                        <a:buNone/>
+                      </a:pPr>
+                      <a:r>
+                        <a:rPr/>
+                        <a:t>935700</a:t>
                       </a:r>
                     </a:p>
                   </a:txBody>
@@ -8398,21 +10733,38 @@
                 <a:latin typeface="Courier"/>
               </a:rPr>
               <a:t>[1] "hier wird diese Outcome-Liste berücksichtigt:"
-# A tibble: 7 × 3
+# A tibble: 9 × 3
   outcome                source metric
   &lt;chr&gt;                  &lt;chr&gt;  &lt;chr&gt; 
 1 High noise annoyance   road   lden  
-2 High sleep disturbance road   lnight
-3 High noise annoyance   air    lden  
-4 Reading Comprehension  air    lden  
-5 High sleep disturbance air    lnight
-6 High noise annoyance   rail   lden  
-7 High sleep disturbance rail   lnight
+2 Reading Comprehension  road   lden  
+3 High sleep disturbance road   lnight
+4 High noise annoyance   air    lden  
+5 Reading Comprehension  air    lden  
+6 High sleep disturbance air    lnight
+7 High noise annoyance   rail   lden  
+8 Reading Comprehension  rail   lden  
+9 High sleep disturbance rail   lnight
 [1] "Nun Kombi:"
 # A tibble: 1 × 3
   outcome              source metric
   &lt;chr&gt;                &lt;chr&gt;  &lt;chr&gt; 
 1 High noise annoyance road   lden  </a:t>
+            </a:r>
+          </a:p>
+          <a:p>
+            <a:pPr lvl="0" indent="0">
+              <a:buNone/>
+            </a:pPr>
+            <a:r>
+              <a:rPr>
+                <a:latin typeface="Courier"/>
+              </a:rPr>
+              <a:t>[1] "Nun Kombi:"
+# A tibble: 1 × 3
+  outcome               source metric
+  &lt;chr&gt;                 &lt;chr&gt;  &lt;chr&gt; 
+1 Reading Comprehension road   lden  </a:t>
             </a:r>
           </a:p>
           <a:p>
@@ -8500,6 +10852,21 @@
               </a:rPr>
               <a:t>[1] "Nun Kombi:"
 # A tibble: 1 × 3
+  outcome               source metric
+  &lt;chr&gt;                 &lt;chr&gt;  &lt;chr&gt; 
+1 Reading Comprehension rail   lden  </a:t>
+            </a:r>
+          </a:p>
+          <a:p>
+            <a:pPr lvl="0" indent="0">
+              <a:buNone/>
+            </a:pPr>
+            <a:r>
+              <a:rPr>
+                <a:latin typeface="Courier"/>
+              </a:rPr>
+              <a:t>[1] "Nun Kombi:"
+# A tibble: 1 × 3
   outcome                source metric
   &lt;chr&gt;                  &lt;chr&gt;  &lt;chr&gt; 
 1 High sleep disturbance rail   lnight</a:t>
@@ -8514,21 +10881,37 @@
                 <a:latin typeface="Courier"/>
               </a:rPr>
               <a:t>[1] "hier wird diese Outcome-Liste berücksichtigt:"
-# A tibble: 7 × 3
+# A tibble: 8 × 3
   outcome                source   metric
   &lt;chr&gt;                  &lt;chr&gt;    &lt;chr&gt; 
 1 High noise annoyance   road     lden  
-2 High sleep disturbance road     lnight
-3 High noise annoyance   air      lden  
-4 Reading Comprehension  air      lden  
-5 High sleep disturbance air      lnight
-6 High noise annoyance   industry lden  
-7 High sleep disturbance industry lnight
+2 Reading Comprehension  road     lden  
+3 High sleep disturbance road     lnight
+4 High noise annoyance   air      lden  
+5 Reading Comprehension  air      lden  
+6 High sleep disturbance air      lnight
+7 High noise annoyance   industry lden  
+8 High sleep disturbance industry lnight
 [1] "Nun Kombi:"
 # A tibble: 1 × 3
   outcome              source metric
   &lt;chr&gt;                &lt;chr&gt;  &lt;chr&gt; 
 1 High noise annoyance road   lden  </a:t>
+            </a:r>
+          </a:p>
+          <a:p>
+            <a:pPr lvl="0" indent="0">
+              <a:buNone/>
+            </a:pPr>
+            <a:r>
+              <a:rPr>
+                <a:latin typeface="Courier"/>
+              </a:rPr>
+              <a:t>[1] "Nun Kombi:"
+# A tibble: 1 × 3
+  outcome               source metric
+  &lt;chr&gt;                 &lt;chr&gt;  &lt;chr&gt; 
+1 Reading Comprehension road   lden  </a:t>
             </a:r>
           </a:p>
           <a:p>
@@ -8779,7 +11162,7 @@
       </p:sp>
       <p:pic>
         <p:nvPicPr>
-          <p:cNvPr descr="03_burden_calculations_files/figure-pptx/plot-exposure-kreis-gg-1.png" id="0" name="Picture 1"/>
+          <p:cNvPr descr="03_burden_calculations_files/figure-pptx/plot-ballubgsraeume-1.png" id="0" name="Picture 1"/>
           <p:cNvPicPr>
             <a:picLocks noGrp="1" noChangeAspect="1"/>
           </p:cNvPicPr>

--- a/03_burden_calculations.pptx
+++ b/03_burden_calculations.pptx
@@ -16,7 +16,6 @@
     <p:sldId id="264" r:id="rId10"/>
     <p:sldId id="265" r:id="rId11"/>
     <p:sldId id="266" r:id="rId12"/>
-    <p:sldId id="267" r:id="rId13"/>
   </p:sldIdLst>
   <p:sldSz cx="9144000" cy="5143500" type="screen16x9"/>
   <p:notesSz cx="6858000" cy="9144000"/>
@@ -3183,115 +3182,6 @@
           <a:chExt cx="0" cy="0"/>
         </a:xfrm>
       </p:grpSpPr>
-      <p:sp>
-        <p:nvSpPr>
-          <p:cNvPr id="2" name="Title 1"/>
-          <p:cNvSpPr>
-            <a:spLocks noGrp="1"/>
-          </p:cNvSpPr>
-          <p:nvPr>
-            <p:ph type="title"/>
-          </p:nvPr>
-        </p:nvSpPr>
-        <p:spPr/>
-        <p:txBody>
-          <a:bodyPr/>
-          <a:lstStyle/>
-          <a:p>
-            <a:pPr lvl="0" indent="0" marL="0">
-              <a:buNone/>
-            </a:pPr>
-            <a:r>
-              <a:rPr/>
-              <a:t>Gesundheitsauswirkungen in Regionen</a:t>
-            </a:r>
-          </a:p>
-        </p:txBody>
-      </p:sp>
-      <p:pic>
-        <p:nvPicPr>
-          <p:cNvPr descr="03_burden_calculations_files/figure-pptx/fig-ballubgsraeume-1.png" id="0" name="Picture 1"/>
-          <p:cNvPicPr>
-            <a:picLocks noGrp="1" noChangeAspect="1"/>
-          </p:cNvPicPr>
-          <p:nvPr/>
-        </p:nvPicPr>
-        <p:blipFill>
-          <a:blip r:embed="rId2"/>
-          <a:stretch>
-            <a:fillRect/>
-          </a:stretch>
-        </p:blipFill>
-        <p:spPr bwMode="auto">
-          <a:xfrm>
-            <a:off x="1689100" y="1193800"/>
-            <a:ext cx="5765800" cy="2882900"/>
-          </a:xfrm>
-          <a:prstGeom prst="rect">
-            <a:avLst/>
-          </a:prstGeom>
-          <a:noFill/>
-          <a:ln w="9525">
-            <a:noFill/>
-            <a:headEnd/>
-            <a:tailEnd/>
-          </a:ln>
-        </p:spPr>
-      </p:pic>
-      <p:sp>
-        <p:nvSpPr>
-          <p:cNvPr id="1" name="TextBox 3"/>
-          <p:cNvSpPr txBox="1"/>
-          <p:nvPr>
-            <p:ph idx="1"/>
-          </p:nvPr>
-        </p:nvSpPr>
-        <p:spPr>
-          <a:xfrm>
-            <a:off x="457200" y="4076700"/>
-            <a:ext cx="8229600" cy="508000"/>
-          </a:xfrm>
-          <a:prstGeom prst="rect">
-            <a:avLst/>
-          </a:prstGeom>
-          <a:noFill/>
-        </p:spPr>
-        <p:txBody>
-          <a:bodyPr/>
-          <a:lstStyle/>
-          <a:p>
-            <a:pPr lvl="0" indent="0" marL="0" algn="ctr">
-              <a:buNone/>
-            </a:pPr>
-            <a:r>
-              <a:rPr/>
-              <a:t>Figure 2</a:t>
-            </a:r>
-          </a:p>
-        </p:txBody>
-      </p:sp>
-    </p:spTree>
-  </p:cSld>
-</p:sld>
-</file>
-
-<file path=ppt/slides/slide11.xml><?xml version="1.0" encoding="utf-8"?>
-<p:sld xmlns:a="http://schemas.openxmlformats.org/drawingml/2006/main" xmlns:r="http://schemas.openxmlformats.org/officeDocument/2006/relationships" xmlns:p="http://schemas.openxmlformats.org/presentationml/2006/main">
-  <p:cSld>
-    <p:spTree>
-      <p:nvGrpSpPr>
-        <p:cNvPr id="1" name=""/>
-        <p:cNvGrpSpPr/>
-        <p:nvPr/>
-      </p:nvGrpSpPr>
-      <p:grpSpPr>
-        <a:xfrm>
-          <a:off x="0" y="0"/>
-          <a:ext cx="0" cy="0"/>
-          <a:chOff x="0" y="0"/>
-          <a:chExt cx="0" cy="0"/>
-        </a:xfrm>
-      </p:grpSpPr>
       <p:pic>
         <p:nvPicPr>
           <p:cNvPr descr="03_burden_calculations_files/figure-pptx/plotKAGZRM_burden-1.png" id="0" name="Picture 1"/>
@@ -3327,7 +3217,7 @@
 </p:sld>
 </file>
 
-<file path=ppt/slides/slide12.xml><?xml version="1.0" encoding="utf-8"?>
+<file path=ppt/slides/slide11.xml><?xml version="1.0" encoding="utf-8"?>
 <p:sld xmlns:a="http://schemas.openxmlformats.org/drawingml/2006/main" xmlns:r="http://schemas.openxmlformats.org/officeDocument/2006/relationships" xmlns:p="http://schemas.openxmlformats.org/presentationml/2006/main">
   <p:cSld>
     <p:spTree>
@@ -3700,78 +3590,6 @@
             <p:ph type="title"/>
           </p:nvPr>
         </p:nvSpPr>
-        <p:spPr/>
-        <p:txBody>
-          <a:bodyPr/>
-          <a:lstStyle/>
-          <a:p>
-            <a:pPr lvl="0" indent="0" marL="0">
-              <a:buNone/>
-            </a:pPr>
-            <a:r>
-              <a:rPr/>
-              <a:t>Gesundheitsauswirkungen berechnen</a:t>
-            </a:r>
-          </a:p>
-        </p:txBody>
-      </p:sp>
-      <p:sp>
-        <p:nvSpPr>
-          <p:cNvPr id="3" name="Content Placeholder 2"/>
-          <p:cNvSpPr>
-            <a:spLocks noGrp="1"/>
-          </p:cNvSpPr>
-          <p:nvPr>
-            <p:ph idx="1"/>
-          </p:nvPr>
-        </p:nvSpPr>
-        <p:spPr/>
-        <p:txBody>
-          <a:bodyPr/>
-          <a:lstStyle/>
-          <a:p>
-            <a:pPr lvl="0" indent="0" marL="0">
-              <a:buNone/>
-            </a:pPr>
-            <a:r>
-              <a:rPr/>
-              <a:t>Funktion zur Berechnung der Gesundheitsauswirkungen</a:t>
-            </a:r>
-          </a:p>
-        </p:txBody>
-      </p:sp>
-    </p:spTree>
-  </p:cSld>
-</p:sld>
-</file>
-
-<file path=ppt/slides/slide6.xml><?xml version="1.0" encoding="utf-8"?>
-<p:sld xmlns:a="http://schemas.openxmlformats.org/drawingml/2006/main" xmlns:r="http://schemas.openxmlformats.org/officeDocument/2006/relationships" xmlns:p="http://schemas.openxmlformats.org/presentationml/2006/main">
-  <p:cSld>
-    <p:spTree>
-      <p:nvGrpSpPr>
-        <p:cNvPr id="1" name=""/>
-        <p:cNvGrpSpPr/>
-        <p:nvPr/>
-      </p:nvGrpSpPr>
-      <p:grpSpPr>
-        <a:xfrm>
-          <a:off x="0" y="0"/>
-          <a:ext cx="0" cy="0"/>
-          <a:chOff x="0" y="0"/>
-          <a:chExt cx="0" cy="0"/>
-        </a:xfrm>
-      </p:grpSpPr>
-      <p:sp>
-        <p:nvSpPr>
-          <p:cNvPr id="2" name="Title 1"/>
-          <p:cNvSpPr>
-            <a:spLocks noGrp="1"/>
-          </p:cNvSpPr>
-          <p:nvPr>
-            <p:ph type="title"/>
-          </p:nvPr>
-        </p:nvSpPr>
         <p:spPr>
           <a:xfrm>
             <a:off x="457201" y="204787"/>
@@ -11896,7 +11714,7 @@
 </p:sld>
 </file>
 
-<file path=ppt/slides/slide7.xml><?xml version="1.0" encoding="utf-8"?>
+<file path=ppt/slides/slide6.xml><?xml version="1.0" encoding="utf-8"?>
 <p:sld xmlns:a="http://schemas.openxmlformats.org/drawingml/2006/main" xmlns:r="http://schemas.openxmlformats.org/officeDocument/2006/relationships" xmlns:p="http://schemas.openxmlformats.org/presentationml/2006/main">
   <p:cSld>
     <p:spTree>
@@ -20038,7 +19856,7 @@
 </p:sld>
 </file>
 
-<file path=ppt/slides/slide8.xml><?xml version="1.0" encoding="utf-8"?>
+<file path=ppt/slides/slide7.xml><?xml version="1.0" encoding="utf-8"?>
 <p:sld xmlns:a="http://schemas.openxmlformats.org/drawingml/2006/main" xmlns:r="http://schemas.openxmlformats.org/officeDocument/2006/relationships" xmlns:p="http://schemas.openxmlformats.org/presentationml/2006/main">
   <p:cSld>
     <p:spTree>
@@ -20390,7 +20208,7 @@
 </p:sld>
 </file>
 
-<file path=ppt/slides/slide9.xml><?xml version="1.0" encoding="utf-8"?>
+<file path=ppt/slides/slide8.xml><?xml version="1.0" encoding="utf-8"?>
 <p:sld xmlns:a="http://schemas.openxmlformats.org/drawingml/2006/main" xmlns:r="http://schemas.openxmlformats.org/officeDocument/2006/relationships" xmlns:p="http://schemas.openxmlformats.org/presentationml/2006/main">
   <p:cSld>
     <p:spTree>
@@ -20492,6 +20310,115 @@
           </a:ln>
         </p:spPr>
       </p:pic>
+    </p:spTree>
+  </p:cSld>
+</p:sld>
+</file>
+
+<file path=ppt/slides/slide9.xml><?xml version="1.0" encoding="utf-8"?>
+<p:sld xmlns:a="http://schemas.openxmlformats.org/drawingml/2006/main" xmlns:r="http://schemas.openxmlformats.org/officeDocument/2006/relationships" xmlns:p="http://schemas.openxmlformats.org/presentationml/2006/main">
+  <p:cSld>
+    <p:spTree>
+      <p:nvGrpSpPr>
+        <p:cNvPr id="1" name=""/>
+        <p:cNvGrpSpPr/>
+        <p:nvPr/>
+      </p:nvGrpSpPr>
+      <p:grpSpPr>
+        <a:xfrm>
+          <a:off x="0" y="0"/>
+          <a:ext cx="0" cy="0"/>
+          <a:chOff x="0" y="0"/>
+          <a:chExt cx="0" cy="0"/>
+        </a:xfrm>
+      </p:grpSpPr>
+      <p:sp>
+        <p:nvSpPr>
+          <p:cNvPr id="2" name="Title 1"/>
+          <p:cNvSpPr>
+            <a:spLocks noGrp="1"/>
+          </p:cNvSpPr>
+          <p:nvPr>
+            <p:ph type="title"/>
+          </p:nvPr>
+        </p:nvSpPr>
+        <p:spPr/>
+        <p:txBody>
+          <a:bodyPr/>
+          <a:lstStyle/>
+          <a:p>
+            <a:pPr lvl="0" indent="0" marL="0">
+              <a:buNone/>
+            </a:pPr>
+            <a:r>
+              <a:rPr/>
+              <a:t>Gesundheitsauswirkungen in Regionen</a:t>
+            </a:r>
+          </a:p>
+        </p:txBody>
+      </p:sp>
+      <p:pic>
+        <p:nvPicPr>
+          <p:cNvPr descr="03_burden_calculations_files/figure-pptx/fig-ballubgsraeume-1.png" id="0" name="Picture 1"/>
+          <p:cNvPicPr>
+            <a:picLocks noGrp="1" noChangeAspect="1"/>
+          </p:cNvPicPr>
+          <p:nvPr/>
+        </p:nvPicPr>
+        <p:blipFill>
+          <a:blip r:embed="rId2"/>
+          <a:stretch>
+            <a:fillRect/>
+          </a:stretch>
+        </p:blipFill>
+        <p:spPr bwMode="auto">
+          <a:xfrm>
+            <a:off x="1689100" y="1193800"/>
+            <a:ext cx="5765800" cy="2882900"/>
+          </a:xfrm>
+          <a:prstGeom prst="rect">
+            <a:avLst/>
+          </a:prstGeom>
+          <a:noFill/>
+          <a:ln w="9525">
+            <a:noFill/>
+            <a:headEnd/>
+            <a:tailEnd/>
+          </a:ln>
+        </p:spPr>
+      </p:pic>
+      <p:sp>
+        <p:nvSpPr>
+          <p:cNvPr id="1" name="TextBox 3"/>
+          <p:cNvSpPr txBox="1"/>
+          <p:nvPr>
+            <p:ph idx="1"/>
+          </p:nvPr>
+        </p:nvSpPr>
+        <p:spPr>
+          <a:xfrm>
+            <a:off x="457200" y="4076700"/>
+            <a:ext cx="8229600" cy="508000"/>
+          </a:xfrm>
+          <a:prstGeom prst="rect">
+            <a:avLst/>
+          </a:prstGeom>
+          <a:noFill/>
+        </p:spPr>
+        <p:txBody>
+          <a:bodyPr/>
+          <a:lstStyle/>
+          <a:p>
+            <a:pPr lvl="0" indent="0" marL="0" algn="ctr">
+              <a:buNone/>
+            </a:pPr>
+            <a:r>
+              <a:rPr/>
+              <a:t>Figure 2</a:t>
+            </a:r>
+          </a:p>
+        </p:txBody>
+      </p:sp>
     </p:spTree>
   </p:cSld>
 </p:sld>
